--- a/EPiQS Presentation.pptx
+++ b/EPiQS Presentation.pptx
@@ -5,7 +5,7 @@
     <p:sldMasterId id="2147483648" r:id="rId1"/>
   </p:sldMasterIdLst>
   <p:notesMasterIdLst>
-    <p:notesMasterId r:id="rId27"/>
+    <p:notesMasterId r:id="rId28"/>
   </p:notesMasterIdLst>
   <p:sldIdLst>
     <p:sldId id="256" r:id="rId2"/>
@@ -16,23 +16,24 @@
     <p:sldId id="277" r:id="rId7"/>
     <p:sldId id="280" r:id="rId8"/>
     <p:sldId id="281" r:id="rId9"/>
-    <p:sldId id="282" r:id="rId10"/>
-    <p:sldId id="257" r:id="rId11"/>
-    <p:sldId id="258" r:id="rId12"/>
-    <p:sldId id="260" r:id="rId13"/>
-    <p:sldId id="259" r:id="rId14"/>
-    <p:sldId id="263" r:id="rId15"/>
-    <p:sldId id="261" r:id="rId16"/>
-    <p:sldId id="264" r:id="rId17"/>
-    <p:sldId id="262" r:id="rId18"/>
-    <p:sldId id="266" r:id="rId19"/>
-    <p:sldId id="267" r:id="rId20"/>
-    <p:sldId id="268" r:id="rId21"/>
-    <p:sldId id="269" r:id="rId22"/>
-    <p:sldId id="270" r:id="rId23"/>
-    <p:sldId id="271" r:id="rId24"/>
-    <p:sldId id="273" r:id="rId25"/>
-    <p:sldId id="274" r:id="rId26"/>
+    <p:sldId id="283" r:id="rId10"/>
+    <p:sldId id="282" r:id="rId11"/>
+    <p:sldId id="257" r:id="rId12"/>
+    <p:sldId id="258" r:id="rId13"/>
+    <p:sldId id="260" r:id="rId14"/>
+    <p:sldId id="259" r:id="rId15"/>
+    <p:sldId id="263" r:id="rId16"/>
+    <p:sldId id="261" r:id="rId17"/>
+    <p:sldId id="264" r:id="rId18"/>
+    <p:sldId id="262" r:id="rId19"/>
+    <p:sldId id="266" r:id="rId20"/>
+    <p:sldId id="267" r:id="rId21"/>
+    <p:sldId id="268" r:id="rId22"/>
+    <p:sldId id="269" r:id="rId23"/>
+    <p:sldId id="270" r:id="rId24"/>
+    <p:sldId id="271" r:id="rId25"/>
+    <p:sldId id="273" r:id="rId26"/>
+    <p:sldId id="274" r:id="rId27"/>
   </p:sldIdLst>
   <p:sldSz cx="12192000" cy="6858000"/>
   <p:notesSz cx="6858000" cy="9144000"/>
@@ -221,7 +222,7 @@
           <a:p>
             <a:fld id="{025C375C-D27F-6B4F-A98C-867F54470A23}" type="datetimeFigureOut">
               <a:rPr lang="en-US" smtClean="0"/>
-              <a:t>5/27/2025</a:t>
+              <a:t>5/28/2025</a:t>
             </a:fld>
             <a:endParaRPr lang="en-US"/>
           </a:p>
@@ -917,7 +918,7 @@
           <a:p>
             <a:fld id="{2B26E810-B850-E246-B0DE-F696C472EDD6}" type="datetimeFigureOut">
               <a:rPr lang="en-US" smtClean="0"/>
-              <a:t>5/27/2025</a:t>
+              <a:t>5/28/2025</a:t>
             </a:fld>
             <a:endParaRPr lang="en-US"/>
           </a:p>
@@ -1115,7 +1116,7 @@
           <a:p>
             <a:fld id="{2B26E810-B850-E246-B0DE-F696C472EDD6}" type="datetimeFigureOut">
               <a:rPr lang="en-US" smtClean="0"/>
-              <a:t>5/27/2025</a:t>
+              <a:t>5/28/2025</a:t>
             </a:fld>
             <a:endParaRPr lang="en-US"/>
           </a:p>
@@ -1323,7 +1324,7 @@
           <a:p>
             <a:fld id="{2B26E810-B850-E246-B0DE-F696C472EDD6}" type="datetimeFigureOut">
               <a:rPr lang="en-US" smtClean="0"/>
-              <a:t>5/27/2025</a:t>
+              <a:t>5/28/2025</a:t>
             </a:fld>
             <a:endParaRPr lang="en-US"/>
           </a:p>
@@ -1521,7 +1522,7 @@
           <a:p>
             <a:fld id="{2B26E810-B850-E246-B0DE-F696C472EDD6}" type="datetimeFigureOut">
               <a:rPr lang="en-US" smtClean="0"/>
-              <a:t>5/27/2025</a:t>
+              <a:t>5/28/2025</a:t>
             </a:fld>
             <a:endParaRPr lang="en-US"/>
           </a:p>
@@ -1796,7 +1797,7 @@
           <a:p>
             <a:fld id="{2B26E810-B850-E246-B0DE-F696C472EDD6}" type="datetimeFigureOut">
               <a:rPr lang="en-US" smtClean="0"/>
-              <a:t>5/27/2025</a:t>
+              <a:t>5/28/2025</a:t>
             </a:fld>
             <a:endParaRPr lang="en-US"/>
           </a:p>
@@ -2061,7 +2062,7 @@
           <a:p>
             <a:fld id="{2B26E810-B850-E246-B0DE-F696C472EDD6}" type="datetimeFigureOut">
               <a:rPr lang="en-US" smtClean="0"/>
-              <a:t>5/27/2025</a:t>
+              <a:t>5/28/2025</a:t>
             </a:fld>
             <a:endParaRPr lang="en-US"/>
           </a:p>
@@ -2473,7 +2474,7 @@
           <a:p>
             <a:fld id="{2B26E810-B850-E246-B0DE-F696C472EDD6}" type="datetimeFigureOut">
               <a:rPr lang="en-US" smtClean="0"/>
-              <a:t>5/27/2025</a:t>
+              <a:t>5/28/2025</a:t>
             </a:fld>
             <a:endParaRPr lang="en-US"/>
           </a:p>
@@ -2614,7 +2615,7 @@
           <a:p>
             <a:fld id="{2B26E810-B850-E246-B0DE-F696C472EDD6}" type="datetimeFigureOut">
               <a:rPr lang="en-US" smtClean="0"/>
-              <a:t>5/27/2025</a:t>
+              <a:t>5/28/2025</a:t>
             </a:fld>
             <a:endParaRPr lang="en-US"/>
           </a:p>
@@ -2727,7 +2728,7 @@
           <a:p>
             <a:fld id="{2B26E810-B850-E246-B0DE-F696C472EDD6}" type="datetimeFigureOut">
               <a:rPr lang="en-US" smtClean="0"/>
-              <a:t>5/27/2025</a:t>
+              <a:t>5/28/2025</a:t>
             </a:fld>
             <a:endParaRPr lang="en-US"/>
           </a:p>
@@ -3038,7 +3039,7 @@
           <a:p>
             <a:fld id="{2B26E810-B850-E246-B0DE-F696C472EDD6}" type="datetimeFigureOut">
               <a:rPr lang="en-US" smtClean="0"/>
-              <a:t>5/27/2025</a:t>
+              <a:t>5/28/2025</a:t>
             </a:fld>
             <a:endParaRPr lang="en-US"/>
           </a:p>
@@ -3326,7 +3327,7 @@
           <a:p>
             <a:fld id="{2B26E810-B850-E246-B0DE-F696C472EDD6}" type="datetimeFigureOut">
               <a:rPr lang="en-US" smtClean="0"/>
-              <a:t>5/27/2025</a:t>
+              <a:t>5/28/2025</a:t>
             </a:fld>
             <a:endParaRPr lang="en-US"/>
           </a:p>
@@ -3567,7 +3568,7 @@
           <a:p>
             <a:fld id="{2B26E810-B850-E246-B0DE-F696C472EDD6}" type="datetimeFigureOut">
               <a:rPr lang="en-US" smtClean="0"/>
-              <a:t>5/27/2025</a:t>
+              <a:t>5/28/2025</a:t>
             </a:fld>
             <a:endParaRPr lang="en-US"/>
           </a:p>
@@ -4094,7 +4095,7 @@
           <p:cNvPr id="2" name="Title 1">
             <a:extLst>
               <a:ext uri="{FF2B5EF4-FFF2-40B4-BE49-F238E27FC236}">
-                <a16:creationId xmlns:a16="http://schemas.microsoft.com/office/drawing/2014/main" id="{DE8524F9-779D-994A-0AB0-040EA59FE1F6}"/>
+                <a16:creationId xmlns:a16="http://schemas.microsoft.com/office/drawing/2014/main" id="{CDD4BDE5-33DE-684C-9E1C-19F5C2A3CD0B}"/>
               </a:ext>
             </a:extLst>
           </p:cNvPr>
@@ -4107,24 +4108,26 @@
         </p:nvSpPr>
         <p:spPr/>
         <p:txBody>
-          <a:bodyPr/>
+          <a:bodyPr>
+            <a:normAutofit/>
+          </a:bodyPr>
           <a:lstStyle/>
           <a:p>
             <a:r>
-              <a:rPr lang="en-US" dirty="0"/>
-              <a:t>Heisenberg ladder</a:t>
+              <a:rPr lang="en-US" sz="3600" dirty="0"/>
+              <a:t>Breaking integrability</a:t>
             </a:r>
           </a:p>
         </p:txBody>
       </p:sp>
-      <mc:AlternateContent xmlns:mc="http://schemas.openxmlformats.org/markup-compatibility/2006" xmlns:a14="http://schemas.microsoft.com/office/drawing/2010/main">
-        <mc:Choice Requires="a14">
+      <mc:AlternateContent xmlns:mc="http://schemas.openxmlformats.org/markup-compatibility/2006">
+        <mc:Choice xmlns:a14="http://schemas.microsoft.com/office/drawing/2010/main" Requires="a14">
           <p:sp>
             <p:nvSpPr>
               <p:cNvPr id="3" name="Content Placeholder 2">
                 <a:extLst>
                   <a:ext uri="{FF2B5EF4-FFF2-40B4-BE49-F238E27FC236}">
-                    <a16:creationId xmlns:a16="http://schemas.microsoft.com/office/drawing/2014/main" id="{04A861E5-A7C8-B1AD-AE63-B8B20D2B6949}"/>
+                    <a16:creationId xmlns:a16="http://schemas.microsoft.com/office/drawing/2014/main" id="{442794E6-2C64-4A60-29EE-766705E7A799}"/>
                   </a:ext>
                 </a:extLst>
               </p:cNvPr>
@@ -4137,16 +4140,21 @@
             </p:nvSpPr>
             <p:spPr/>
             <p:txBody>
-              <a:bodyPr>
-                <a:normAutofit/>
-              </a:bodyPr>
+              <a:bodyPr/>
               <a:lstStyle/>
               <a:p>
                 <a:r>
                   <a:rPr lang="en-US" dirty="0"/>
-                  <a:t>Introduce rung terms coupling two Heisenberg chains to break integrability</a:t>
+                  <a:t>Non-integrable models are generally diffusive</a:t>
                 </a:r>
-                <a:endParaRPr lang="en-US" b="0" i="1" dirty="0"/>
+              </a:p>
+              <a:p>
+                <a:pPr marL="0" indent="0">
+                  <a:buNone/>
+                </a:pPr>
+                <a:endParaRPr lang="en-US" b="0" i="1" dirty="0">
+                  <a:latin typeface="Cambria Math" panose="02040503050406030204" pitchFamily="18" charset="0"/>
+                </a:endParaRPr>
               </a:p>
               <a:p>
                 <a:pPr marL="0" indent="0">
@@ -4155,7 +4163,7 @@
                 <a14:m>
                   <m:oMathPara xmlns:m="http://schemas.openxmlformats.org/officeDocument/2006/math">
                     <m:oMathParaPr>
-                      <m:jc m:val="centerGroup"/>
+                      <m:jc m:val="center"/>
                     </m:oMathParaPr>
                     <m:oMath xmlns:m="http://schemas.openxmlformats.org/officeDocument/2006/math">
                       <m:r>
@@ -4170,199 +4178,28 @@
                         </a:rPr>
                         <m:t>=</m:t>
                       </m:r>
-                      <m:r>
-                        <a:rPr lang="en-US" b="0" i="1" smtClean="0">
-                          <a:latin typeface="Cambria Math" panose="02040503050406030204" pitchFamily="18" charset="0"/>
-                        </a:rPr>
-                        <m:t>𝐽</m:t>
-                      </m:r>
-                      <m:nary>
-                        <m:naryPr>
-                          <m:chr m:val="∑"/>
-                          <m:supHide m:val="on"/>
+                      <m:sSub>
+                        <m:sSubPr>
                           <m:ctrlPr>
                             <a:rPr lang="en-US" b="0" i="1" smtClean="0">
                               <a:latin typeface="Cambria Math" panose="02040503050406030204" pitchFamily="18" charset="0"/>
                             </a:rPr>
                           </m:ctrlPr>
-                        </m:naryPr>
-                        <m:sub>
-                          <m:r>
-                            <m:rPr>
-                              <m:brk m:alnAt="7"/>
-                            </m:rPr>
-                            <a:rPr lang="en-US" b="0" i="1" smtClean="0">
-                              <a:latin typeface="Cambria Math" panose="02040503050406030204" pitchFamily="18" charset="0"/>
-                            </a:rPr>
-                            <m:t>&lt;</m:t>
-                          </m:r>
+                        </m:sSubPr>
+                        <m:e>
                           <m:r>
                             <a:rPr lang="en-US" b="0" i="1" smtClean="0">
                               <a:latin typeface="Cambria Math" panose="02040503050406030204" pitchFamily="18" charset="0"/>
                             </a:rPr>
-                            <m:t>𝑖</m:t>
+                            <m:t>𝐻</m:t>
                           </m:r>
+                        </m:e>
+                        <m:sub>
                           <m:r>
                             <a:rPr lang="en-US" b="0" i="1" smtClean="0">
                               <a:latin typeface="Cambria Math" panose="02040503050406030204" pitchFamily="18" charset="0"/>
                             </a:rPr>
-                            <m:t>,</m:t>
-                          </m:r>
-                          <m:r>
-                            <a:rPr lang="en-US" b="0" i="1" smtClean="0">
-                              <a:latin typeface="Cambria Math" panose="02040503050406030204" pitchFamily="18" charset="0"/>
-                            </a:rPr>
-                            <m:t>𝑗</m:t>
-                          </m:r>
-                          <m:r>
-                            <a:rPr lang="en-US" b="0" i="1" smtClean="0">
-                              <a:latin typeface="Cambria Math" panose="02040503050406030204" pitchFamily="18" charset="0"/>
-                            </a:rPr>
-                            <m:t>&gt;</m:t>
-                          </m:r>
-                        </m:sub>
-                        <m:sup/>
-                        <m:e>
-                          <m:sSub>
-                            <m:sSubPr>
-                              <m:ctrlPr>
-                                <a:rPr lang="en-US" b="0" i="1" dirty="0" smtClean="0">
-                                  <a:latin typeface="Cambria Math" panose="02040503050406030204" pitchFamily="18" charset="0"/>
-                                </a:rPr>
-                              </m:ctrlPr>
-                            </m:sSubPr>
-                            <m:e>
-                              <m:acc>
-                                <m:accPr>
-                                  <m:chr m:val="⃗"/>
-                                  <m:ctrlPr>
-                                    <a:rPr lang="en-US" b="0" i="1" dirty="0" smtClean="0">
-                                      <a:latin typeface="Cambria Math" panose="02040503050406030204" pitchFamily="18" charset="0"/>
-                                    </a:rPr>
-                                  </m:ctrlPr>
-                                </m:accPr>
-                                <m:e>
-                                  <m:r>
-                                    <a:rPr lang="en-US" b="0" i="1" dirty="0" smtClean="0">
-                                      <a:latin typeface="Cambria Math" panose="02040503050406030204" pitchFamily="18" charset="0"/>
-                                    </a:rPr>
-                                    <m:t>𝑆</m:t>
-                                  </m:r>
-                                </m:e>
-                              </m:acc>
-                            </m:e>
-                            <m:sub>
-                              <m:r>
-                                <a:rPr lang="en-US" b="0" i="1" dirty="0" smtClean="0">
-                                  <a:latin typeface="Cambria Math" panose="02040503050406030204" pitchFamily="18" charset="0"/>
-                                </a:rPr>
-                                <m:t>1,</m:t>
-                              </m:r>
-                              <m:r>
-                                <a:rPr lang="en-US" b="0" i="1" dirty="0" smtClean="0">
-                                  <a:latin typeface="Cambria Math" panose="02040503050406030204" pitchFamily="18" charset="0"/>
-                                </a:rPr>
-                                <m:t>𝑖</m:t>
-                              </m:r>
-                            </m:sub>
-                          </m:sSub>
-                        </m:e>
-                      </m:nary>
-                      <m:r>
-                        <a:rPr lang="en-US" b="0" i="1" smtClean="0">
-                          <a:latin typeface="Cambria Math" panose="02040503050406030204" pitchFamily="18" charset="0"/>
-                        </a:rPr>
-                        <m:t>⋅</m:t>
-                      </m:r>
-                      <m:sSub>
-                        <m:sSubPr>
-                          <m:ctrlPr>
-                            <a:rPr lang="en-US" b="0" i="1" dirty="0" smtClean="0">
-                              <a:latin typeface="Cambria Math" panose="02040503050406030204" pitchFamily="18" charset="0"/>
-                            </a:rPr>
-                          </m:ctrlPr>
-                        </m:sSubPr>
-                        <m:e>
-                          <m:acc>
-                            <m:accPr>
-                              <m:chr m:val="⃗"/>
-                              <m:ctrlPr>
-                                <a:rPr lang="en-US" b="0" i="1" dirty="0" smtClean="0">
-                                  <a:latin typeface="Cambria Math" panose="02040503050406030204" pitchFamily="18" charset="0"/>
-                                </a:rPr>
-                              </m:ctrlPr>
-                            </m:accPr>
-                            <m:e>
-                              <m:r>
-                                <a:rPr lang="en-US" b="0" i="1" dirty="0" smtClean="0">
-                                  <a:latin typeface="Cambria Math" panose="02040503050406030204" pitchFamily="18" charset="0"/>
-                                </a:rPr>
-                                <m:t>𝑆</m:t>
-                              </m:r>
-                            </m:e>
-                          </m:acc>
-                        </m:e>
-                        <m:sub>
-                          <m:r>
-                            <a:rPr lang="en-US" b="0" i="1" dirty="0" smtClean="0">
-                              <a:latin typeface="Cambria Math" panose="02040503050406030204" pitchFamily="18" charset="0"/>
-                            </a:rPr>
-                            <m:t>1,</m:t>
-                          </m:r>
-                          <m:r>
-                            <a:rPr lang="en-US" b="0" i="1" dirty="0" smtClean="0">
-                              <a:latin typeface="Cambria Math" panose="02040503050406030204" pitchFamily="18" charset="0"/>
-                            </a:rPr>
-                            <m:t>𝑗</m:t>
-                          </m:r>
-                        </m:sub>
-                      </m:sSub>
-                      <m:r>
-                        <a:rPr lang="en-US" b="0" i="1" dirty="0" smtClean="0">
-                          <a:latin typeface="Cambria Math" panose="02040503050406030204" pitchFamily="18" charset="0"/>
-                        </a:rPr>
-                        <m:t>+</m:t>
-                      </m:r>
-                      <m:sSub>
-                        <m:sSubPr>
-                          <m:ctrlPr>
-                            <a:rPr lang="en-US" b="0" i="1" dirty="0" smtClean="0">
-                              <a:latin typeface="Cambria Math" panose="02040503050406030204" pitchFamily="18" charset="0"/>
-                            </a:rPr>
-                          </m:ctrlPr>
-                        </m:sSubPr>
-                        <m:e>
-                          <m:acc>
-                            <m:accPr>
-                              <m:chr m:val="⃗"/>
-                              <m:ctrlPr>
-                                <a:rPr lang="en-US" b="0" i="1" dirty="0" smtClean="0">
-                                  <a:latin typeface="Cambria Math" panose="02040503050406030204" pitchFamily="18" charset="0"/>
-                                </a:rPr>
-                              </m:ctrlPr>
-                            </m:accPr>
-                            <m:e>
-                              <m:r>
-                                <a:rPr lang="en-US" b="0" i="1" dirty="0" smtClean="0">
-                                  <a:latin typeface="Cambria Math" panose="02040503050406030204" pitchFamily="18" charset="0"/>
-                                </a:rPr>
-                                <m:t>𝑆</m:t>
-                              </m:r>
-                            </m:e>
-                          </m:acc>
-                        </m:e>
-                        <m:sub>
-                          <m:r>
-                            <a:rPr lang="en-US" b="0" i="1" dirty="0" smtClean="0">
-                              <a:latin typeface="Cambria Math" panose="02040503050406030204" pitchFamily="18" charset="0"/>
-                            </a:rPr>
-                            <m:t>2,</m:t>
-                          </m:r>
-                          <m:r>
-                            <a:rPr lang="en-US" b="0" i="1" dirty="0" smtClean="0">
-                              <a:latin typeface="Cambria Math" panose="02040503050406030204" pitchFamily="18" charset="0"/>
-                            </a:rPr>
-                            <m:t>𝑖</m:t>
+                            <m:t>0</m:t>
                           </m:r>
                         </m:sub>
                       </m:sSub>
@@ -4370,366 +4207,221 @@
                         <a:rPr lang="en-US" b="0" i="1" smtClean="0">
                           <a:latin typeface="Cambria Math" panose="02040503050406030204" pitchFamily="18" charset="0"/>
                         </a:rPr>
-                        <m:t>⋅</m:t>
+                        <m:t>+</m:t>
                       </m:r>
-                      <m:sSub>
-                        <m:sSubPr>
-                          <m:ctrlPr>
-                            <a:rPr lang="en-US" b="0" i="1" dirty="0" smtClean="0">
-                              <a:latin typeface="Cambria Math" panose="02040503050406030204" pitchFamily="18" charset="0"/>
-                            </a:rPr>
-                          </m:ctrlPr>
-                        </m:sSubPr>
-                        <m:e>
-                          <m:acc>
-                            <m:accPr>
-                              <m:chr m:val="⃗"/>
-                              <m:ctrlPr>
-                                <a:rPr lang="en-US" b="0" i="1" dirty="0" smtClean="0">
-                                  <a:latin typeface="Cambria Math" panose="02040503050406030204" pitchFamily="18" charset="0"/>
-                                </a:rPr>
-                              </m:ctrlPr>
-                            </m:accPr>
-                            <m:e>
-                              <m:r>
-                                <a:rPr lang="en-US" b="0" i="1" dirty="0" smtClean="0">
-                                  <a:latin typeface="Cambria Math" panose="02040503050406030204" pitchFamily="18" charset="0"/>
-                                </a:rPr>
-                                <m:t>𝑆</m:t>
-                              </m:r>
-                            </m:e>
-                          </m:acc>
-                        </m:e>
-                        <m:sub>
-                          <m:r>
-                            <a:rPr lang="en-US" b="0" i="1" dirty="0" smtClean="0">
-                              <a:latin typeface="Cambria Math" panose="02040503050406030204" pitchFamily="18" charset="0"/>
-                            </a:rPr>
-                            <m:t>2,</m:t>
-                          </m:r>
-                          <m:r>
-                            <a:rPr lang="en-US" b="0" i="1" dirty="0" smtClean="0">
-                              <a:latin typeface="Cambria Math" panose="02040503050406030204" pitchFamily="18" charset="0"/>
-                            </a:rPr>
-                            <m:t>𝑗</m:t>
-                          </m:r>
-                        </m:sub>
-                      </m:sSub>
                       <m:r>
-                        <a:rPr lang="en-US" b="0" i="0" dirty="0" smtClean="0">
+                        <a:rPr lang="en-US" b="0" i="1" smtClean="0">
                           <a:latin typeface="Cambria Math" panose="02040503050406030204" pitchFamily="18" charset="0"/>
                         </a:rPr>
-                        <m:t>+</m:t>
+                        <m:t>𝜆</m:t>
                       </m:r>
-                      <m:sSup>
-                        <m:sSupPr>
-                          <m:ctrlPr>
-                            <a:rPr lang="en-US" b="0" i="1" smtClean="0">
-                              <a:latin typeface="Cambria Math" panose="02040503050406030204" pitchFamily="18" charset="0"/>
-                            </a:rPr>
-                          </m:ctrlPr>
-                        </m:sSupPr>
-                        <m:e>
-                          <m:r>
-                            <a:rPr lang="en-US" b="0" i="1" smtClean="0">
-                              <a:latin typeface="Cambria Math" panose="02040503050406030204" pitchFamily="18" charset="0"/>
-                            </a:rPr>
-                            <m:t>𝐽</m:t>
-                          </m:r>
-                        </m:e>
-                        <m:sup>
-                          <m:r>
-                            <a:rPr lang="en-US" b="0" i="1" smtClean="0">
-                              <a:latin typeface="Cambria Math" panose="02040503050406030204" pitchFamily="18" charset="0"/>
-                            </a:rPr>
-                            <m:t>′</m:t>
-                          </m:r>
-                        </m:sup>
-                      </m:sSup>
-                      <m:nary>
-                        <m:naryPr>
-                          <m:chr m:val="∑"/>
-                          <m:supHide m:val="on"/>
-                          <m:ctrlPr>
-                            <a:rPr lang="en-US" b="0" i="1" smtClean="0">
-                              <a:latin typeface="Cambria Math" panose="02040503050406030204" pitchFamily="18" charset="0"/>
-                            </a:rPr>
-                          </m:ctrlPr>
-                        </m:naryPr>
-                        <m:sub>
-                          <m:r>
-                            <a:rPr lang="en-US" b="0" i="1" smtClean="0">
-                              <a:latin typeface="Cambria Math" panose="02040503050406030204" pitchFamily="18" charset="0"/>
-                            </a:rPr>
-                            <m:t>𝑖</m:t>
-                          </m:r>
-                        </m:sub>
-                        <m:sup/>
-                        <m:e>
-                          <m:sSub>
-                            <m:sSubPr>
-                              <m:ctrlPr>
-                                <a:rPr lang="en-US" b="0" i="1" dirty="0" smtClean="0">
-                                  <a:latin typeface="Cambria Math" panose="02040503050406030204" pitchFamily="18" charset="0"/>
-                                </a:rPr>
-                              </m:ctrlPr>
-                            </m:sSubPr>
-                            <m:e>
-                              <m:acc>
-                                <m:accPr>
-                                  <m:chr m:val="⃗"/>
-                                  <m:ctrlPr>
-                                    <a:rPr lang="en-US" b="0" i="1" dirty="0" smtClean="0">
-                                      <a:latin typeface="Cambria Math" panose="02040503050406030204" pitchFamily="18" charset="0"/>
-                                    </a:rPr>
-                                  </m:ctrlPr>
-                                </m:accPr>
-                                <m:e>
-                                  <m:r>
-                                    <a:rPr lang="en-US" b="0" i="1" dirty="0" smtClean="0">
-                                      <a:latin typeface="Cambria Math" panose="02040503050406030204" pitchFamily="18" charset="0"/>
-                                    </a:rPr>
-                                    <m:t>𝑆</m:t>
-                                  </m:r>
-                                </m:e>
-                              </m:acc>
-                            </m:e>
-                            <m:sub>
-                              <m:r>
-                                <a:rPr lang="en-US" b="0" i="1" dirty="0" smtClean="0">
-                                  <a:latin typeface="Cambria Math" panose="02040503050406030204" pitchFamily="18" charset="0"/>
-                                </a:rPr>
-                                <m:t>1,</m:t>
-                              </m:r>
-                              <m:r>
-                                <a:rPr lang="en-US" b="0" i="1" dirty="0" smtClean="0">
-                                  <a:latin typeface="Cambria Math" panose="02040503050406030204" pitchFamily="18" charset="0"/>
-                                </a:rPr>
-                                <m:t>𝑖</m:t>
-                              </m:r>
-                            </m:sub>
-                          </m:sSub>
-                          <m:r>
-                            <a:rPr lang="en-US" b="0" i="1" smtClean="0">
-                              <a:latin typeface="Cambria Math" panose="02040503050406030204" pitchFamily="18" charset="0"/>
-                            </a:rPr>
-                            <m:t>⋅</m:t>
-                          </m:r>
-                          <m:sSub>
-                            <m:sSubPr>
-                              <m:ctrlPr>
-                                <a:rPr lang="en-US" b="0" i="1" dirty="0" smtClean="0">
-                                  <a:latin typeface="Cambria Math" panose="02040503050406030204" pitchFamily="18" charset="0"/>
-                                </a:rPr>
-                              </m:ctrlPr>
-                            </m:sSubPr>
-                            <m:e>
-                              <m:acc>
-                                <m:accPr>
-                                  <m:chr m:val="⃗"/>
-                                  <m:ctrlPr>
-                                    <a:rPr lang="en-US" b="0" i="1" dirty="0" smtClean="0">
-                                      <a:latin typeface="Cambria Math" panose="02040503050406030204" pitchFamily="18" charset="0"/>
-                                    </a:rPr>
-                                  </m:ctrlPr>
-                                </m:accPr>
-                                <m:e>
-                                  <m:r>
-                                    <a:rPr lang="en-US" b="0" i="1" dirty="0" smtClean="0">
-                                      <a:latin typeface="Cambria Math" panose="02040503050406030204" pitchFamily="18" charset="0"/>
-                                    </a:rPr>
-                                    <m:t>𝑆</m:t>
-                                  </m:r>
-                                </m:e>
-                              </m:acc>
-                            </m:e>
-                            <m:sub>
-                              <m:r>
-                                <a:rPr lang="en-US" b="0" i="1" dirty="0" smtClean="0">
-                                  <a:latin typeface="Cambria Math" panose="02040503050406030204" pitchFamily="18" charset="0"/>
-                                </a:rPr>
-                                <m:t>2,</m:t>
-                              </m:r>
-                              <m:r>
-                                <a:rPr lang="en-US" b="0" i="1" dirty="0" smtClean="0">
-                                  <a:latin typeface="Cambria Math" panose="02040503050406030204" pitchFamily="18" charset="0"/>
-                                </a:rPr>
-                                <m:t>𝑖</m:t>
-                              </m:r>
-                            </m:sub>
-                          </m:sSub>
-                        </m:e>
-                      </m:nary>
+                      <m:r>
+                        <a:rPr lang="en-US" b="0" i="1" smtClean="0">
+                          <a:latin typeface="Cambria Math" panose="02040503050406030204" pitchFamily="18" charset="0"/>
+                        </a:rPr>
+                        <m:t>𝐻</m:t>
+                      </m:r>
+                      <m:r>
+                        <a:rPr lang="en-US" b="0" i="1" smtClean="0">
+                          <a:latin typeface="Cambria Math" panose="02040503050406030204" pitchFamily="18" charset="0"/>
+                        </a:rPr>
+                        <m:t>′</m:t>
+                      </m:r>
                     </m:oMath>
                   </m:oMathPara>
                 </a14:m>
-                <a:endParaRPr lang="en-US" b="0" dirty="0"/>
+                <a:endParaRPr lang="en-US" dirty="0"/>
               </a:p>
               <a:p>
+                <a:endParaRPr lang="en-US" dirty="0"/>
+              </a:p>
+              <a:p>
+                <a:pPr marL="0" indent="0">
+                  <a:buNone/>
+                </a:pPr>
                 <a:r>
-                  <a:rPr lang="en-US" dirty="0"/>
-                  <a:t>Decoupled ladders (</a:t>
+                  <a:rPr lang="en-US" b="1" dirty="0">
+                    <a:solidFill>
+                      <a:schemeClr val="accent1"/>
+                    </a:solidFill>
+                  </a:rPr>
+                  <a:t>Question: </a:t>
+                </a:r>
+                <a:r>
+                  <a:rPr lang="en-US" dirty="0">
+                    <a:solidFill>
+                      <a:schemeClr val="accent1"/>
+                    </a:solidFill>
+                  </a:rPr>
+                  <a:t>How does the timescale of diffusion onset </a:t>
                 </a:r>
                 <a14:m>
                   <m:oMath xmlns:m="http://schemas.openxmlformats.org/officeDocument/2006/math">
-                    <m:sSup>
-                      <m:sSupPr>
+                    <m:sSub>
+                      <m:sSubPr>
                         <m:ctrlPr>
                           <a:rPr lang="en-US" b="0" i="1" smtClean="0">
+                            <a:solidFill>
+                              <a:schemeClr val="accent1"/>
+                            </a:solidFill>
                             <a:latin typeface="Cambria Math" panose="02040503050406030204" pitchFamily="18" charset="0"/>
                           </a:rPr>
                         </m:ctrlPr>
-                      </m:sSupPr>
+                      </m:sSubPr>
                       <m:e>
                         <m:r>
                           <a:rPr lang="en-US" b="0" i="1" smtClean="0">
+                            <a:solidFill>
+                              <a:schemeClr val="accent1"/>
+                            </a:solidFill>
                             <a:latin typeface="Cambria Math" panose="02040503050406030204" pitchFamily="18" charset="0"/>
                           </a:rPr>
-                          <m:t>𝐽</m:t>
+                          <m:t>𝑡</m:t>
                         </m:r>
                       </m:e>
-                      <m:sup>
+                      <m:sub>
                         <m:r>
                           <a:rPr lang="en-US" b="0" i="1" smtClean="0">
+                            <a:solidFill>
+                              <a:schemeClr val="accent1"/>
+                            </a:solidFill>
                             <a:latin typeface="Cambria Math" panose="02040503050406030204" pitchFamily="18" charset="0"/>
                           </a:rPr>
-                          <m:t>′</m:t>
+                          <m:t>∗</m:t>
                         </m:r>
-                      </m:sup>
-                    </m:sSup>
+                      </m:sub>
+                    </m:sSub>
+                  </m:oMath>
+                </a14:m>
+                <a:r>
+                  <a:rPr lang="en-US" dirty="0">
+                    <a:solidFill>
+                      <a:schemeClr val="accent1"/>
+                    </a:solidFill>
+                  </a:rPr>
+                  <a:t> scale with the integrability breaking strength</a:t>
+                </a:r>
+                <a14:m>
+                  <m:oMath xmlns:m="http://schemas.openxmlformats.org/officeDocument/2006/math">
+                    <m:r>
+                      <a:rPr lang="en-US" b="0" i="0" smtClean="0">
+                        <a:solidFill>
+                          <a:schemeClr val="accent1"/>
+                        </a:solidFill>
+                        <a:latin typeface="Cambria Math" panose="02040503050406030204" pitchFamily="18" charset="0"/>
+                      </a:rPr>
+                      <m:t> </m:t>
+                    </m:r>
                     <m:r>
                       <a:rPr lang="en-US" b="0" i="1" smtClean="0">
+                        <a:solidFill>
+                          <a:schemeClr val="accent1"/>
+                        </a:solidFill>
                         <a:latin typeface="Cambria Math" panose="02040503050406030204" pitchFamily="18" charset="0"/>
                       </a:rPr>
-                      <m:t>=0</m:t>
+                      <m:t>𝜆</m:t>
                     </m:r>
                   </m:oMath>
                 </a14:m>
                 <a:r>
-                  <a:rPr lang="en-US" dirty="0"/>
-                  <a:t>) show typical superdiffusive scaling of transport: </a:t>
+                  <a:rPr lang="en-US" dirty="0">
+                    <a:solidFill>
+                      <a:schemeClr val="accent1"/>
+                    </a:solidFill>
+                  </a:rPr>
+                  <a:t>?</a:t>
+                </a:r>
+              </a:p>
+              <a:p>
+                <a:pPr marL="0" indent="0">
+                  <a:buNone/>
+                </a:pPr>
+                <a:endParaRPr lang="en-US" dirty="0">
+                  <a:solidFill>
+                    <a:schemeClr val="accent1"/>
+                  </a:solidFill>
+                </a:endParaRPr>
+              </a:p>
+              <a:p>
+                <a:pPr marL="0" indent="0" algn="ctr">
+                  <a:buNone/>
+                </a:pPr>
+                <a:r>
+                  <a:rPr lang="en-US" dirty="0">
+                    <a:solidFill>
+                      <a:srgbClr val="FF0000"/>
+                    </a:solidFill>
+                  </a:rPr>
+                  <a:t>Depends on if</a:t>
                 </a:r>
                 <a14:m>
                   <m:oMath xmlns:m="http://schemas.openxmlformats.org/officeDocument/2006/math">
                     <m:r>
-                      <a:rPr lang="en-US" b="0" i="1" smtClean="0">
+                      <a:rPr lang="en-US" b="0" i="0" dirty="0" smtClean="0">
+                        <a:solidFill>
+                          <a:srgbClr val="FF0000"/>
+                        </a:solidFill>
                         <a:latin typeface="Cambria Math" panose="02040503050406030204" pitchFamily="18" charset="0"/>
                       </a:rPr>
-                      <m:t>𝑡</m:t>
+                      <m:t> </m:t>
                     </m:r>
                     <m:r>
-                      <a:rPr lang="en-US" b="0" i="1" smtClean="0">
+                      <a:rPr lang="en-US" i="1" dirty="0" smtClean="0">
+                        <a:solidFill>
+                          <a:srgbClr val="FF0000"/>
+                        </a:solidFill>
                         <a:latin typeface="Cambria Math" panose="02040503050406030204" pitchFamily="18" charset="0"/>
                       </a:rPr>
-                      <m:t>∼</m:t>
+                      <m:t>𝐻</m:t>
                     </m:r>
-                    <m:sSup>
-                      <m:sSupPr>
-                        <m:ctrlPr>
-                          <a:rPr lang="en-US" b="0" i="1" smtClean="0">
-                            <a:latin typeface="Cambria Math" panose="02040503050406030204" pitchFamily="18" charset="0"/>
-                          </a:rPr>
-                        </m:ctrlPr>
-                      </m:sSupPr>
-                      <m:e>
-                        <m:r>
-                          <a:rPr lang="en-US" b="0" i="1" smtClean="0">
-                            <a:latin typeface="Cambria Math" panose="02040503050406030204" pitchFamily="18" charset="0"/>
-                          </a:rPr>
-                          <m:t>𝑥</m:t>
-                        </m:r>
-                      </m:e>
-                      <m:sup>
-                        <m:r>
-                          <a:rPr lang="en-US" b="0" i="1" smtClean="0">
-                            <a:latin typeface="Cambria Math" panose="02040503050406030204" pitchFamily="18" charset="0"/>
-                          </a:rPr>
-                          <m:t>𝑧</m:t>
-                        </m:r>
-                      </m:sup>
-                    </m:sSup>
+                    <m:r>
+                      <a:rPr lang="en-US" b="0" i="1" dirty="0" smtClean="0">
+                        <a:solidFill>
+                          <a:srgbClr val="FF0000"/>
+                        </a:solidFill>
+                        <a:latin typeface="Cambria Math" panose="02040503050406030204" pitchFamily="18" charset="0"/>
+                      </a:rPr>
+                      <m:t>′</m:t>
+                    </m:r>
                   </m:oMath>
                 </a14:m>
                 <a:r>
-                  <a:rPr lang="en-US" dirty="0"/>
-                  <a:t> with </a:t>
+                  <a:rPr lang="en-US" dirty="0">
+                    <a:solidFill>
+                      <a:srgbClr val="FF0000"/>
+                    </a:solidFill>
+                  </a:rPr>
+                  <a:t> preserves the global symmetry </a:t>
                 </a:r>
                 <a14:m>
                   <m:oMath xmlns:m="http://schemas.openxmlformats.org/officeDocument/2006/math">
                     <m:r>
                       <a:rPr lang="en-US" i="1" dirty="0" smtClean="0">
+                        <a:solidFill>
+                          <a:srgbClr val="FF0000"/>
+                        </a:solidFill>
                         <a:latin typeface="Cambria Math" panose="02040503050406030204" pitchFamily="18" charset="0"/>
                       </a:rPr>
-                      <m:t>𝑧</m:t>
-                    </m:r>
-                    <m:r>
-                      <a:rPr lang="en-US" b="0" i="1" dirty="0" smtClean="0">
-                        <a:latin typeface="Cambria Math" panose="02040503050406030204" pitchFamily="18" charset="0"/>
-                      </a:rPr>
-                      <m:t>=</m:t>
-                    </m:r>
-                    <m:r>
-                      <a:rPr lang="en-US" i="1" dirty="0" smtClean="0">
-                        <a:latin typeface="Cambria Math" panose="02040503050406030204" pitchFamily="18" charset="0"/>
-                      </a:rPr>
-                      <m:t>3/2</m:t>
+                      <m:t>𝐺</m:t>
                     </m:r>
                   </m:oMath>
                 </a14:m>
-                <a:r>
-                  <a:rPr lang="en-US" dirty="0"/>
-                  <a:t> at all timescales after local equilibration</a:t>
-                </a:r>
-              </a:p>
-              <a:p>
-                <a:r>
-                  <a:rPr lang="en-US" dirty="0"/>
-                  <a:t>Question: How does the timescale of diffusion offset scale with the integrability breaking term </a:t>
-                </a:r>
-                <a14:m>
-                  <m:oMath xmlns:m="http://schemas.openxmlformats.org/officeDocument/2006/math">
-                    <m:sSup>
-                      <m:sSupPr>
-                        <m:ctrlPr>
-                          <a:rPr lang="en-US" b="0" i="1" smtClean="0">
-                            <a:latin typeface="Cambria Math" panose="02040503050406030204" pitchFamily="18" charset="0"/>
-                          </a:rPr>
-                        </m:ctrlPr>
-                      </m:sSupPr>
-                      <m:e>
-                        <m:r>
-                          <a:rPr lang="en-US" b="0" i="1" smtClean="0">
-                            <a:latin typeface="Cambria Math" panose="02040503050406030204" pitchFamily="18" charset="0"/>
-                          </a:rPr>
-                          <m:t>𝐽</m:t>
-                        </m:r>
-                      </m:e>
-                      <m:sup>
-                        <m:r>
-                          <a:rPr lang="en-US" b="0" i="1" smtClean="0">
-                            <a:latin typeface="Cambria Math" panose="02040503050406030204" pitchFamily="18" charset="0"/>
-                          </a:rPr>
-                          <m:t>′</m:t>
-                        </m:r>
-                      </m:sup>
-                    </m:sSup>
-                  </m:oMath>
-                </a14:m>
-                <a:r>
-                  <a:rPr lang="en-US" dirty="0"/>
-                  <a:t>?</a:t>
-                </a:r>
+                <a:endParaRPr lang="en-US" dirty="0">
+                  <a:solidFill>
+                    <a:srgbClr val="FF0000"/>
+                  </a:solidFill>
+                </a:endParaRPr>
               </a:p>
             </p:txBody>
           </p:sp>
         </mc:Choice>
-        <mc:Fallback xmlns="">
+        <mc:Fallback>
           <p:sp>
             <p:nvSpPr>
               <p:cNvPr id="3" name="Content Placeholder 2">
                 <a:extLst>
                   <a:ext uri="{FF2B5EF4-FFF2-40B4-BE49-F238E27FC236}">
-                    <a16:creationId xmlns:a16="http://schemas.microsoft.com/office/drawing/2014/main" id="{04A861E5-A7C8-B1AD-AE63-B8B20D2B6949}"/>
+                    <a16:creationId xmlns:a16="http://schemas.microsoft.com/office/drawing/2014/main" id="{442794E6-2C64-4A60-29EE-766705E7A799}"/>
                   </a:ext>
                 </a:extLst>
               </p:cNvPr>
@@ -4744,7 +4436,7 @@
               <a:blipFill>
                 <a:blip r:embed="rId2"/>
                 <a:stretch>
-                  <a:fillRect l="-1086" t="-18314"/>
+                  <a:fillRect l="-1217" t="-2241"/>
                 </a:stretch>
               </a:blipFill>
             </p:spPr>
@@ -4763,6 +4455,1323 @@
           </p:sp>
         </mc:Fallback>
       </mc:AlternateContent>
+    </p:spTree>
+    <p:extLst>
+      <p:ext uri="{BB962C8B-B14F-4D97-AF65-F5344CB8AC3E}">
+        <p14:creationId xmlns:p14="http://schemas.microsoft.com/office/powerpoint/2010/main" val="598623828"/>
+      </p:ext>
+    </p:extLst>
+  </p:cSld>
+  <p:clrMapOvr>
+    <a:masterClrMapping/>
+  </p:clrMapOvr>
+</p:sld>
+</file>
+
+<file path=ppt/slides/slide11.xml><?xml version="1.0" encoding="utf-8"?>
+<p:sld xmlns:a="http://schemas.openxmlformats.org/drawingml/2006/main" xmlns:r="http://schemas.openxmlformats.org/officeDocument/2006/relationships" xmlns:p="http://schemas.openxmlformats.org/presentationml/2006/main">
+  <p:cSld>
+    <p:spTree>
+      <p:nvGrpSpPr>
+        <p:cNvPr id="1" name=""/>
+        <p:cNvGrpSpPr/>
+        <p:nvPr/>
+      </p:nvGrpSpPr>
+      <p:grpSpPr>
+        <a:xfrm>
+          <a:off x="0" y="0"/>
+          <a:ext cx="0" cy="0"/>
+          <a:chOff x="0" y="0"/>
+          <a:chExt cx="0" cy="0"/>
+        </a:xfrm>
+      </p:grpSpPr>
+      <p:sp>
+        <p:nvSpPr>
+          <p:cNvPr id="2" name="Title 1">
+            <a:extLst>
+              <a:ext uri="{FF2B5EF4-FFF2-40B4-BE49-F238E27FC236}">
+                <a16:creationId xmlns:a16="http://schemas.microsoft.com/office/drawing/2014/main" id="{DE8524F9-779D-994A-0AB0-040EA59FE1F6}"/>
+              </a:ext>
+            </a:extLst>
+          </p:cNvPr>
+          <p:cNvSpPr>
+            <a:spLocks noGrp="1"/>
+          </p:cNvSpPr>
+          <p:nvPr>
+            <p:ph type="title"/>
+          </p:nvPr>
+        </p:nvSpPr>
+        <p:spPr/>
+        <p:txBody>
+          <a:bodyPr>
+            <a:normAutofit/>
+          </a:bodyPr>
+          <a:lstStyle/>
+          <a:p>
+            <a:r>
+              <a:rPr lang="en-US" sz="3600" dirty="0"/>
+              <a:t>Heisenberg ladder</a:t>
+            </a:r>
+          </a:p>
+        </p:txBody>
+      </p:sp>
+      <mc:AlternateContent xmlns:mc="http://schemas.openxmlformats.org/markup-compatibility/2006">
+        <mc:Choice xmlns:a14="http://schemas.microsoft.com/office/drawing/2010/main" Requires="a14">
+          <p:sp>
+            <p:nvSpPr>
+              <p:cNvPr id="3" name="Content Placeholder 2">
+                <a:extLst>
+                  <a:ext uri="{FF2B5EF4-FFF2-40B4-BE49-F238E27FC236}">
+                    <a16:creationId xmlns:a16="http://schemas.microsoft.com/office/drawing/2014/main" id="{04A861E5-A7C8-B1AD-AE63-B8B20D2B6949}"/>
+                  </a:ext>
+                </a:extLst>
+              </p:cNvPr>
+              <p:cNvSpPr>
+                <a:spLocks noGrp="1"/>
+              </p:cNvSpPr>
+              <p:nvPr>
+                <p:ph idx="1"/>
+              </p:nvPr>
+            </p:nvSpPr>
+            <p:spPr>
+              <a:xfrm>
+                <a:off x="838200" y="3428999"/>
+                <a:ext cx="10515600" cy="2747963"/>
+              </a:xfrm>
+            </p:spPr>
+            <p:txBody>
+              <a:bodyPr>
+                <a:normAutofit/>
+              </a:bodyPr>
+              <a:lstStyle/>
+              <a:p>
+                <a:pPr marL="0" indent="0">
+                  <a:buNone/>
+                </a:pPr>
+                <a:r>
+                  <a:rPr lang="en-US" sz="2400" dirty="0"/>
+                  <a:t>Introduce several types of integrability-breaking perturbations</a:t>
+                </a:r>
+              </a:p>
+              <a:p>
+                <a:pPr marL="0" indent="0">
+                  <a:buNone/>
+                </a:pPr>
+                <a:endParaRPr lang="en-US" sz="2400" b="0" i="1" dirty="0"/>
+              </a:p>
+              <a:p>
+                <a:pPr marL="0" indent="0">
+                  <a:buNone/>
+                </a:pPr>
+                <a14:m>
+                  <m:oMathPara xmlns:m="http://schemas.openxmlformats.org/officeDocument/2006/math">
+                    <m:oMathParaPr>
+                      <m:jc m:val="centerGroup"/>
+                    </m:oMathParaPr>
+                    <m:oMath xmlns:m="http://schemas.openxmlformats.org/officeDocument/2006/math">
+                      <m:r>
+                        <a:rPr lang="en-US" sz="2400" b="0" i="1" smtClean="0">
+                          <a:latin typeface="Cambria Math" panose="02040503050406030204" pitchFamily="18" charset="0"/>
+                        </a:rPr>
+                        <m:t>𝐻</m:t>
+                      </m:r>
+                      <m:r>
+                        <a:rPr lang="en-US" sz="2400" b="0" i="1" smtClean="0">
+                          <a:latin typeface="Cambria Math" panose="02040503050406030204" pitchFamily="18" charset="0"/>
+                        </a:rPr>
+                        <m:t>=</m:t>
+                      </m:r>
+                      <m:r>
+                        <a:rPr lang="en-US" sz="2400" b="0" i="1" smtClean="0">
+                          <a:latin typeface="Cambria Math" panose="02040503050406030204" pitchFamily="18" charset="0"/>
+                        </a:rPr>
+                        <m:t>𝐽</m:t>
+                      </m:r>
+                      <m:nary>
+                        <m:naryPr>
+                          <m:chr m:val="∑"/>
+                          <m:supHide m:val="on"/>
+                          <m:ctrlPr>
+                            <a:rPr lang="en-US" sz="2400" b="0" i="1" smtClean="0">
+                              <a:latin typeface="Cambria Math" panose="02040503050406030204" pitchFamily="18" charset="0"/>
+                            </a:rPr>
+                          </m:ctrlPr>
+                        </m:naryPr>
+                        <m:sub>
+                          <m:r>
+                            <m:rPr>
+                              <m:brk m:alnAt="7"/>
+                            </m:rPr>
+                            <a:rPr lang="en-US" sz="2400" b="0" i="1" smtClean="0">
+                              <a:latin typeface="Cambria Math" panose="02040503050406030204" pitchFamily="18" charset="0"/>
+                            </a:rPr>
+                            <m:t>&lt;</m:t>
+                          </m:r>
+                          <m:r>
+                            <a:rPr lang="en-US" sz="2400" b="0" i="1" smtClean="0">
+                              <a:latin typeface="Cambria Math" panose="02040503050406030204" pitchFamily="18" charset="0"/>
+                            </a:rPr>
+                            <m:t>𝑖</m:t>
+                          </m:r>
+                          <m:r>
+                            <a:rPr lang="en-US" sz="2400" b="0" i="1" smtClean="0">
+                              <a:latin typeface="Cambria Math" panose="02040503050406030204" pitchFamily="18" charset="0"/>
+                            </a:rPr>
+                            <m:t>,</m:t>
+                          </m:r>
+                          <m:r>
+                            <a:rPr lang="en-US" sz="2400" b="0" i="1" smtClean="0">
+                              <a:latin typeface="Cambria Math" panose="02040503050406030204" pitchFamily="18" charset="0"/>
+                            </a:rPr>
+                            <m:t>𝑗</m:t>
+                          </m:r>
+                          <m:r>
+                            <a:rPr lang="en-US" sz="2400" b="0" i="1" smtClean="0">
+                              <a:latin typeface="Cambria Math" panose="02040503050406030204" pitchFamily="18" charset="0"/>
+                            </a:rPr>
+                            <m:t>&gt;</m:t>
+                          </m:r>
+                        </m:sub>
+                        <m:sup/>
+                        <m:e>
+                          <m:r>
+                            <a:rPr lang="en-US" sz="2400" b="0" i="1" smtClean="0">
+                              <a:latin typeface="Cambria Math" panose="02040503050406030204" pitchFamily="18" charset="0"/>
+                            </a:rPr>
+                            <m:t>(</m:t>
+                          </m:r>
+                          <m:sSubSup>
+                            <m:sSubSupPr>
+                              <m:ctrlPr>
+                                <a:rPr lang="en-US" sz="2400" i="1" dirty="0">
+                                  <a:latin typeface="Cambria Math" panose="02040503050406030204" pitchFamily="18" charset="0"/>
+                                </a:rPr>
+                              </m:ctrlPr>
+                            </m:sSubSupPr>
+                            <m:e>
+                              <m:acc>
+                                <m:accPr>
+                                  <m:chr m:val="⃗"/>
+                                  <m:ctrlPr>
+                                    <a:rPr lang="en-US" sz="2400" i="1" dirty="0">
+                                      <a:latin typeface="Cambria Math" panose="02040503050406030204" pitchFamily="18" charset="0"/>
+                                    </a:rPr>
+                                  </m:ctrlPr>
+                                </m:accPr>
+                                <m:e>
+                                  <m:r>
+                                    <a:rPr lang="en-US" sz="2400" i="1" dirty="0">
+                                      <a:latin typeface="Cambria Math" panose="02040503050406030204" pitchFamily="18" charset="0"/>
+                                    </a:rPr>
+                                    <m:t>𝑆</m:t>
+                                  </m:r>
+                                </m:e>
+                              </m:acc>
+                            </m:e>
+                            <m:sub>
+                              <m:r>
+                                <a:rPr lang="en-US" sz="2400" i="1" dirty="0">
+                                  <a:latin typeface="Cambria Math" panose="02040503050406030204" pitchFamily="18" charset="0"/>
+                                </a:rPr>
+                                <m:t>𝑖</m:t>
+                              </m:r>
+                            </m:sub>
+                            <m:sup>
+                              <m:r>
+                                <a:rPr lang="en-US" sz="2400" i="1" dirty="0">
+                                  <a:latin typeface="Cambria Math" panose="02040503050406030204" pitchFamily="18" charset="0"/>
+                                </a:rPr>
+                                <m:t>(1)</m:t>
+                              </m:r>
+                            </m:sup>
+                          </m:sSubSup>
+                        </m:e>
+                      </m:nary>
+                      <m:r>
+                        <a:rPr lang="en-US" sz="2400" b="0" i="1" dirty="0" smtClean="0">
+                          <a:latin typeface="Cambria Math" panose="02040503050406030204" pitchFamily="18" charset="0"/>
+                          <a:ea typeface="Cambria Math" panose="02040503050406030204" pitchFamily="18" charset="0"/>
+                        </a:rPr>
+                        <m:t>∙</m:t>
+                      </m:r>
+                      <m:sSubSup>
+                        <m:sSubSupPr>
+                          <m:ctrlPr>
+                            <a:rPr lang="en-US" sz="2400" i="1" dirty="0">
+                              <a:latin typeface="Cambria Math" panose="02040503050406030204" pitchFamily="18" charset="0"/>
+                            </a:rPr>
+                          </m:ctrlPr>
+                        </m:sSubSupPr>
+                        <m:e>
+                          <m:acc>
+                            <m:accPr>
+                              <m:chr m:val="⃗"/>
+                              <m:ctrlPr>
+                                <a:rPr lang="en-US" sz="2400" i="1" dirty="0">
+                                  <a:latin typeface="Cambria Math" panose="02040503050406030204" pitchFamily="18" charset="0"/>
+                                </a:rPr>
+                              </m:ctrlPr>
+                            </m:accPr>
+                            <m:e>
+                              <m:r>
+                                <a:rPr lang="en-US" sz="2400" i="1" dirty="0">
+                                  <a:latin typeface="Cambria Math" panose="02040503050406030204" pitchFamily="18" charset="0"/>
+                                </a:rPr>
+                                <m:t>𝑆</m:t>
+                              </m:r>
+                            </m:e>
+                          </m:acc>
+                        </m:e>
+                        <m:sub>
+                          <m:r>
+                            <a:rPr lang="en-US" sz="2400" b="0" i="1" dirty="0" smtClean="0">
+                              <a:latin typeface="Cambria Math" panose="02040503050406030204" pitchFamily="18" charset="0"/>
+                            </a:rPr>
+                            <m:t>𝑗</m:t>
+                          </m:r>
+                        </m:sub>
+                        <m:sup>
+                          <m:d>
+                            <m:dPr>
+                              <m:ctrlPr>
+                                <a:rPr lang="en-US" sz="2400" i="1" dirty="0">
+                                  <a:latin typeface="Cambria Math" panose="02040503050406030204" pitchFamily="18" charset="0"/>
+                                </a:rPr>
+                              </m:ctrlPr>
+                            </m:dPr>
+                            <m:e>
+                              <m:r>
+                                <a:rPr lang="en-US" sz="2400" i="1" dirty="0">
+                                  <a:latin typeface="Cambria Math" panose="02040503050406030204" pitchFamily="18" charset="0"/>
+                                </a:rPr>
+                                <m:t>1</m:t>
+                              </m:r>
+                            </m:e>
+                          </m:d>
+                        </m:sup>
+                      </m:sSubSup>
+                      <m:r>
+                        <a:rPr lang="en-US" sz="2400" b="0" i="1" dirty="0" smtClean="0">
+                          <a:latin typeface="Cambria Math" panose="02040503050406030204" pitchFamily="18" charset="0"/>
+                        </a:rPr>
+                        <m:t>+</m:t>
+                      </m:r>
+                      <m:sSubSup>
+                        <m:sSubSupPr>
+                          <m:ctrlPr>
+                            <a:rPr lang="en-US" sz="2400" i="1" dirty="0">
+                              <a:latin typeface="Cambria Math" panose="02040503050406030204" pitchFamily="18" charset="0"/>
+                            </a:rPr>
+                          </m:ctrlPr>
+                        </m:sSubSupPr>
+                        <m:e>
+                          <m:acc>
+                            <m:accPr>
+                              <m:chr m:val="⃗"/>
+                              <m:ctrlPr>
+                                <a:rPr lang="en-US" sz="2400" i="1" dirty="0">
+                                  <a:latin typeface="Cambria Math" panose="02040503050406030204" pitchFamily="18" charset="0"/>
+                                </a:rPr>
+                              </m:ctrlPr>
+                            </m:accPr>
+                            <m:e>
+                              <m:r>
+                                <a:rPr lang="en-US" sz="2400" i="1" dirty="0">
+                                  <a:latin typeface="Cambria Math" panose="02040503050406030204" pitchFamily="18" charset="0"/>
+                                </a:rPr>
+                                <m:t>𝑆</m:t>
+                              </m:r>
+                            </m:e>
+                          </m:acc>
+                        </m:e>
+                        <m:sub>
+                          <m:r>
+                            <a:rPr lang="en-US" sz="2400" i="1" dirty="0">
+                              <a:latin typeface="Cambria Math" panose="02040503050406030204" pitchFamily="18" charset="0"/>
+                            </a:rPr>
+                            <m:t>𝑖</m:t>
+                          </m:r>
+                        </m:sub>
+                        <m:sup>
+                          <m:d>
+                            <m:dPr>
+                              <m:ctrlPr>
+                                <a:rPr lang="en-US" sz="2400" b="0" i="1" dirty="0">
+                                  <a:latin typeface="Cambria Math" panose="02040503050406030204" pitchFamily="18" charset="0"/>
+                                </a:rPr>
+                              </m:ctrlPr>
+                            </m:dPr>
+                            <m:e>
+                              <m:r>
+                                <a:rPr lang="en-US" sz="2400" b="0" i="1" dirty="0" smtClean="0">
+                                  <a:latin typeface="Cambria Math" panose="02040503050406030204" pitchFamily="18" charset="0"/>
+                                </a:rPr>
+                                <m:t>2</m:t>
+                              </m:r>
+                            </m:e>
+                          </m:d>
+                        </m:sup>
+                      </m:sSubSup>
+                      <m:r>
+                        <a:rPr lang="en-US" sz="2400" b="0" i="1" smtClean="0">
+                          <a:latin typeface="Cambria Math" panose="02040503050406030204" pitchFamily="18" charset="0"/>
+                        </a:rPr>
+                        <m:t>⋅</m:t>
+                      </m:r>
+                      <m:sSubSup>
+                        <m:sSubSupPr>
+                          <m:ctrlPr>
+                            <a:rPr lang="en-US" sz="2400" i="1" dirty="0">
+                              <a:latin typeface="Cambria Math" panose="02040503050406030204" pitchFamily="18" charset="0"/>
+                            </a:rPr>
+                          </m:ctrlPr>
+                        </m:sSubSupPr>
+                        <m:e>
+                          <m:acc>
+                            <m:accPr>
+                              <m:chr m:val="⃗"/>
+                              <m:ctrlPr>
+                                <a:rPr lang="en-US" sz="2400" i="1" dirty="0">
+                                  <a:latin typeface="Cambria Math" panose="02040503050406030204" pitchFamily="18" charset="0"/>
+                                </a:rPr>
+                              </m:ctrlPr>
+                            </m:accPr>
+                            <m:e>
+                              <m:r>
+                                <a:rPr lang="en-US" sz="2400" i="1" dirty="0">
+                                  <a:latin typeface="Cambria Math" panose="02040503050406030204" pitchFamily="18" charset="0"/>
+                                </a:rPr>
+                                <m:t>𝑆</m:t>
+                              </m:r>
+                            </m:e>
+                          </m:acc>
+                        </m:e>
+                        <m:sub>
+                          <m:r>
+                            <a:rPr lang="en-US" sz="2400" b="0" i="1" dirty="0" smtClean="0">
+                              <a:latin typeface="Cambria Math" panose="02040503050406030204" pitchFamily="18" charset="0"/>
+                            </a:rPr>
+                            <m:t>𝑗</m:t>
+                          </m:r>
+                        </m:sub>
+                        <m:sup>
+                          <m:d>
+                            <m:dPr>
+                              <m:ctrlPr>
+                                <a:rPr lang="en-US" sz="2400" b="0" i="1" dirty="0">
+                                  <a:latin typeface="Cambria Math" panose="02040503050406030204" pitchFamily="18" charset="0"/>
+                                </a:rPr>
+                              </m:ctrlPr>
+                            </m:dPr>
+                            <m:e>
+                              <m:r>
+                                <a:rPr lang="en-US" sz="2400" b="0" i="1" dirty="0" smtClean="0">
+                                  <a:latin typeface="Cambria Math" panose="02040503050406030204" pitchFamily="18" charset="0"/>
+                                </a:rPr>
+                                <m:t>2</m:t>
+                              </m:r>
+                            </m:e>
+                          </m:d>
+                        </m:sup>
+                      </m:sSubSup>
+                      <m:r>
+                        <a:rPr lang="en-US" sz="2400" b="0" i="1" dirty="0" smtClean="0">
+                          <a:latin typeface="Cambria Math" panose="02040503050406030204" pitchFamily="18" charset="0"/>
+                        </a:rPr>
+                        <m:t>)</m:t>
+                      </m:r>
+                      <m:r>
+                        <a:rPr lang="en-US" sz="2400" b="0" i="0" dirty="0" smtClean="0">
+                          <a:latin typeface="Cambria Math" panose="02040503050406030204" pitchFamily="18" charset="0"/>
+                        </a:rPr>
+                        <m:t>+</m:t>
+                      </m:r>
+                      <m:sSup>
+                        <m:sSupPr>
+                          <m:ctrlPr>
+                            <a:rPr lang="en-US" sz="2400" b="0" i="1" smtClean="0">
+                              <a:latin typeface="Cambria Math" panose="02040503050406030204" pitchFamily="18" charset="0"/>
+                            </a:rPr>
+                          </m:ctrlPr>
+                        </m:sSupPr>
+                        <m:e>
+                          <m:r>
+                            <a:rPr lang="en-US" sz="2400" b="0" i="1" smtClean="0">
+                              <a:latin typeface="Cambria Math" panose="02040503050406030204" pitchFamily="18" charset="0"/>
+                            </a:rPr>
+                            <m:t>𝐽</m:t>
+                          </m:r>
+                        </m:e>
+                        <m:sup>
+                          <m:r>
+                            <a:rPr lang="en-US" sz="2400" b="0" i="1" smtClean="0">
+                              <a:latin typeface="Cambria Math" panose="02040503050406030204" pitchFamily="18" charset="0"/>
+                            </a:rPr>
+                            <m:t>′</m:t>
+                          </m:r>
+                        </m:sup>
+                      </m:sSup>
+                      <m:nary>
+                        <m:naryPr>
+                          <m:chr m:val="∑"/>
+                          <m:supHide m:val="on"/>
+                          <m:ctrlPr>
+                            <a:rPr lang="en-US" sz="2400" b="0" i="1" smtClean="0">
+                              <a:latin typeface="Cambria Math" panose="02040503050406030204" pitchFamily="18" charset="0"/>
+                            </a:rPr>
+                          </m:ctrlPr>
+                        </m:naryPr>
+                        <m:sub>
+                          <m:r>
+                            <a:rPr lang="en-US" sz="2400" b="0" i="1" smtClean="0">
+                              <a:latin typeface="Cambria Math" panose="02040503050406030204" pitchFamily="18" charset="0"/>
+                            </a:rPr>
+                            <m:t>𝑖</m:t>
+                          </m:r>
+                        </m:sub>
+                        <m:sup/>
+                        <m:e>
+                          <m:r>
+                            <a:rPr lang="en-US" sz="2400" b="0" i="1" smtClean="0">
+                              <a:latin typeface="Cambria Math" panose="02040503050406030204" pitchFamily="18" charset="0"/>
+                            </a:rPr>
+                            <m:t>(</m:t>
+                          </m:r>
+                          <m:sSubSup>
+                            <m:sSubSupPr>
+                              <m:ctrlPr>
+                                <a:rPr lang="en-US" sz="2400" i="1" dirty="0">
+                                  <a:latin typeface="Cambria Math" panose="02040503050406030204" pitchFamily="18" charset="0"/>
+                                </a:rPr>
+                              </m:ctrlPr>
+                            </m:sSubSupPr>
+                            <m:e>
+                              <m:acc>
+                                <m:accPr>
+                                  <m:chr m:val="⃗"/>
+                                  <m:ctrlPr>
+                                    <a:rPr lang="en-US" sz="2400" i="1" dirty="0">
+                                      <a:latin typeface="Cambria Math" panose="02040503050406030204" pitchFamily="18" charset="0"/>
+                                    </a:rPr>
+                                  </m:ctrlPr>
+                                </m:accPr>
+                                <m:e>
+                                  <m:r>
+                                    <a:rPr lang="en-US" sz="2400" i="1" dirty="0">
+                                      <a:latin typeface="Cambria Math" panose="02040503050406030204" pitchFamily="18" charset="0"/>
+                                    </a:rPr>
+                                    <m:t>𝑆</m:t>
+                                  </m:r>
+                                </m:e>
+                              </m:acc>
+                            </m:e>
+                            <m:sub>
+                              <m:r>
+                                <a:rPr lang="en-US" sz="2400" i="1" dirty="0">
+                                  <a:latin typeface="Cambria Math" panose="02040503050406030204" pitchFamily="18" charset="0"/>
+                                </a:rPr>
+                                <m:t>𝑖</m:t>
+                              </m:r>
+                            </m:sub>
+                            <m:sup>
+                              <m:r>
+                                <a:rPr lang="en-US" sz="2400" i="1" dirty="0">
+                                  <a:latin typeface="Cambria Math" panose="02040503050406030204" pitchFamily="18" charset="0"/>
+                                </a:rPr>
+                                <m:t>(1)</m:t>
+                              </m:r>
+                            </m:sup>
+                          </m:sSubSup>
+                          <m:r>
+                            <a:rPr lang="en-US" sz="2400" b="0" i="1" smtClean="0">
+                              <a:latin typeface="Cambria Math" panose="02040503050406030204" pitchFamily="18" charset="0"/>
+                            </a:rPr>
+                            <m:t>⋅</m:t>
+                          </m:r>
+                          <m:sSubSup>
+                            <m:sSubSupPr>
+                              <m:ctrlPr>
+                                <a:rPr lang="en-US" sz="2400" i="1" dirty="0">
+                                  <a:latin typeface="Cambria Math" panose="02040503050406030204" pitchFamily="18" charset="0"/>
+                                </a:rPr>
+                              </m:ctrlPr>
+                            </m:sSubSupPr>
+                            <m:e>
+                              <m:acc>
+                                <m:accPr>
+                                  <m:chr m:val="⃗"/>
+                                  <m:ctrlPr>
+                                    <a:rPr lang="en-US" sz="2400" i="1" dirty="0">
+                                      <a:latin typeface="Cambria Math" panose="02040503050406030204" pitchFamily="18" charset="0"/>
+                                    </a:rPr>
+                                  </m:ctrlPr>
+                                </m:accPr>
+                                <m:e>
+                                  <m:r>
+                                    <a:rPr lang="en-US" sz="2400" i="1" dirty="0">
+                                      <a:latin typeface="Cambria Math" panose="02040503050406030204" pitchFamily="18" charset="0"/>
+                                    </a:rPr>
+                                    <m:t>𝑆</m:t>
+                                  </m:r>
+                                </m:e>
+                              </m:acc>
+                            </m:e>
+                            <m:sub>
+                              <m:r>
+                                <a:rPr lang="en-US" sz="2400" i="1" dirty="0">
+                                  <a:latin typeface="Cambria Math" panose="02040503050406030204" pitchFamily="18" charset="0"/>
+                                </a:rPr>
+                                <m:t>𝑖</m:t>
+                              </m:r>
+                            </m:sub>
+                            <m:sup>
+                              <m:r>
+                                <a:rPr lang="en-US" sz="2400" i="1" dirty="0">
+                                  <a:latin typeface="Cambria Math" panose="02040503050406030204" pitchFamily="18" charset="0"/>
+                                </a:rPr>
+                                <m:t>(</m:t>
+                              </m:r>
+                              <m:r>
+                                <a:rPr lang="en-US" sz="2400" b="0" i="1" dirty="0" smtClean="0">
+                                  <a:latin typeface="Cambria Math" panose="02040503050406030204" pitchFamily="18" charset="0"/>
+                                </a:rPr>
+                                <m:t>2</m:t>
+                              </m:r>
+                              <m:r>
+                                <a:rPr lang="en-US" sz="2400" i="1" dirty="0">
+                                  <a:latin typeface="Cambria Math" panose="02040503050406030204" pitchFamily="18" charset="0"/>
+                                </a:rPr>
+                                <m:t>)</m:t>
+                              </m:r>
+                            </m:sup>
+                          </m:sSubSup>
+                          <m:r>
+                            <a:rPr lang="en-US" sz="2400" b="0" i="1" dirty="0" smtClean="0">
+                              <a:latin typeface="Cambria Math" panose="02040503050406030204" pitchFamily="18" charset="0"/>
+                            </a:rPr>
+                            <m:t>)</m:t>
+                          </m:r>
+                        </m:e>
+                      </m:nary>
+                    </m:oMath>
+                  </m:oMathPara>
+                </a14:m>
+                <a:endParaRPr lang="en-US" sz="2400" b="0" dirty="0"/>
+              </a:p>
+              <a:p>
+                <a:pPr marL="0" indent="0">
+                  <a:buNone/>
+                </a:pPr>
+                <a14:m>
+                  <m:oMathPara xmlns:m="http://schemas.openxmlformats.org/officeDocument/2006/math">
+                    <m:oMathParaPr>
+                      <m:jc m:val="centerGroup"/>
+                    </m:oMathParaPr>
+                    <m:oMath xmlns:m="http://schemas.openxmlformats.org/officeDocument/2006/math">
+                      <m:r>
+                        <a:rPr lang="en-US" sz="2400" b="0" i="1" smtClean="0">
+                          <a:latin typeface="Cambria Math" panose="02040503050406030204" pitchFamily="18" charset="0"/>
+                        </a:rPr>
+                        <m:t>+ 4</m:t>
+                      </m:r>
+                      <m:r>
+                        <a:rPr lang="en-US" sz="2400" b="0" i="1" smtClean="0">
+                          <a:latin typeface="Cambria Math" panose="02040503050406030204" pitchFamily="18" charset="0"/>
+                        </a:rPr>
+                        <m:t>𝑈</m:t>
+                      </m:r>
+                      <m:nary>
+                        <m:naryPr>
+                          <m:chr m:val="∑"/>
+                          <m:supHide m:val="on"/>
+                          <m:ctrlPr>
+                            <a:rPr lang="en-US" sz="2400" i="1">
+                              <a:latin typeface="Cambria Math" panose="02040503050406030204" pitchFamily="18" charset="0"/>
+                            </a:rPr>
+                          </m:ctrlPr>
+                        </m:naryPr>
+                        <m:sub>
+                          <m:r>
+                            <m:rPr>
+                              <m:brk m:alnAt="7"/>
+                            </m:rPr>
+                            <a:rPr lang="en-US" sz="2400" i="1">
+                              <a:latin typeface="Cambria Math" panose="02040503050406030204" pitchFamily="18" charset="0"/>
+                            </a:rPr>
+                            <m:t>&lt;</m:t>
+                          </m:r>
+                          <m:r>
+                            <a:rPr lang="en-US" sz="2400" i="1">
+                              <a:latin typeface="Cambria Math" panose="02040503050406030204" pitchFamily="18" charset="0"/>
+                            </a:rPr>
+                            <m:t>𝑖</m:t>
+                          </m:r>
+                          <m:r>
+                            <a:rPr lang="en-US" sz="2400" i="1">
+                              <a:latin typeface="Cambria Math" panose="02040503050406030204" pitchFamily="18" charset="0"/>
+                            </a:rPr>
+                            <m:t>,</m:t>
+                          </m:r>
+                          <m:r>
+                            <a:rPr lang="en-US" sz="2400" i="1">
+                              <a:latin typeface="Cambria Math" panose="02040503050406030204" pitchFamily="18" charset="0"/>
+                            </a:rPr>
+                            <m:t>𝑗</m:t>
+                          </m:r>
+                          <m:r>
+                            <a:rPr lang="en-US" sz="2400" i="1">
+                              <a:latin typeface="Cambria Math" panose="02040503050406030204" pitchFamily="18" charset="0"/>
+                            </a:rPr>
+                            <m:t>&gt;</m:t>
+                          </m:r>
+                        </m:sub>
+                        <m:sup/>
+                        <m:e>
+                          <m:r>
+                            <a:rPr lang="en-US" sz="2400" i="1">
+                              <a:latin typeface="Cambria Math" panose="02040503050406030204" pitchFamily="18" charset="0"/>
+                            </a:rPr>
+                            <m:t>(</m:t>
+                          </m:r>
+                          <m:sSubSup>
+                            <m:sSubSupPr>
+                              <m:ctrlPr>
+                                <a:rPr lang="en-US" sz="2400" i="1" dirty="0">
+                                  <a:latin typeface="Cambria Math" panose="02040503050406030204" pitchFamily="18" charset="0"/>
+                                </a:rPr>
+                              </m:ctrlPr>
+                            </m:sSubSupPr>
+                            <m:e>
+                              <m:acc>
+                                <m:accPr>
+                                  <m:chr m:val="⃗"/>
+                                  <m:ctrlPr>
+                                    <a:rPr lang="en-US" sz="2400" i="1" dirty="0">
+                                      <a:latin typeface="Cambria Math" panose="02040503050406030204" pitchFamily="18" charset="0"/>
+                                    </a:rPr>
+                                  </m:ctrlPr>
+                                </m:accPr>
+                                <m:e>
+                                  <m:r>
+                                    <a:rPr lang="en-US" sz="2400" i="1" dirty="0">
+                                      <a:latin typeface="Cambria Math" panose="02040503050406030204" pitchFamily="18" charset="0"/>
+                                    </a:rPr>
+                                    <m:t>𝑆</m:t>
+                                  </m:r>
+                                </m:e>
+                              </m:acc>
+                            </m:e>
+                            <m:sub>
+                              <m:r>
+                                <a:rPr lang="en-US" sz="2400" i="1" dirty="0">
+                                  <a:latin typeface="Cambria Math" panose="02040503050406030204" pitchFamily="18" charset="0"/>
+                                </a:rPr>
+                                <m:t>𝑖</m:t>
+                              </m:r>
+                            </m:sub>
+                            <m:sup>
+                              <m:r>
+                                <a:rPr lang="en-US" sz="2400" i="1" dirty="0">
+                                  <a:latin typeface="Cambria Math" panose="02040503050406030204" pitchFamily="18" charset="0"/>
+                                </a:rPr>
+                                <m:t>(1)</m:t>
+                              </m:r>
+                            </m:sup>
+                          </m:sSubSup>
+                        </m:e>
+                      </m:nary>
+                      <m:r>
+                        <a:rPr lang="en-US" sz="2400" i="1" dirty="0">
+                          <a:latin typeface="Cambria Math" panose="02040503050406030204" pitchFamily="18" charset="0"/>
+                          <a:ea typeface="Cambria Math" panose="02040503050406030204" pitchFamily="18" charset="0"/>
+                        </a:rPr>
+                        <m:t>∙</m:t>
+                      </m:r>
+                      <m:sSubSup>
+                        <m:sSubSupPr>
+                          <m:ctrlPr>
+                            <a:rPr lang="en-US" sz="2400" i="1" dirty="0">
+                              <a:latin typeface="Cambria Math" panose="02040503050406030204" pitchFamily="18" charset="0"/>
+                            </a:rPr>
+                          </m:ctrlPr>
+                        </m:sSubSupPr>
+                        <m:e>
+                          <m:acc>
+                            <m:accPr>
+                              <m:chr m:val="⃗"/>
+                              <m:ctrlPr>
+                                <a:rPr lang="en-US" sz="2400" i="1" dirty="0">
+                                  <a:latin typeface="Cambria Math" panose="02040503050406030204" pitchFamily="18" charset="0"/>
+                                </a:rPr>
+                              </m:ctrlPr>
+                            </m:accPr>
+                            <m:e>
+                              <m:r>
+                                <a:rPr lang="en-US" sz="2400" i="1" dirty="0">
+                                  <a:latin typeface="Cambria Math" panose="02040503050406030204" pitchFamily="18" charset="0"/>
+                                </a:rPr>
+                                <m:t>𝑆</m:t>
+                              </m:r>
+                            </m:e>
+                          </m:acc>
+                        </m:e>
+                        <m:sub>
+                          <m:r>
+                            <a:rPr lang="en-US" sz="2400" i="1" dirty="0">
+                              <a:latin typeface="Cambria Math" panose="02040503050406030204" pitchFamily="18" charset="0"/>
+                            </a:rPr>
+                            <m:t>𝑗</m:t>
+                          </m:r>
+                        </m:sub>
+                        <m:sup>
+                          <m:d>
+                            <m:dPr>
+                              <m:ctrlPr>
+                                <a:rPr lang="en-US" sz="2400" i="1" dirty="0">
+                                  <a:latin typeface="Cambria Math" panose="02040503050406030204" pitchFamily="18" charset="0"/>
+                                </a:rPr>
+                              </m:ctrlPr>
+                            </m:dPr>
+                            <m:e>
+                              <m:r>
+                                <a:rPr lang="en-US" sz="2400" i="1" dirty="0">
+                                  <a:latin typeface="Cambria Math" panose="02040503050406030204" pitchFamily="18" charset="0"/>
+                                </a:rPr>
+                                <m:t>1</m:t>
+                              </m:r>
+                            </m:e>
+                          </m:d>
+                        </m:sup>
+                      </m:sSubSup>
+                      <m:r>
+                        <a:rPr lang="en-US" sz="2400" b="0" i="1" dirty="0" smtClean="0">
+                          <a:latin typeface="Cambria Math" panose="02040503050406030204" pitchFamily="18" charset="0"/>
+                        </a:rPr>
+                        <m:t>)(</m:t>
+                      </m:r>
+                      <m:sSubSup>
+                        <m:sSubSupPr>
+                          <m:ctrlPr>
+                            <a:rPr lang="en-US" sz="2400" i="1" dirty="0">
+                              <a:latin typeface="Cambria Math" panose="02040503050406030204" pitchFamily="18" charset="0"/>
+                            </a:rPr>
+                          </m:ctrlPr>
+                        </m:sSubSupPr>
+                        <m:e>
+                          <m:acc>
+                            <m:accPr>
+                              <m:chr m:val="⃗"/>
+                              <m:ctrlPr>
+                                <a:rPr lang="en-US" sz="2400" i="1" dirty="0">
+                                  <a:latin typeface="Cambria Math" panose="02040503050406030204" pitchFamily="18" charset="0"/>
+                                </a:rPr>
+                              </m:ctrlPr>
+                            </m:accPr>
+                            <m:e>
+                              <m:r>
+                                <a:rPr lang="en-US" sz="2400" i="1" dirty="0">
+                                  <a:latin typeface="Cambria Math" panose="02040503050406030204" pitchFamily="18" charset="0"/>
+                                </a:rPr>
+                                <m:t>𝑆</m:t>
+                              </m:r>
+                            </m:e>
+                          </m:acc>
+                        </m:e>
+                        <m:sub>
+                          <m:r>
+                            <a:rPr lang="en-US" sz="2400" i="1" dirty="0">
+                              <a:latin typeface="Cambria Math" panose="02040503050406030204" pitchFamily="18" charset="0"/>
+                            </a:rPr>
+                            <m:t>𝑖</m:t>
+                          </m:r>
+                        </m:sub>
+                        <m:sup>
+                          <m:d>
+                            <m:dPr>
+                              <m:ctrlPr>
+                                <a:rPr lang="en-US" sz="2400" i="1" dirty="0">
+                                  <a:latin typeface="Cambria Math" panose="02040503050406030204" pitchFamily="18" charset="0"/>
+                                </a:rPr>
+                              </m:ctrlPr>
+                            </m:dPr>
+                            <m:e>
+                              <m:r>
+                                <a:rPr lang="en-US" sz="2400" i="1" dirty="0">
+                                  <a:latin typeface="Cambria Math" panose="02040503050406030204" pitchFamily="18" charset="0"/>
+                                </a:rPr>
+                                <m:t>2</m:t>
+                              </m:r>
+                            </m:e>
+                          </m:d>
+                        </m:sup>
+                      </m:sSubSup>
+                      <m:r>
+                        <a:rPr lang="en-US" sz="2400" i="1">
+                          <a:latin typeface="Cambria Math" panose="02040503050406030204" pitchFamily="18" charset="0"/>
+                        </a:rPr>
+                        <m:t>⋅</m:t>
+                      </m:r>
+                      <m:sSubSup>
+                        <m:sSubSupPr>
+                          <m:ctrlPr>
+                            <a:rPr lang="en-US" sz="2400" i="1" dirty="0">
+                              <a:latin typeface="Cambria Math" panose="02040503050406030204" pitchFamily="18" charset="0"/>
+                            </a:rPr>
+                          </m:ctrlPr>
+                        </m:sSubSupPr>
+                        <m:e>
+                          <m:acc>
+                            <m:accPr>
+                              <m:chr m:val="⃗"/>
+                              <m:ctrlPr>
+                                <a:rPr lang="en-US" sz="2400" i="1" dirty="0">
+                                  <a:latin typeface="Cambria Math" panose="02040503050406030204" pitchFamily="18" charset="0"/>
+                                </a:rPr>
+                              </m:ctrlPr>
+                            </m:accPr>
+                            <m:e>
+                              <m:r>
+                                <a:rPr lang="en-US" sz="2400" i="1" dirty="0">
+                                  <a:latin typeface="Cambria Math" panose="02040503050406030204" pitchFamily="18" charset="0"/>
+                                </a:rPr>
+                                <m:t>𝑆</m:t>
+                              </m:r>
+                            </m:e>
+                          </m:acc>
+                        </m:e>
+                        <m:sub>
+                          <m:r>
+                            <a:rPr lang="en-US" sz="2400" i="1" dirty="0">
+                              <a:latin typeface="Cambria Math" panose="02040503050406030204" pitchFamily="18" charset="0"/>
+                            </a:rPr>
+                            <m:t>𝑗</m:t>
+                          </m:r>
+                        </m:sub>
+                        <m:sup>
+                          <m:d>
+                            <m:dPr>
+                              <m:ctrlPr>
+                                <a:rPr lang="en-US" sz="2400" i="1" dirty="0">
+                                  <a:latin typeface="Cambria Math" panose="02040503050406030204" pitchFamily="18" charset="0"/>
+                                </a:rPr>
+                              </m:ctrlPr>
+                            </m:dPr>
+                            <m:e>
+                              <m:r>
+                                <a:rPr lang="en-US" sz="2400" i="1" dirty="0">
+                                  <a:latin typeface="Cambria Math" panose="02040503050406030204" pitchFamily="18" charset="0"/>
+                                </a:rPr>
+                                <m:t>2</m:t>
+                              </m:r>
+                            </m:e>
+                          </m:d>
+                        </m:sup>
+                      </m:sSubSup>
+                      <m:r>
+                        <a:rPr lang="en-US" sz="2400" i="1" dirty="0">
+                          <a:latin typeface="Cambria Math" panose="02040503050406030204" pitchFamily="18" charset="0"/>
+                        </a:rPr>
+                        <m:t>)</m:t>
+                      </m:r>
+                      <m:r>
+                        <a:rPr lang="en-US" sz="2400" dirty="0">
+                          <a:latin typeface="Cambria Math" panose="02040503050406030204" pitchFamily="18" charset="0"/>
+                        </a:rPr>
+                        <m:t>+</m:t>
+                      </m:r>
+                      <m:r>
+                        <a:rPr lang="en-US" sz="2400" i="1">
+                          <a:latin typeface="Cambria Math" panose="02040503050406030204" pitchFamily="18" charset="0"/>
+                        </a:rPr>
+                        <m:t>4</m:t>
+                      </m:r>
+                      <m:r>
+                        <a:rPr lang="en-US" sz="2400" i="1">
+                          <a:latin typeface="Cambria Math" panose="02040503050406030204" pitchFamily="18" charset="0"/>
+                        </a:rPr>
+                        <m:t>𝑈</m:t>
+                      </m:r>
+                      <m:r>
+                        <a:rPr lang="en-US" sz="2400" b="0" i="1" smtClean="0">
+                          <a:latin typeface="Cambria Math" panose="02040503050406030204" pitchFamily="18" charset="0"/>
+                        </a:rPr>
+                        <m:t>′</m:t>
+                      </m:r>
+                      <m:nary>
+                        <m:naryPr>
+                          <m:chr m:val="∑"/>
+                          <m:supHide m:val="on"/>
+                          <m:ctrlPr>
+                            <a:rPr lang="en-US" sz="2400" i="1">
+                              <a:latin typeface="Cambria Math" panose="02040503050406030204" pitchFamily="18" charset="0"/>
+                            </a:rPr>
+                          </m:ctrlPr>
+                        </m:naryPr>
+                        <m:sub>
+                          <m:r>
+                            <m:rPr>
+                              <m:brk m:alnAt="7"/>
+                            </m:rPr>
+                            <a:rPr lang="en-US" sz="2400" i="1">
+                              <a:latin typeface="Cambria Math" panose="02040503050406030204" pitchFamily="18" charset="0"/>
+                            </a:rPr>
+                            <m:t>&lt;</m:t>
+                          </m:r>
+                          <m:r>
+                            <a:rPr lang="en-US" sz="2400" i="1">
+                              <a:latin typeface="Cambria Math" panose="02040503050406030204" pitchFamily="18" charset="0"/>
+                            </a:rPr>
+                            <m:t>𝑖</m:t>
+                          </m:r>
+                          <m:r>
+                            <a:rPr lang="en-US" sz="2400" i="1">
+                              <a:latin typeface="Cambria Math" panose="02040503050406030204" pitchFamily="18" charset="0"/>
+                            </a:rPr>
+                            <m:t>,</m:t>
+                          </m:r>
+                          <m:r>
+                            <a:rPr lang="en-US" sz="2400" i="1">
+                              <a:latin typeface="Cambria Math" panose="02040503050406030204" pitchFamily="18" charset="0"/>
+                            </a:rPr>
+                            <m:t>𝑗</m:t>
+                          </m:r>
+                          <m:r>
+                            <a:rPr lang="en-US" sz="2400" i="1">
+                              <a:latin typeface="Cambria Math" panose="02040503050406030204" pitchFamily="18" charset="0"/>
+                            </a:rPr>
+                            <m:t>&gt;</m:t>
+                          </m:r>
+                        </m:sub>
+                        <m:sup/>
+                        <m:e>
+                          <m:r>
+                            <a:rPr lang="en-US" sz="2400" i="1">
+                              <a:latin typeface="Cambria Math" panose="02040503050406030204" pitchFamily="18" charset="0"/>
+                            </a:rPr>
+                            <m:t>(</m:t>
+                          </m:r>
+                          <m:sSubSup>
+                            <m:sSubSupPr>
+                              <m:ctrlPr>
+                                <a:rPr lang="en-US" sz="2400" i="1" dirty="0">
+                                  <a:latin typeface="Cambria Math" panose="02040503050406030204" pitchFamily="18" charset="0"/>
+                                </a:rPr>
+                              </m:ctrlPr>
+                            </m:sSubSupPr>
+                            <m:e>
+                              <m:acc>
+                                <m:accPr>
+                                  <m:chr m:val="⃗"/>
+                                  <m:ctrlPr>
+                                    <a:rPr lang="en-US" sz="2400" i="1" dirty="0">
+                                      <a:latin typeface="Cambria Math" panose="02040503050406030204" pitchFamily="18" charset="0"/>
+                                    </a:rPr>
+                                  </m:ctrlPr>
+                                </m:accPr>
+                                <m:e>
+                                  <m:r>
+                                    <a:rPr lang="en-US" sz="2400" i="1" dirty="0">
+                                      <a:latin typeface="Cambria Math" panose="02040503050406030204" pitchFamily="18" charset="0"/>
+                                    </a:rPr>
+                                    <m:t>𝑆</m:t>
+                                  </m:r>
+                                </m:e>
+                              </m:acc>
+                            </m:e>
+                            <m:sub>
+                              <m:r>
+                                <a:rPr lang="en-US" sz="2400" i="1" dirty="0">
+                                  <a:latin typeface="Cambria Math" panose="02040503050406030204" pitchFamily="18" charset="0"/>
+                                </a:rPr>
+                                <m:t>𝑖</m:t>
+                              </m:r>
+                            </m:sub>
+                            <m:sup>
+                              <m:r>
+                                <a:rPr lang="en-US" sz="2400" i="1" dirty="0">
+                                  <a:latin typeface="Cambria Math" panose="02040503050406030204" pitchFamily="18" charset="0"/>
+                                </a:rPr>
+                                <m:t>(1)</m:t>
+                              </m:r>
+                            </m:sup>
+                          </m:sSubSup>
+                        </m:e>
+                      </m:nary>
+                      <m:r>
+                        <a:rPr lang="en-US" sz="2400" i="1" dirty="0">
+                          <a:latin typeface="Cambria Math" panose="02040503050406030204" pitchFamily="18" charset="0"/>
+                          <a:ea typeface="Cambria Math" panose="02040503050406030204" pitchFamily="18" charset="0"/>
+                        </a:rPr>
+                        <m:t>∙</m:t>
+                      </m:r>
+                      <m:sSubSup>
+                        <m:sSubSupPr>
+                          <m:ctrlPr>
+                            <a:rPr lang="en-US" sz="2400" i="1" dirty="0">
+                              <a:latin typeface="Cambria Math" panose="02040503050406030204" pitchFamily="18" charset="0"/>
+                            </a:rPr>
+                          </m:ctrlPr>
+                        </m:sSubSupPr>
+                        <m:e>
+                          <m:acc>
+                            <m:accPr>
+                              <m:chr m:val="⃗"/>
+                              <m:ctrlPr>
+                                <a:rPr lang="en-US" sz="2400" i="1" dirty="0">
+                                  <a:latin typeface="Cambria Math" panose="02040503050406030204" pitchFamily="18" charset="0"/>
+                                </a:rPr>
+                              </m:ctrlPr>
+                            </m:accPr>
+                            <m:e>
+                              <m:r>
+                                <a:rPr lang="en-US" sz="2400" i="1" dirty="0">
+                                  <a:latin typeface="Cambria Math" panose="02040503050406030204" pitchFamily="18" charset="0"/>
+                                </a:rPr>
+                                <m:t>𝑆</m:t>
+                              </m:r>
+                            </m:e>
+                          </m:acc>
+                        </m:e>
+                        <m:sub>
+                          <m:r>
+                            <a:rPr lang="en-US" sz="2400" b="0" i="1" dirty="0" smtClean="0">
+                              <a:latin typeface="Cambria Math" panose="02040503050406030204" pitchFamily="18" charset="0"/>
+                            </a:rPr>
+                            <m:t>𝑖</m:t>
+                          </m:r>
+                        </m:sub>
+                        <m:sup>
+                          <m:d>
+                            <m:dPr>
+                              <m:ctrlPr>
+                                <a:rPr lang="en-US" sz="2400" i="1" dirty="0">
+                                  <a:latin typeface="Cambria Math" panose="02040503050406030204" pitchFamily="18" charset="0"/>
+                                </a:rPr>
+                              </m:ctrlPr>
+                            </m:dPr>
+                            <m:e>
+                              <m:r>
+                                <a:rPr lang="en-US" sz="2400" b="0" i="1" dirty="0" smtClean="0">
+                                  <a:latin typeface="Cambria Math" panose="02040503050406030204" pitchFamily="18" charset="0"/>
+                                </a:rPr>
+                                <m:t>2</m:t>
+                              </m:r>
+                            </m:e>
+                          </m:d>
+                        </m:sup>
+                      </m:sSubSup>
+                      <m:r>
+                        <a:rPr lang="en-US" sz="2400" i="1" dirty="0">
+                          <a:latin typeface="Cambria Math" panose="02040503050406030204" pitchFamily="18" charset="0"/>
+                        </a:rPr>
+                        <m:t>)(</m:t>
+                      </m:r>
+                      <m:sSubSup>
+                        <m:sSubSupPr>
+                          <m:ctrlPr>
+                            <a:rPr lang="en-US" sz="2400" i="1" dirty="0">
+                              <a:latin typeface="Cambria Math" panose="02040503050406030204" pitchFamily="18" charset="0"/>
+                            </a:rPr>
+                          </m:ctrlPr>
+                        </m:sSubSupPr>
+                        <m:e>
+                          <m:acc>
+                            <m:accPr>
+                              <m:chr m:val="⃗"/>
+                              <m:ctrlPr>
+                                <a:rPr lang="en-US" sz="2400" i="1" dirty="0">
+                                  <a:latin typeface="Cambria Math" panose="02040503050406030204" pitchFamily="18" charset="0"/>
+                                </a:rPr>
+                              </m:ctrlPr>
+                            </m:accPr>
+                            <m:e>
+                              <m:r>
+                                <a:rPr lang="en-US" sz="2400" i="1" dirty="0">
+                                  <a:latin typeface="Cambria Math" panose="02040503050406030204" pitchFamily="18" charset="0"/>
+                                </a:rPr>
+                                <m:t>𝑆</m:t>
+                              </m:r>
+                            </m:e>
+                          </m:acc>
+                        </m:e>
+                        <m:sub>
+                          <m:r>
+                            <a:rPr lang="en-US" sz="2400" b="0" i="1" dirty="0" smtClean="0">
+                              <a:latin typeface="Cambria Math" panose="02040503050406030204" pitchFamily="18" charset="0"/>
+                            </a:rPr>
+                            <m:t>𝑗</m:t>
+                          </m:r>
+                        </m:sub>
+                        <m:sup>
+                          <m:d>
+                            <m:dPr>
+                              <m:ctrlPr>
+                                <a:rPr lang="en-US" sz="2400" i="1" dirty="0" smtClean="0">
+                                  <a:latin typeface="Cambria Math" panose="02040503050406030204" pitchFamily="18" charset="0"/>
+                                </a:rPr>
+                              </m:ctrlPr>
+                            </m:dPr>
+                            <m:e>
+                              <m:r>
+                                <a:rPr lang="en-US" sz="2400" b="0" i="1" dirty="0" smtClean="0">
+                                  <a:latin typeface="Cambria Math" panose="02040503050406030204" pitchFamily="18" charset="0"/>
+                                </a:rPr>
+                                <m:t>1</m:t>
+                              </m:r>
+                            </m:e>
+                          </m:d>
+                        </m:sup>
+                      </m:sSubSup>
+                      <m:r>
+                        <a:rPr lang="en-US" sz="2400" i="1">
+                          <a:latin typeface="Cambria Math" panose="02040503050406030204" pitchFamily="18" charset="0"/>
+                        </a:rPr>
+                        <m:t>⋅</m:t>
+                      </m:r>
+                      <m:sSubSup>
+                        <m:sSubSupPr>
+                          <m:ctrlPr>
+                            <a:rPr lang="en-US" sz="2400" i="1" dirty="0">
+                              <a:latin typeface="Cambria Math" panose="02040503050406030204" pitchFamily="18" charset="0"/>
+                            </a:rPr>
+                          </m:ctrlPr>
+                        </m:sSubSupPr>
+                        <m:e>
+                          <m:acc>
+                            <m:accPr>
+                              <m:chr m:val="⃗"/>
+                              <m:ctrlPr>
+                                <a:rPr lang="en-US" sz="2400" i="1" dirty="0">
+                                  <a:latin typeface="Cambria Math" panose="02040503050406030204" pitchFamily="18" charset="0"/>
+                                </a:rPr>
+                              </m:ctrlPr>
+                            </m:accPr>
+                            <m:e>
+                              <m:r>
+                                <a:rPr lang="en-US" sz="2400" i="1" dirty="0">
+                                  <a:latin typeface="Cambria Math" panose="02040503050406030204" pitchFamily="18" charset="0"/>
+                                </a:rPr>
+                                <m:t>𝑆</m:t>
+                              </m:r>
+                            </m:e>
+                          </m:acc>
+                        </m:e>
+                        <m:sub>
+                          <m:r>
+                            <a:rPr lang="en-US" sz="2400" i="1" dirty="0">
+                              <a:latin typeface="Cambria Math" panose="02040503050406030204" pitchFamily="18" charset="0"/>
+                            </a:rPr>
+                            <m:t>𝑗</m:t>
+                          </m:r>
+                        </m:sub>
+                        <m:sup>
+                          <m:d>
+                            <m:dPr>
+                              <m:ctrlPr>
+                                <a:rPr lang="en-US" sz="2400" i="1" dirty="0">
+                                  <a:latin typeface="Cambria Math" panose="02040503050406030204" pitchFamily="18" charset="0"/>
+                                </a:rPr>
+                              </m:ctrlPr>
+                            </m:dPr>
+                            <m:e>
+                              <m:r>
+                                <a:rPr lang="en-US" sz="2400" i="1" dirty="0">
+                                  <a:latin typeface="Cambria Math" panose="02040503050406030204" pitchFamily="18" charset="0"/>
+                                </a:rPr>
+                                <m:t>2</m:t>
+                              </m:r>
+                            </m:e>
+                          </m:d>
+                        </m:sup>
+                      </m:sSubSup>
+                      <m:r>
+                        <a:rPr lang="en-US" sz="2400" i="1" dirty="0">
+                          <a:latin typeface="Cambria Math" panose="02040503050406030204" pitchFamily="18" charset="0"/>
+                        </a:rPr>
+                        <m:t>)</m:t>
+                      </m:r>
+                    </m:oMath>
+                  </m:oMathPara>
+                </a14:m>
+                <a:endParaRPr lang="en-US" sz="2400" b="0" dirty="0"/>
+              </a:p>
+            </p:txBody>
+          </p:sp>
+        </mc:Choice>
+        <mc:Fallback>
+          <p:sp>
+            <p:nvSpPr>
+              <p:cNvPr id="3" name="Content Placeholder 2">
+                <a:extLst>
+                  <a:ext uri="{FF2B5EF4-FFF2-40B4-BE49-F238E27FC236}">
+                    <a16:creationId xmlns:a16="http://schemas.microsoft.com/office/drawing/2014/main" id="{04A861E5-A7C8-B1AD-AE63-B8B20D2B6949}"/>
+                  </a:ext>
+                </a:extLst>
+              </p:cNvPr>
+              <p:cNvSpPr>
+                <a:spLocks noGrp="1" noRot="1" noChangeAspect="1" noMove="1" noResize="1" noEditPoints="1" noAdjustHandles="1" noChangeArrowheads="1" noChangeShapeType="1" noTextEdit="1"/>
+              </p:cNvSpPr>
+              <p:nvPr>
+                <p:ph idx="1"/>
+              </p:nvPr>
+            </p:nvSpPr>
+            <p:spPr>
+              <a:xfrm>
+                <a:off x="838200" y="3428999"/>
+                <a:ext cx="10515600" cy="2747963"/>
+              </a:xfrm>
+              <a:blipFill>
+                <a:blip r:embed="rId2"/>
+                <a:stretch>
+                  <a:fillRect l="-928" t="-2882"/>
+                </a:stretch>
+              </a:blipFill>
+            </p:spPr>
+            <p:txBody>
+              <a:bodyPr/>
+              <a:lstStyle/>
+              <a:p>
+                <a:r>
+                  <a:rPr lang="en-US">
+                    <a:noFill/>
+                  </a:rPr>
+                  <a:t> </a:t>
+                </a:r>
+              </a:p>
+            </p:txBody>
+          </p:sp>
+        </mc:Fallback>
+      </mc:AlternateContent>
+      <p:pic>
+        <p:nvPicPr>
+          <p:cNvPr id="5" name="Picture 4">
+            <a:extLst>
+              <a:ext uri="{FF2B5EF4-FFF2-40B4-BE49-F238E27FC236}">
+                <a16:creationId xmlns:a16="http://schemas.microsoft.com/office/drawing/2014/main" id="{B8F24762-F63B-B434-7037-DAD7126E8028}"/>
+              </a:ext>
+            </a:extLst>
+          </p:cNvPr>
+          <p:cNvPicPr>
+            <a:picLocks noChangeAspect="1"/>
+          </p:cNvPicPr>
+          <p:nvPr/>
+        </p:nvPicPr>
+        <p:blipFill>
+          <a:blip r:embed="rId3"/>
+          <a:stretch>
+            <a:fillRect/>
+          </a:stretch>
+        </p:blipFill>
+        <p:spPr>
+          <a:xfrm>
+            <a:off x="2885044" y="1528947"/>
+            <a:ext cx="6421912" cy="1514400"/>
+          </a:xfrm>
+          <a:prstGeom prst="rect">
+            <a:avLst/>
+          </a:prstGeom>
+        </p:spPr>
+      </p:pic>
     </p:spTree>
     <p:extLst>
       <p:ext uri="{BB962C8B-B14F-4D97-AF65-F5344CB8AC3E}">
@@ -4858,7 +5867,7 @@
                                         <p:tgtEl>
                                           <p:spTgt spid="3">
                                             <p:txEl>
-                                              <p:pRg st="1" end="1"/>
+                                              <p:pRg st="2" end="2"/>
                                             </p:txEl>
                                           </p:spTgt>
                                         </p:tgtEl>
@@ -4900,55 +5909,6 @@
                                     <p:set>
                                       <p:cBhvr>
                                         <p:cTn id="14" dur="1" fill="hold">
-                                          <p:stCondLst>
-                                            <p:cond delay="0"/>
-                                          </p:stCondLst>
-                                        </p:cTn>
-                                        <p:tgtEl>
-                                          <p:spTgt spid="3">
-                                            <p:txEl>
-                                              <p:pRg st="2" end="2"/>
-                                            </p:txEl>
-                                          </p:spTgt>
-                                        </p:tgtEl>
-                                        <p:attrNameLst>
-                                          <p:attrName>style.visibility</p:attrName>
-                                        </p:attrNameLst>
-                                      </p:cBhvr>
-                                      <p:to>
-                                        <p:strVal val="visible"/>
-                                      </p:to>
-                                    </p:set>
-                                  </p:childTnLst>
-                                </p:cTn>
-                              </p:par>
-                            </p:childTnLst>
-                          </p:cTn>
-                        </p:par>
-                      </p:childTnLst>
-                    </p:cTn>
-                  </p:par>
-                  <p:par>
-                    <p:cTn id="15" fill="hold">
-                      <p:stCondLst>
-                        <p:cond delay="indefinite"/>
-                      </p:stCondLst>
-                      <p:childTnLst>
-                        <p:par>
-                          <p:cTn id="16" fill="hold">
-                            <p:stCondLst>
-                              <p:cond delay="0"/>
-                            </p:stCondLst>
-                            <p:childTnLst>
-                              <p:par>
-                                <p:cTn id="17" presetID="1" presetClass="entr" presetSubtype="0" fill="hold" grpId="0" nodeType="clickEffect">
-                                  <p:stCondLst>
-                                    <p:cond delay="0"/>
-                                  </p:stCondLst>
-                                  <p:childTnLst>
-                                    <p:set>
-                                      <p:cBhvr>
-                                        <p:cTn id="18" dur="1" fill="hold">
                                           <p:stCondLst>
                                             <p:cond delay="0"/>
                                           </p:stCondLst>
@@ -5005,7 +5965,7 @@
 </p:sld>
 </file>
 
-<file path=ppt/slides/slide11.xml><?xml version="1.0" encoding="utf-8"?>
+<file path=ppt/slides/slide12.xml><?xml version="1.0" encoding="utf-8"?>
 <p:sld xmlns:a="http://schemas.openxmlformats.org/drawingml/2006/main" xmlns:r="http://schemas.openxmlformats.org/officeDocument/2006/relationships" xmlns:p="http://schemas.openxmlformats.org/presentationml/2006/main">
   <p:cSld>
     <p:spTree>
@@ -5040,18 +6000,20 @@
         </p:nvSpPr>
         <p:spPr/>
         <p:txBody>
-          <a:bodyPr/>
+          <a:bodyPr>
+            <a:normAutofit/>
+          </a:bodyPr>
           <a:lstStyle/>
           <a:p>
             <a:r>
-              <a:rPr lang="en-US" dirty="0"/>
+              <a:rPr lang="en-US" sz="3600" dirty="0"/>
               <a:t>MPS Simulations</a:t>
             </a:r>
           </a:p>
         </p:txBody>
       </p:sp>
-      <mc:AlternateContent xmlns:mc="http://schemas.openxmlformats.org/markup-compatibility/2006" xmlns:a14="http://schemas.microsoft.com/office/drawing/2010/main">
-        <mc:Choice Requires="a14">
+      <mc:AlternateContent xmlns:mc="http://schemas.openxmlformats.org/markup-compatibility/2006">
+        <mc:Choice xmlns:a14="http://schemas.microsoft.com/office/drawing/2010/main" Requires="a14">
           <p:sp>
             <p:nvSpPr>
               <p:cNvPr id="3" name="Content Placeholder 2">
@@ -5071,15 +6033,15 @@
             <p:spPr/>
             <p:txBody>
               <a:bodyPr>
-                <a:normAutofit fontScale="92500" lnSpcReduction="10000"/>
+                <a:normAutofit/>
               </a:bodyPr>
               <a:lstStyle/>
               <a:p>
                 <a:r>
-                  <a:rPr lang="en-US" dirty="0"/>
+                  <a:rPr lang="en-US" sz="2400" dirty="0"/>
                   <a:t>To characterize transport, we perform MPS simulations of time evolution from an inhomogeneous quench</a:t>
                 </a:r>
-                <a:endParaRPr lang="en-US" b="0" i="1" dirty="0">
+                <a:endParaRPr lang="en-US" sz="2400" b="0" i="1" dirty="0">
                   <a:latin typeface="Cambria Math" panose="02040503050406030204" pitchFamily="18" charset="0"/>
                 </a:endParaRPr>
               </a:p>
@@ -5096,14 +6058,14 @@
                       <m:sSub>
                         <m:sSubPr>
                           <m:ctrlPr>
-                            <a:rPr lang="en-US" b="0" i="1" smtClean="0">
+                            <a:rPr lang="en-US" sz="2400" b="0" i="1" smtClean="0">
                               <a:latin typeface="Cambria Math" panose="02040503050406030204" pitchFamily="18" charset="0"/>
                             </a:rPr>
                           </m:ctrlPr>
                         </m:sSubPr>
                         <m:e>
                           <m:r>
-                            <a:rPr lang="en-US" b="0" i="1" smtClean="0">
+                            <a:rPr lang="en-US" sz="2400" b="0" i="1" smtClean="0">
                               <a:latin typeface="Cambria Math" panose="02040503050406030204" pitchFamily="18" charset="0"/>
                             </a:rPr>
                             <m:t>𝜌</m:t>
@@ -5111,7 +6073,7 @@
                         </m:e>
                         <m:sub>
                           <m:r>
-                            <a:rPr lang="en-US" b="0" i="1" smtClean="0">
+                            <a:rPr lang="en-US" sz="2400" b="0" i="1" smtClean="0">
                               <a:latin typeface="Cambria Math" panose="02040503050406030204" pitchFamily="18" charset="0"/>
                             </a:rPr>
                             <m:t>𝜇</m:t>
@@ -5121,20 +6083,20 @@
                       <m:d>
                         <m:dPr>
                           <m:ctrlPr>
-                            <a:rPr lang="en-US" b="0" i="1" smtClean="0">
+                            <a:rPr lang="en-US" sz="2400" b="0" i="1" smtClean="0">
                               <a:latin typeface="Cambria Math" panose="02040503050406030204" pitchFamily="18" charset="0"/>
                             </a:rPr>
                           </m:ctrlPr>
                         </m:dPr>
                         <m:e>
                           <m:r>
-                            <a:rPr lang="en-US" b="0" i="1" smtClean="0">
+                            <a:rPr lang="en-US" sz="2400" b="0" i="1" smtClean="0">
                               <a:latin typeface="Cambria Math" panose="02040503050406030204" pitchFamily="18" charset="0"/>
                             </a:rPr>
                             <m:t>𝑡</m:t>
                           </m:r>
                           <m:r>
-                            <a:rPr lang="en-US" b="0" i="1" smtClean="0">
+                            <a:rPr lang="en-US" sz="2400" b="0" i="1" smtClean="0">
                               <a:latin typeface="Cambria Math" panose="02040503050406030204" pitchFamily="18" charset="0"/>
                             </a:rPr>
                             <m:t>=0</m:t>
@@ -5142,7 +6104,7 @@
                         </m:e>
                       </m:d>
                       <m:r>
-                        <a:rPr lang="en-US" b="0" i="1" smtClean="0">
+                        <a:rPr lang="en-US" sz="2400" b="0" i="1" smtClean="0">
                           <a:latin typeface="Cambria Math" panose="02040503050406030204" pitchFamily="18" charset="0"/>
                         </a:rPr>
                         <m:t>∼</m:t>
@@ -5150,7 +6112,7 @@
                       <m:func>
                         <m:funcPr>
                           <m:ctrlPr>
-                            <a:rPr lang="en-US" b="0" i="1" smtClean="0">
+                            <a:rPr lang="en-US" sz="2400" b="0" i="1" smtClean="0">
                               <a:latin typeface="Cambria Math" panose="02040503050406030204" pitchFamily="18" charset="0"/>
                             </a:rPr>
                           </m:ctrlPr>
@@ -5160,7 +6122,7 @@
                             <m:rPr>
                               <m:sty m:val="p"/>
                             </m:rPr>
-                            <a:rPr lang="en-US" b="0" i="0" smtClean="0">
+                            <a:rPr lang="en-US" sz="2400" b="0" i="0" smtClean="0">
                               <a:latin typeface="Cambria Math" panose="02040503050406030204" pitchFamily="18" charset="0"/>
                             </a:rPr>
                             <m:t>exp</m:t>
@@ -5170,145 +6132,60 @@
                           <m:d>
                             <m:dPr>
                               <m:ctrlPr>
-                                <a:rPr lang="en-US" b="0" i="1" smtClean="0">
+                                <a:rPr lang="en-US" sz="2400" b="0" i="1" smtClean="0">
                                   <a:latin typeface="Cambria Math" panose="02040503050406030204" pitchFamily="18" charset="0"/>
                                 </a:rPr>
                               </m:ctrlPr>
                             </m:dPr>
                             <m:e>
                               <m:r>
-                                <a:rPr lang="en-US" b="0" i="1" smtClean="0">
+                                <a:rPr lang="en-US" sz="2400" b="0" i="1" smtClean="0">
                                   <a:latin typeface="Cambria Math" panose="02040503050406030204" pitchFamily="18" charset="0"/>
                                 </a:rPr>
                                 <m:t>𝜇</m:t>
                               </m:r>
-                              <m:nary>
-                                <m:naryPr>
-                                  <m:chr m:val="∑"/>
-                                  <m:supHide m:val="on"/>
+                              <m:sSubSup>
+                                <m:sSubSupPr>
                                   <m:ctrlPr>
-                                    <a:rPr lang="en-US" b="0" i="1" smtClean="0">
+                                    <a:rPr lang="en-US" sz="2400" i="1" dirty="0">
                                       <a:latin typeface="Cambria Math" panose="02040503050406030204" pitchFamily="18" charset="0"/>
                                     </a:rPr>
                                   </m:ctrlPr>
-                                </m:naryPr>
-                                <m:sub>
+                                </m:sSubSupPr>
+                                <m:e>
                                   <m:r>
-                                    <a:rPr lang="en-US" b="0" i="1" smtClean="0">
+                                    <a:rPr lang="en-US" sz="2400" i="1" dirty="0">
                                       <a:latin typeface="Cambria Math" panose="02040503050406030204" pitchFamily="18" charset="0"/>
                                     </a:rPr>
-                                    <m:t>𝑖</m:t>
+                                    <m:t>𝑆</m:t>
                                   </m:r>
-                                  <m:r>
-                                    <a:rPr lang="en-US" b="0" i="1" smtClean="0">
-                                      <a:latin typeface="Cambria Math" panose="02040503050406030204" pitchFamily="18" charset="0"/>
-                                    </a:rPr>
-                                    <m:t>∈</m:t>
-                                  </m:r>
+                                </m:e>
+                                <m:sub>
                                   <m:r>
                                     <m:rPr>
                                       <m:sty m:val="p"/>
                                     </m:rPr>
-                                    <a:rPr lang="en-US" b="0" i="1" smtClean="0">
+                                    <a:rPr lang="en-US" sz="2400" dirty="0">
                                       <a:latin typeface="Cambria Math" panose="02040503050406030204" pitchFamily="18" charset="0"/>
                                     </a:rPr>
                                     <m:t>left</m:t>
                                   </m:r>
                                 </m:sub>
-                                <m:sup/>
-                                <m:e>
-                                  <m:sSubSup>
-                                    <m:sSubSupPr>
-                                      <m:ctrlPr>
-                                        <a:rPr lang="en-US" b="0" i="1" dirty="0" smtClean="0">
-                                          <a:latin typeface="Cambria Math" panose="02040503050406030204" pitchFamily="18" charset="0"/>
-                                        </a:rPr>
-                                      </m:ctrlPr>
-                                    </m:sSubSupPr>
-                                    <m:e>
-                                      <m:sSubSup>
-                                        <m:sSubSupPr>
-                                          <m:ctrlPr>
-                                            <a:rPr lang="en-US" b="0" i="1" dirty="0" smtClean="0">
-                                              <a:latin typeface="Cambria Math" panose="02040503050406030204" pitchFamily="18" charset="0"/>
-                                            </a:rPr>
-                                          </m:ctrlPr>
-                                        </m:sSubSupPr>
-                                        <m:e>
-                                          <m:r>
-                                            <a:rPr lang="en-US" b="0" i="1" dirty="0" smtClean="0">
-                                              <a:latin typeface="Cambria Math" panose="02040503050406030204" pitchFamily="18" charset="0"/>
-                                            </a:rPr>
-                                            <m:t>𝑆</m:t>
-                                          </m:r>
-                                        </m:e>
-                                        <m:sub>
-                                          <m:r>
-                                            <a:rPr lang="en-US" b="0" i="1" dirty="0" smtClean="0">
-                                              <a:latin typeface="Cambria Math" panose="02040503050406030204" pitchFamily="18" charset="0"/>
-                                            </a:rPr>
-                                            <m:t>1,</m:t>
-                                          </m:r>
-                                          <m:r>
-                                            <a:rPr lang="en-US" b="0" i="1" dirty="0" smtClean="0">
-                                              <a:latin typeface="Cambria Math" panose="02040503050406030204" pitchFamily="18" charset="0"/>
-                                            </a:rPr>
-                                            <m:t>𝑖</m:t>
-                                          </m:r>
-                                        </m:sub>
-                                        <m:sup>
-                                          <m:r>
-                                            <a:rPr lang="en-US" b="0" i="1" dirty="0" smtClean="0">
-                                              <a:latin typeface="Cambria Math" panose="02040503050406030204" pitchFamily="18" charset="0"/>
-                                            </a:rPr>
-                                            <m:t>𝑧</m:t>
-                                          </m:r>
-                                        </m:sup>
-                                      </m:sSubSup>
-                                      <m:r>
-                                        <a:rPr lang="en-US" b="0" i="1" dirty="0" smtClean="0">
-                                          <a:latin typeface="Cambria Math" panose="02040503050406030204" pitchFamily="18" charset="0"/>
-                                        </a:rPr>
-                                        <m:t>+</m:t>
-                                      </m:r>
-                                      <m:r>
-                                        <a:rPr lang="en-US" b="0" i="1" dirty="0" smtClean="0">
-                                          <a:latin typeface="Cambria Math" panose="02040503050406030204" pitchFamily="18" charset="0"/>
-                                        </a:rPr>
-                                        <m:t>𝑆</m:t>
-                                      </m:r>
-                                    </m:e>
-                                    <m:sub>
-                                      <m:r>
-                                        <a:rPr lang="en-US" b="0" i="1" dirty="0" smtClean="0">
-                                          <a:latin typeface="Cambria Math" panose="02040503050406030204" pitchFamily="18" charset="0"/>
-                                        </a:rPr>
-                                        <m:t>2,</m:t>
-                                      </m:r>
-                                      <m:r>
-                                        <a:rPr lang="en-US" b="0" i="1" dirty="0" smtClean="0">
-                                          <a:latin typeface="Cambria Math" panose="02040503050406030204" pitchFamily="18" charset="0"/>
-                                        </a:rPr>
-                                        <m:t>𝑖</m:t>
-                                      </m:r>
-                                    </m:sub>
-                                    <m:sup>
-                                      <m:r>
-                                        <a:rPr lang="en-US" b="0" i="1" dirty="0" smtClean="0">
-                                          <a:latin typeface="Cambria Math" panose="02040503050406030204" pitchFamily="18" charset="0"/>
-                                        </a:rPr>
-                                        <m:t>𝑧</m:t>
-                                      </m:r>
-                                    </m:sup>
-                                  </m:sSubSup>
-                                </m:e>
-                              </m:nary>
+                                <m:sup>
+                                  <m:r>
+                                    <a:rPr lang="en-US" sz="2400" i="1" dirty="0">
+                                      <a:latin typeface="Cambria Math" panose="02040503050406030204" pitchFamily="18" charset="0"/>
+                                    </a:rPr>
+                                    <m:t>𝑧</m:t>
+                                  </m:r>
+                                </m:sup>
+                              </m:sSubSup>
                             </m:e>
                           </m:d>
                         </m:e>
                       </m:func>
                       <m:r>
-                        <a:rPr lang="en-US" b="0" i="1" dirty="0" smtClean="0">
+                        <a:rPr lang="en-US" sz="2400" b="0" i="1" dirty="0" smtClean="0">
                           <a:latin typeface="Cambria Math" panose="02040503050406030204" pitchFamily="18" charset="0"/>
                         </a:rPr>
                         <m:t>⋅</m:t>
@@ -5316,7 +6193,7 @@
                       <m:func>
                         <m:funcPr>
                           <m:ctrlPr>
-                            <a:rPr lang="en-US" b="0" i="1" smtClean="0">
+                            <a:rPr lang="en-US" sz="2400" b="0" i="1" smtClean="0">
                               <a:latin typeface="Cambria Math" panose="02040503050406030204" pitchFamily="18" charset="0"/>
                             </a:rPr>
                           </m:ctrlPr>
@@ -5326,7 +6203,7 @@
                             <m:rPr>
                               <m:sty m:val="p"/>
                             </m:rPr>
-                            <a:rPr lang="en-US" b="0" i="0" smtClean="0">
+                            <a:rPr lang="en-US" sz="2400" b="0" i="0" smtClean="0">
                               <a:latin typeface="Cambria Math" panose="02040503050406030204" pitchFamily="18" charset="0"/>
                             </a:rPr>
                             <m:t>exp</m:t>
@@ -5336,145 +6213,60 @@
                           <m:d>
                             <m:dPr>
                               <m:ctrlPr>
-                                <a:rPr lang="en-US" b="0" i="1" smtClean="0">
+                                <a:rPr lang="en-US" sz="2400" b="0" i="1" smtClean="0">
                                   <a:latin typeface="Cambria Math" panose="02040503050406030204" pitchFamily="18" charset="0"/>
                                 </a:rPr>
                               </m:ctrlPr>
                             </m:dPr>
                             <m:e>
                               <m:r>
-                                <a:rPr lang="en-US" b="0" i="1" smtClean="0">
+                                <a:rPr lang="en-US" sz="2400" b="0" i="1" smtClean="0">
                                   <a:latin typeface="Cambria Math" panose="02040503050406030204" pitchFamily="18" charset="0"/>
                                 </a:rPr>
                                 <m:t>−</m:t>
                               </m:r>
                               <m:r>
-                                <a:rPr lang="en-US" b="0" i="1" smtClean="0">
+                                <a:rPr lang="en-US" sz="2400" b="0" i="1" smtClean="0">
                                   <a:latin typeface="Cambria Math" panose="02040503050406030204" pitchFamily="18" charset="0"/>
                                 </a:rPr>
                                 <m:t>𝜇</m:t>
                               </m:r>
-                              <m:nary>
-                                <m:naryPr>
-                                  <m:chr m:val="∑"/>
-                                  <m:supHide m:val="on"/>
+                              <m:sSubSup>
+                                <m:sSubSupPr>
                                   <m:ctrlPr>
-                                    <a:rPr lang="en-US" b="0" i="1" smtClean="0">
+                                    <a:rPr lang="en-US" sz="2400" i="1" dirty="0">
                                       <a:latin typeface="Cambria Math" panose="02040503050406030204" pitchFamily="18" charset="0"/>
                                     </a:rPr>
                                   </m:ctrlPr>
-                                </m:naryPr>
-                                <m:sub>
+                                </m:sSubSupPr>
+                                <m:e>
                                   <m:r>
-                                    <a:rPr lang="en-US" b="0" i="1" smtClean="0">
+                                    <a:rPr lang="en-US" sz="2400" i="1" dirty="0">
                                       <a:latin typeface="Cambria Math" panose="02040503050406030204" pitchFamily="18" charset="0"/>
                                     </a:rPr>
-                                    <m:t>𝑖</m:t>
+                                    <m:t>𝑆</m:t>
                                   </m:r>
-                                  <m:r>
-                                    <a:rPr lang="en-US" b="0" i="1" smtClean="0">
-                                      <a:latin typeface="Cambria Math" panose="02040503050406030204" pitchFamily="18" charset="0"/>
-                                    </a:rPr>
-                                    <m:t>∈</m:t>
-                                  </m:r>
+                                </m:e>
+                                <m:sub>
                                   <m:r>
                                     <m:rPr>
                                       <m:sty m:val="p"/>
                                     </m:rPr>
-                                    <a:rPr lang="en-US" b="0" i="0" smtClean="0">
+                                    <a:rPr lang="en-US" sz="2400" b="0" i="0" dirty="0" smtClean="0">
                                       <a:latin typeface="Cambria Math" panose="02040503050406030204" pitchFamily="18" charset="0"/>
                                     </a:rPr>
                                     <m:t>right</m:t>
                                   </m:r>
                                 </m:sub>
-                                <m:sup/>
-                                <m:e>
-                                  <m:sSubSup>
-                                    <m:sSubSupPr>
-                                      <m:ctrlPr>
-                                        <a:rPr lang="en-US" b="0" i="1" dirty="0" smtClean="0">
-                                          <a:latin typeface="Cambria Math" panose="02040503050406030204" pitchFamily="18" charset="0"/>
-                                        </a:rPr>
-                                      </m:ctrlPr>
-                                    </m:sSubSupPr>
-                                    <m:e>
-                                      <m:sSubSup>
-                                        <m:sSubSupPr>
-                                          <m:ctrlPr>
-                                            <a:rPr lang="en-US" b="0" i="1" dirty="0" smtClean="0">
-                                              <a:latin typeface="Cambria Math" panose="02040503050406030204" pitchFamily="18" charset="0"/>
-                                            </a:rPr>
-                                          </m:ctrlPr>
-                                        </m:sSubSupPr>
-                                        <m:e>
-                                          <m:r>
-                                            <a:rPr lang="en-US" b="0" i="1" dirty="0" smtClean="0">
-                                              <a:latin typeface="Cambria Math" panose="02040503050406030204" pitchFamily="18" charset="0"/>
-                                            </a:rPr>
-                                            <m:t>𝑆</m:t>
-                                          </m:r>
-                                        </m:e>
-                                        <m:sub>
-                                          <m:r>
-                                            <a:rPr lang="en-US" b="0" i="1" dirty="0" smtClean="0">
-                                              <a:latin typeface="Cambria Math" panose="02040503050406030204" pitchFamily="18" charset="0"/>
-                                            </a:rPr>
-                                            <m:t>1,</m:t>
-                                          </m:r>
-                                          <m:r>
-                                            <a:rPr lang="en-US" b="0" i="1" dirty="0" smtClean="0">
-                                              <a:latin typeface="Cambria Math" panose="02040503050406030204" pitchFamily="18" charset="0"/>
-                                            </a:rPr>
-                                            <m:t>𝑖</m:t>
-                                          </m:r>
-                                        </m:sub>
-                                        <m:sup>
-                                          <m:r>
-                                            <a:rPr lang="en-US" b="0" i="1" dirty="0" smtClean="0">
-                                              <a:latin typeface="Cambria Math" panose="02040503050406030204" pitchFamily="18" charset="0"/>
-                                            </a:rPr>
-                                            <m:t>𝑧</m:t>
-                                          </m:r>
-                                        </m:sup>
-                                      </m:sSubSup>
-                                      <m:r>
-                                        <a:rPr lang="en-US" b="0" i="1" dirty="0" smtClean="0">
-                                          <a:latin typeface="Cambria Math" panose="02040503050406030204" pitchFamily="18" charset="0"/>
-                                        </a:rPr>
-                                        <m:t>+</m:t>
-                                      </m:r>
-                                      <m:r>
-                                        <a:rPr lang="en-US" b="0" i="1" dirty="0" smtClean="0">
-                                          <a:latin typeface="Cambria Math" panose="02040503050406030204" pitchFamily="18" charset="0"/>
-                                        </a:rPr>
-                                        <m:t>𝑆</m:t>
-                                      </m:r>
-                                    </m:e>
-                                    <m:sub>
-                                      <m:r>
-                                        <a:rPr lang="en-US" b="0" i="1" dirty="0" smtClean="0">
-                                          <a:latin typeface="Cambria Math" panose="02040503050406030204" pitchFamily="18" charset="0"/>
-                                        </a:rPr>
-                                        <m:t>2,</m:t>
-                                      </m:r>
-                                      <m:r>
-                                        <a:rPr lang="en-US" b="0" i="1" dirty="0" smtClean="0">
-                                          <a:latin typeface="Cambria Math" panose="02040503050406030204" pitchFamily="18" charset="0"/>
-                                        </a:rPr>
-                                        <m:t>𝑖</m:t>
-                                      </m:r>
-                                    </m:sub>
-                                    <m:sup>
-                                      <m:r>
-                                        <a:rPr lang="en-US" b="0" i="1" dirty="0" smtClean="0">
-                                          <a:latin typeface="Cambria Math" panose="02040503050406030204" pitchFamily="18" charset="0"/>
-                                        </a:rPr>
-                                        <m:t>𝑧</m:t>
-                                      </m:r>
-                                    </m:sup>
-                                  </m:sSubSup>
-                                </m:e>
-                              </m:nary>
+                                <m:sup>
+                                  <m:r>
+                                    <a:rPr lang="en-US" sz="2400" i="1" dirty="0">
+                                      <a:latin typeface="Cambria Math" panose="02040503050406030204" pitchFamily="18" charset="0"/>
+                                    </a:rPr>
+                                    <m:t>𝑧</m:t>
+                                  </m:r>
+                                </m:sup>
+                              </m:sSubSup>
                             </m:e>
                           </m:d>
                         </m:e>
@@ -5482,17 +6274,17 @@
                     </m:oMath>
                   </m:oMathPara>
                 </a14:m>
-                <a:endParaRPr lang="en-US" b="0" dirty="0"/>
+                <a:endParaRPr lang="en-US" sz="2400" b="0" dirty="0"/>
               </a:p>
               <a:p>
                 <a:r>
-                  <a:rPr lang="en-US" dirty="0"/>
+                  <a:rPr lang="en-US" sz="2400" dirty="0"/>
                   <a:t>For very small </a:t>
                 </a:r>
                 <a14:m>
                   <m:oMath xmlns:m="http://schemas.openxmlformats.org/officeDocument/2006/math">
                     <m:r>
-                      <a:rPr lang="en-US" b="0" i="1" smtClean="0">
+                      <a:rPr lang="en-US" sz="2400" b="0" i="1" smtClean="0">
                         <a:latin typeface="Cambria Math" panose="02040503050406030204" pitchFamily="18" charset="0"/>
                       </a:rPr>
                       <m:t>𝜇</m:t>
@@ -5500,13 +6292,13 @@
                   </m:oMath>
                 </a14:m>
                 <a:r>
-                  <a:rPr lang="en-US" dirty="0"/>
+                  <a:rPr lang="en-US" sz="2400" dirty="0"/>
                   <a:t>, initial state is almost the infinite temperature mixed state, with slight polarization in opposite directions in left/right half</a:t>
                 </a:r>
               </a:p>
               <a:p>
                 <a:r>
-                  <a:rPr lang="en-US" dirty="0"/>
+                  <a:rPr lang="en-US" sz="2400" dirty="0"/>
                   <a:t>Natural measure of transport is “magnetization transfer”</a:t>
                 </a:r>
               </a:p>
@@ -5514,7 +6306,7 @@
                 <a:pPr marL="0" indent="0">
                   <a:buNone/>
                 </a:pPr>
-                <a:endParaRPr lang="en-US" sz="800" dirty="0">
+                <a:endParaRPr lang="en-US" sz="700" dirty="0">
                   <a:latin typeface="Cambria Math" panose="02040503050406030204" pitchFamily="18" charset="0"/>
                 </a:endParaRPr>
               </a:p>
@@ -5532,13 +6324,13 @@
                         <m:rPr>
                           <m:sty m:val="p"/>
                         </m:rPr>
-                        <a:rPr lang="en-US" b="0" i="0" smtClean="0">
+                        <a:rPr lang="en-US" sz="2400" b="0" i="0" smtClean="0">
                           <a:latin typeface="Cambria Math" panose="02040503050406030204" pitchFamily="18" charset="0"/>
                         </a:rPr>
                         <m:t>Δ</m:t>
                       </m:r>
                       <m:r>
-                        <a:rPr lang="en-US" b="0" i="1" smtClean="0">
+                        <a:rPr lang="en-US" sz="2400" b="0" i="1" smtClean="0">
                           <a:latin typeface="Cambria Math" panose="02040503050406030204" pitchFamily="18" charset="0"/>
                         </a:rPr>
                         <m:t>𝑠</m:t>
@@ -5546,14 +6338,14 @@
                       <m:d>
                         <m:dPr>
                           <m:ctrlPr>
-                            <a:rPr lang="en-US" b="0" i="1" smtClean="0">
+                            <a:rPr lang="en-US" sz="2400" b="0" i="1" smtClean="0">
                               <a:latin typeface="Cambria Math" panose="02040503050406030204" pitchFamily="18" charset="0"/>
                             </a:rPr>
                           </m:ctrlPr>
                         </m:dPr>
                         <m:e>
                           <m:r>
-                            <a:rPr lang="en-US" b="0" i="1" smtClean="0">
+                            <a:rPr lang="en-US" sz="2400" b="0" i="1" smtClean="0">
                               <a:latin typeface="Cambria Math" panose="02040503050406030204" pitchFamily="18" charset="0"/>
                             </a:rPr>
                             <m:t>𝑡</m:t>
@@ -5561,147 +6353,173 @@
                         </m:e>
                       </m:d>
                       <m:r>
-                        <a:rPr lang="en-US" b="0" i="1" smtClean="0">
+                        <a:rPr lang="en-US" sz="2400" b="0" i="1" smtClean="0">
                           <a:latin typeface="Cambria Math" panose="02040503050406030204" pitchFamily="18" charset="0"/>
                         </a:rPr>
-                        <m:t>≡⟨</m:t>
+                        <m:t>≡</m:t>
                       </m:r>
-                      <m:sSubSup>
-                        <m:sSubSupPr>
+                      <m:sSub>
+                        <m:sSubPr>
                           <m:ctrlPr>
-                            <a:rPr lang="en-US" b="0" i="1" dirty="0" smtClean="0">
+                            <a:rPr lang="en-US" sz="2400" b="0" i="1" dirty="0" smtClean="0">
                               <a:latin typeface="Cambria Math" panose="02040503050406030204" pitchFamily="18" charset="0"/>
                             </a:rPr>
                           </m:ctrlPr>
-                        </m:sSubSupPr>
+                        </m:sSubPr>
                         <m:e>
-                          <m:r>
-                            <a:rPr lang="en-US" b="0" i="1" dirty="0" smtClean="0">
-                              <a:latin typeface="Cambria Math" panose="02040503050406030204" pitchFamily="18" charset="0"/>
-                            </a:rPr>
-                            <m:t>𝑆</m:t>
-                          </m:r>
+                          <m:d>
+                            <m:dPr>
+                              <m:begChr m:val="⟨"/>
+                              <m:endChr m:val="⟩"/>
+                              <m:ctrlPr>
+                                <a:rPr lang="en-US" sz="2400" b="0" i="1" smtClean="0">
+                                  <a:latin typeface="Cambria Math" panose="02040503050406030204" pitchFamily="18" charset="0"/>
+                                </a:rPr>
+                              </m:ctrlPr>
+                            </m:dPr>
+                            <m:e>
+                              <m:sSubSup>
+                                <m:sSubSupPr>
+                                  <m:ctrlPr>
+                                    <a:rPr lang="en-US" sz="2400" b="0" i="1" dirty="0" smtClean="0">
+                                      <a:latin typeface="Cambria Math" panose="02040503050406030204" pitchFamily="18" charset="0"/>
+                                    </a:rPr>
+                                  </m:ctrlPr>
+                                </m:sSubSupPr>
+                                <m:e>
+                                  <m:r>
+                                    <a:rPr lang="en-US" sz="2400" b="0" i="1" dirty="0" smtClean="0">
+                                      <a:latin typeface="Cambria Math" panose="02040503050406030204" pitchFamily="18" charset="0"/>
+                                    </a:rPr>
+                                    <m:t>𝑆</m:t>
+                                  </m:r>
+                                </m:e>
+                                <m:sub>
+                                  <m:r>
+                                    <m:rPr>
+                                      <m:sty m:val="p"/>
+                                    </m:rPr>
+                                    <a:rPr lang="en-US" sz="2400" b="0" i="0" dirty="0" smtClean="0">
+                                      <a:latin typeface="Cambria Math" panose="02040503050406030204" pitchFamily="18" charset="0"/>
+                                    </a:rPr>
+                                    <m:t>left</m:t>
+                                  </m:r>
+                                </m:sub>
+                                <m:sup>
+                                  <m:r>
+                                    <a:rPr lang="en-US" sz="2400" b="0" i="1" dirty="0" smtClean="0">
+                                      <a:latin typeface="Cambria Math" panose="02040503050406030204" pitchFamily="18" charset="0"/>
+                                    </a:rPr>
+                                    <m:t>𝑧</m:t>
+                                  </m:r>
+                                </m:sup>
+                              </m:sSubSup>
+                              <m:d>
+                                <m:dPr>
+                                  <m:ctrlPr>
+                                    <a:rPr lang="en-US" sz="2400" b="0" i="1" dirty="0" smtClean="0">
+                                      <a:latin typeface="Cambria Math" panose="02040503050406030204" pitchFamily="18" charset="0"/>
+                                    </a:rPr>
+                                  </m:ctrlPr>
+                                </m:dPr>
+                                <m:e>
+                                  <m:r>
+                                    <a:rPr lang="en-US" sz="2400" b="0" i="1" dirty="0" smtClean="0">
+                                      <a:latin typeface="Cambria Math" panose="02040503050406030204" pitchFamily="18" charset="0"/>
+                                    </a:rPr>
+                                    <m:t>𝑡</m:t>
+                                  </m:r>
+                                </m:e>
+                              </m:d>
+                              <m:r>
+                                <a:rPr lang="en-US" sz="2400" b="0" i="1" dirty="0" smtClean="0">
+                                  <a:latin typeface="Cambria Math" panose="02040503050406030204" pitchFamily="18" charset="0"/>
+                                </a:rPr>
+                                <m:t>−</m:t>
+                              </m:r>
+                              <m:sSubSup>
+                                <m:sSubSupPr>
+                                  <m:ctrlPr>
+                                    <a:rPr lang="en-US" sz="2400" b="0" i="1" dirty="0" smtClean="0">
+                                      <a:latin typeface="Cambria Math" panose="02040503050406030204" pitchFamily="18" charset="0"/>
+                                    </a:rPr>
+                                  </m:ctrlPr>
+                                </m:sSubSupPr>
+                                <m:e>
+                                  <m:r>
+                                    <a:rPr lang="en-US" sz="2400" b="0" i="1" dirty="0" smtClean="0">
+                                      <a:latin typeface="Cambria Math" panose="02040503050406030204" pitchFamily="18" charset="0"/>
+                                    </a:rPr>
+                                    <m:t>𝑆</m:t>
+                                  </m:r>
+                                </m:e>
+                                <m:sub>
+                                  <m:r>
+                                    <m:rPr>
+                                      <m:sty m:val="p"/>
+                                    </m:rPr>
+                                    <a:rPr lang="en-US" sz="2400" b="0" i="0" dirty="0" smtClean="0">
+                                      <a:latin typeface="Cambria Math" panose="02040503050406030204" pitchFamily="18" charset="0"/>
+                                    </a:rPr>
+                                    <m:t>left</m:t>
+                                  </m:r>
+                                </m:sub>
+                                <m:sup>
+                                  <m:r>
+                                    <a:rPr lang="en-US" sz="2400" b="0" i="1" dirty="0" smtClean="0">
+                                      <a:latin typeface="Cambria Math" panose="02040503050406030204" pitchFamily="18" charset="0"/>
+                                    </a:rPr>
+                                    <m:t>𝑧</m:t>
+                                  </m:r>
+                                </m:sup>
+                              </m:sSubSup>
+                              <m:d>
+                                <m:dPr>
+                                  <m:ctrlPr>
+                                    <a:rPr lang="en-US" sz="2400" b="0" i="1" dirty="0" smtClean="0">
+                                      <a:latin typeface="Cambria Math" panose="02040503050406030204" pitchFamily="18" charset="0"/>
+                                    </a:rPr>
+                                  </m:ctrlPr>
+                                </m:dPr>
+                                <m:e>
+                                  <m:r>
+                                    <a:rPr lang="en-US" sz="2400" b="0" i="1" dirty="0" smtClean="0">
+                                      <a:latin typeface="Cambria Math" panose="02040503050406030204" pitchFamily="18" charset="0"/>
+                                    </a:rPr>
+                                    <m:t>0</m:t>
+                                  </m:r>
+                                </m:e>
+                              </m:d>
+                            </m:e>
+                          </m:d>
                         </m:e>
                         <m:sub>
                           <m:r>
-                            <m:rPr>
-                              <m:sty m:val="p"/>
-                            </m:rPr>
-                            <a:rPr lang="en-US" b="0" i="0" dirty="0" smtClean="0">
+                            <a:rPr lang="en-US" sz="2400" b="0" i="1" dirty="0" smtClean="0">
                               <a:latin typeface="Cambria Math" panose="02040503050406030204" pitchFamily="18" charset="0"/>
                             </a:rPr>
-                            <m:t>left</m:t>
+                            <m:t>𝜇</m:t>
                           </m:r>
                         </m:sub>
-                        <m:sup>
-                          <m:r>
-                            <a:rPr lang="en-US" b="0" i="1" dirty="0" smtClean="0">
-                              <a:latin typeface="Cambria Math" panose="02040503050406030204" pitchFamily="18" charset="0"/>
-                            </a:rPr>
-                            <m:t>𝑧</m:t>
-                          </m:r>
-                        </m:sup>
-                      </m:sSubSup>
-                      <m:d>
-                        <m:dPr>
-                          <m:ctrlPr>
-                            <a:rPr lang="en-US" b="0" i="1" dirty="0" smtClean="0">
-                              <a:latin typeface="Cambria Math" panose="02040503050406030204" pitchFamily="18" charset="0"/>
-                            </a:rPr>
-                          </m:ctrlPr>
-                        </m:dPr>
-                        <m:e>
-                          <m:r>
-                            <a:rPr lang="en-US" b="0" i="1" dirty="0" smtClean="0">
-                              <a:latin typeface="Cambria Math" panose="02040503050406030204" pitchFamily="18" charset="0"/>
-                            </a:rPr>
-                            <m:t>𝑡</m:t>
-                          </m:r>
-                        </m:e>
-                      </m:d>
-                      <m:r>
-                        <a:rPr lang="en-US" b="0" i="1" dirty="0" smtClean="0">
-                          <a:latin typeface="Cambria Math" panose="02040503050406030204" pitchFamily="18" charset="0"/>
-                        </a:rPr>
-                        <m:t>−</m:t>
-                      </m:r>
-                      <m:sSubSup>
-                        <m:sSubSupPr>
-                          <m:ctrlPr>
-                            <a:rPr lang="en-US" b="0" i="1" dirty="0" smtClean="0">
-                              <a:latin typeface="Cambria Math" panose="02040503050406030204" pitchFamily="18" charset="0"/>
-                            </a:rPr>
-                          </m:ctrlPr>
-                        </m:sSubSupPr>
-                        <m:e>
-                          <m:r>
-                            <a:rPr lang="en-US" b="0" i="1" dirty="0" smtClean="0">
-                              <a:latin typeface="Cambria Math" panose="02040503050406030204" pitchFamily="18" charset="0"/>
-                            </a:rPr>
-                            <m:t>𝑆</m:t>
-                          </m:r>
-                        </m:e>
-                        <m:sub>
-                          <m:r>
-                            <m:rPr>
-                              <m:sty m:val="p"/>
-                            </m:rPr>
-                            <a:rPr lang="en-US" b="0" i="0" dirty="0" smtClean="0">
-                              <a:latin typeface="Cambria Math" panose="02040503050406030204" pitchFamily="18" charset="0"/>
-                            </a:rPr>
-                            <m:t>left</m:t>
-                          </m:r>
-                        </m:sub>
-                        <m:sup>
-                          <m:r>
-                            <a:rPr lang="en-US" b="0" i="1" dirty="0" smtClean="0">
-                              <a:latin typeface="Cambria Math" panose="02040503050406030204" pitchFamily="18" charset="0"/>
-                            </a:rPr>
-                            <m:t>𝑧</m:t>
-                          </m:r>
-                        </m:sup>
-                      </m:sSubSup>
-                      <m:d>
-                        <m:dPr>
-                          <m:ctrlPr>
-                            <a:rPr lang="en-US" b="0" i="1" dirty="0" smtClean="0">
-                              <a:latin typeface="Cambria Math" panose="02040503050406030204" pitchFamily="18" charset="0"/>
-                            </a:rPr>
-                          </m:ctrlPr>
-                        </m:dPr>
-                        <m:e>
-                          <m:r>
-                            <a:rPr lang="en-US" b="0" i="1" dirty="0" smtClean="0">
-                              <a:latin typeface="Cambria Math" panose="02040503050406030204" pitchFamily="18" charset="0"/>
-                            </a:rPr>
-                            <m:t>0</m:t>
-                          </m:r>
-                        </m:e>
-                      </m:d>
-                      <m:r>
-                        <a:rPr lang="en-US" b="0" i="1" dirty="0" smtClean="0">
-                          <a:latin typeface="Cambria Math" panose="02040503050406030204" pitchFamily="18" charset="0"/>
-                        </a:rPr>
-                        <m:t>⟩</m:t>
-                      </m:r>
+                      </m:sSub>
                     </m:oMath>
                   </m:oMathPara>
                 </a14:m>
-                <a:endParaRPr lang="en-US" dirty="0"/>
+                <a:endParaRPr lang="en-US" sz="2400" dirty="0"/>
               </a:p>
               <a:p>
                 <a:pPr marL="0" indent="0">
                   <a:buNone/>
                 </a:pPr>
                 <a:r>
-                  <a:rPr lang="en-US" dirty="0"/>
+                  <a:rPr lang="en-US" sz="2400" dirty="0"/>
                   <a:t> which measures the total magnetization that has transferred from the left to the right half </a:t>
                 </a:r>
               </a:p>
             </p:txBody>
           </p:sp>
         </mc:Choice>
-        <mc:Fallback xmlns="">
+        <mc:Fallback>
           <p:sp>
             <p:nvSpPr>
               <p:cNvPr id="3" name="Content Placeholder 2">
@@ -5722,7 +6540,7 @@
               <a:blipFill>
                 <a:blip r:embed="rId2"/>
                 <a:stretch>
-                  <a:fillRect l="-1086" t="-17442" r="-1448" b="-1744"/>
+                  <a:fillRect l="-928" t="-1961" r="-754"/>
                 </a:stretch>
               </a:blipFill>
             </p:spPr>
@@ -6081,7 +6899,7 @@
 </p:sld>
 </file>
 
-<file path=ppt/slides/slide12.xml><?xml version="1.0" encoding="utf-8"?>
+<file path=ppt/slides/slide13.xml><?xml version="1.0" encoding="utf-8"?>
 <p:sld xmlns:a="http://schemas.openxmlformats.org/drawingml/2006/main" xmlns:r="http://schemas.openxmlformats.org/officeDocument/2006/relationships" xmlns:p="http://schemas.openxmlformats.org/presentationml/2006/main">
   <p:cSld>
     <p:spTree>
@@ -6116,18 +6934,20 @@
         </p:nvSpPr>
         <p:spPr/>
         <p:txBody>
-          <a:bodyPr/>
+          <a:bodyPr>
+            <a:normAutofit/>
+          </a:bodyPr>
           <a:lstStyle/>
           <a:p>
             <a:r>
-              <a:rPr lang="en-US" dirty="0"/>
+              <a:rPr lang="en-US" sz="3600" dirty="0"/>
               <a:t>MPS Simulations</a:t>
             </a:r>
           </a:p>
         </p:txBody>
       </p:sp>
-      <mc:AlternateContent xmlns:mc="http://schemas.openxmlformats.org/markup-compatibility/2006" xmlns:a14="http://schemas.microsoft.com/office/drawing/2010/main">
-        <mc:Choice Requires="a14">
+      <mc:AlternateContent xmlns:mc="http://schemas.openxmlformats.org/markup-compatibility/2006">
+        <mc:Choice xmlns:a14="http://schemas.microsoft.com/office/drawing/2010/main" Requires="a14">
           <p:sp>
             <p:nvSpPr>
               <p:cNvPr id="3" name="Content Placeholder 2">
@@ -6152,10 +6972,10 @@
               <a:lstStyle/>
               <a:p>
                 <a:r>
-                  <a:rPr lang="en-US" dirty="0"/>
+                  <a:rPr lang="en-US" sz="2400" dirty="0"/>
                   <a:t>The magnetization transfer scales as</a:t>
                 </a:r>
-                <a:endParaRPr lang="en-US" b="0" i="1" dirty="0">
+                <a:endParaRPr lang="en-US" sz="2400" b="0" i="1" dirty="0">
                   <a:latin typeface="Cambria Math" panose="02040503050406030204" pitchFamily="18" charset="0"/>
                 </a:endParaRPr>
               </a:p>
@@ -6163,7 +6983,7 @@
                 <a:pPr marL="0" indent="0">
                   <a:buNone/>
                 </a:pPr>
-                <a:endParaRPr lang="en-US" sz="800" dirty="0">
+                <a:endParaRPr lang="en-US" sz="700" dirty="0">
                   <a:latin typeface="Cambria Math" panose="02040503050406030204" pitchFamily="18" charset="0"/>
                 </a:endParaRPr>
               </a:p>
@@ -6181,13 +7001,13 @@
                         <m:rPr>
                           <m:sty m:val="p"/>
                         </m:rPr>
-                        <a:rPr lang="en-US" b="0" i="0" smtClean="0">
+                        <a:rPr lang="en-US" sz="2400" b="0" i="0" smtClean="0">
                           <a:latin typeface="Cambria Math" panose="02040503050406030204" pitchFamily="18" charset="0"/>
                         </a:rPr>
                         <m:t>Δ</m:t>
                       </m:r>
                       <m:r>
-                        <a:rPr lang="en-US" b="0" i="1" smtClean="0">
+                        <a:rPr lang="en-US" sz="2400" b="0" i="1" smtClean="0">
                           <a:latin typeface="Cambria Math" panose="02040503050406030204" pitchFamily="18" charset="0"/>
                         </a:rPr>
                         <m:t>𝑠</m:t>
@@ -6195,14 +7015,14 @@
                       <m:d>
                         <m:dPr>
                           <m:ctrlPr>
-                            <a:rPr lang="en-US" b="0" i="1" smtClean="0">
+                            <a:rPr lang="en-US" sz="2400" b="0" i="1" smtClean="0">
                               <a:latin typeface="Cambria Math" panose="02040503050406030204" pitchFamily="18" charset="0"/>
                             </a:rPr>
                           </m:ctrlPr>
                         </m:dPr>
                         <m:e>
                           <m:r>
-                            <a:rPr lang="en-US" b="0" i="1" smtClean="0">
+                            <a:rPr lang="en-US" sz="2400" b="0" i="1" smtClean="0">
                               <a:latin typeface="Cambria Math" panose="02040503050406030204" pitchFamily="18" charset="0"/>
                             </a:rPr>
                             <m:t>𝑡</m:t>
@@ -6210,7 +7030,7 @@
                         </m:e>
                       </m:d>
                       <m:r>
-                        <a:rPr lang="en-US" b="0" i="1" smtClean="0">
+                        <a:rPr lang="en-US" sz="2400" b="0" i="1" smtClean="0">
                           <a:latin typeface="Cambria Math" panose="02040503050406030204" pitchFamily="18" charset="0"/>
                         </a:rPr>
                         <m:t>∼</m:t>
@@ -6218,14 +7038,14 @@
                       <m:sSup>
                         <m:sSupPr>
                           <m:ctrlPr>
-                            <a:rPr lang="en-US" b="0" i="1" smtClean="0">
+                            <a:rPr lang="en-US" sz="2400" b="0" i="1" smtClean="0">
                               <a:latin typeface="Cambria Math" panose="02040503050406030204" pitchFamily="18" charset="0"/>
                             </a:rPr>
                           </m:ctrlPr>
                         </m:sSupPr>
                         <m:e>
                           <m:r>
-                            <a:rPr lang="en-US" b="0" i="1" smtClean="0">
+                            <a:rPr lang="en-US" sz="2400" b="0" i="1" smtClean="0">
                               <a:latin typeface="Cambria Math" panose="02040503050406030204" pitchFamily="18" charset="0"/>
                             </a:rPr>
                             <m:t>𝑡</m:t>
@@ -6233,13 +7053,13 @@
                         </m:e>
                         <m:sup>
                           <m:r>
-                            <a:rPr lang="en-US" b="0" i="1" smtClean="0">
+                            <a:rPr lang="en-US" sz="2400" b="0" i="1" smtClean="0">
                               <a:latin typeface="Cambria Math" panose="02040503050406030204" pitchFamily="18" charset="0"/>
                             </a:rPr>
                             <m:t>1/</m:t>
                           </m:r>
                           <m:r>
-                            <a:rPr lang="en-US" b="0" i="1" smtClean="0">
+                            <a:rPr lang="en-US" sz="2400" b="0" i="1" smtClean="0">
                               <a:latin typeface="Cambria Math" panose="02040503050406030204" pitchFamily="18" charset="0"/>
                             </a:rPr>
                             <m:t>𝑧</m:t>
@@ -6249,23 +7069,23 @@
                     </m:oMath>
                   </m:oMathPara>
                 </a14:m>
-                <a:endParaRPr lang="en-US" dirty="0"/>
+                <a:endParaRPr lang="en-US" sz="2400" dirty="0"/>
               </a:p>
               <a:p>
                 <a:r>
-                  <a:rPr lang="en-US" dirty="0"/>
+                  <a:rPr lang="en-US" sz="2400" dirty="0"/>
                   <a:t>With an integrability breaking term in the Hamiltonian, we expect </a:t>
                 </a:r>
                 <a14:m>
                   <m:oMath xmlns:m="http://schemas.openxmlformats.org/officeDocument/2006/math">
                     <m:r>
-                      <a:rPr lang="en-US" b="0" i="1" smtClean="0">
+                      <a:rPr lang="en-US" sz="2400" b="0" i="1" smtClean="0">
                         <a:latin typeface="Cambria Math" panose="02040503050406030204" pitchFamily="18" charset="0"/>
                       </a:rPr>
                       <m:t>𝑧</m:t>
                     </m:r>
                     <m:r>
-                      <a:rPr lang="en-US" b="0" i="0" smtClean="0">
+                      <a:rPr lang="en-US" sz="2400" b="0" i="0" smtClean="0">
                         <a:latin typeface="Cambria Math" panose="02040503050406030204" pitchFamily="18" charset="0"/>
                       </a:rPr>
                       <m:t> </m:t>
@@ -6273,19 +7093,19 @@
                   </m:oMath>
                 </a14:m>
                 <a:r>
-                  <a:rPr lang="en-US" dirty="0"/>
+                  <a:rPr lang="en-US" sz="2400" dirty="0"/>
                   <a:t>to interpolate between superdiffusion </a:t>
                 </a:r>
                 <a14:m>
                   <m:oMath xmlns:m="http://schemas.openxmlformats.org/officeDocument/2006/math">
                     <m:r>
-                      <a:rPr lang="en-US" b="0" i="1" smtClean="0">
+                      <a:rPr lang="en-US" sz="2400" b="0" i="1" smtClean="0">
                         <a:latin typeface="Cambria Math" panose="02040503050406030204" pitchFamily="18" charset="0"/>
                       </a:rPr>
                       <m:t>𝑧</m:t>
                     </m:r>
                     <m:r>
-                      <a:rPr lang="en-US" b="0" i="1" smtClean="0">
+                      <a:rPr lang="en-US" sz="2400" b="0" i="1" smtClean="0">
                         <a:latin typeface="Cambria Math" panose="02040503050406030204" pitchFamily="18" charset="0"/>
                       </a:rPr>
                       <m:t>=1.5</m:t>
@@ -6293,30 +7113,30 @@
                   </m:oMath>
                 </a14:m>
                 <a:r>
-                  <a:rPr lang="en-US" dirty="0"/>
+                  <a:rPr lang="en-US" sz="2400" dirty="0"/>
                   <a:t> and </a:t>
                 </a:r>
                 <a14:m>
                   <m:oMath xmlns:m="http://schemas.openxmlformats.org/officeDocument/2006/math">
                     <m:r>
-                      <a:rPr lang="en-US" b="0" i="1" smtClean="0">
+                      <a:rPr lang="en-US" sz="2400" b="0" i="1" smtClean="0">
                         <a:latin typeface="Cambria Math" panose="02040503050406030204" pitchFamily="18" charset="0"/>
                       </a:rPr>
                       <m:t>𝑧</m:t>
                     </m:r>
                     <m:r>
-                      <a:rPr lang="en-US" b="0" i="1" smtClean="0">
+                      <a:rPr lang="en-US" sz="2400" b="0" i="1" smtClean="0">
                         <a:latin typeface="Cambria Math" panose="02040503050406030204" pitchFamily="18" charset="0"/>
                       </a:rPr>
                       <m:t>=2</m:t>
                     </m:r>
                   </m:oMath>
                 </a14:m>
-                <a:endParaRPr lang="en-US" dirty="0"/>
+                <a:endParaRPr lang="en-US" sz="2400" dirty="0"/>
               </a:p>
               <a:p>
                 <a:r>
-                  <a:rPr lang="en-US" dirty="0"/>
+                  <a:rPr lang="en-US" sz="2400" dirty="0"/>
                   <a:t>By plotting </a:t>
                 </a:r>
                 <a14:m>
@@ -6325,13 +7145,13 @@
                       <m:rPr>
                         <m:sty m:val="p"/>
                       </m:rPr>
-                      <a:rPr lang="en-US" b="0" i="0" smtClean="0">
+                      <a:rPr lang="en-US" sz="2400" b="0" i="0" smtClean="0">
                         <a:latin typeface="Cambria Math" panose="02040503050406030204" pitchFamily="18" charset="0"/>
                       </a:rPr>
                       <m:t>Δ</m:t>
                     </m:r>
                     <m:r>
-                      <a:rPr lang="en-US" b="0" i="1" smtClean="0">
+                      <a:rPr lang="en-US" sz="2400" b="0" i="1" smtClean="0">
                         <a:latin typeface="Cambria Math" panose="02040503050406030204" pitchFamily="18" charset="0"/>
                       </a:rPr>
                       <m:t>𝑠</m:t>
@@ -6339,14 +7159,14 @@
                     <m:d>
                       <m:dPr>
                         <m:ctrlPr>
-                          <a:rPr lang="en-US" b="0" i="1" smtClean="0">
+                          <a:rPr lang="en-US" sz="2400" b="0" i="1" smtClean="0">
                             <a:latin typeface="Cambria Math" panose="02040503050406030204" pitchFamily="18" charset="0"/>
                           </a:rPr>
                         </m:ctrlPr>
                       </m:dPr>
                       <m:e>
                         <m:r>
-                          <a:rPr lang="en-US" b="0" i="1" smtClean="0">
+                          <a:rPr lang="en-US" sz="2400" b="0" i="1" smtClean="0">
                             <a:latin typeface="Cambria Math" panose="02040503050406030204" pitchFamily="18" charset="0"/>
                           </a:rPr>
                           <m:t>𝑡</m:t>
@@ -6356,43 +7176,43 @@
                   </m:oMath>
                 </a14:m>
                 <a:r>
-                  <a:rPr lang="en-US" dirty="0"/>
+                  <a:rPr lang="en-US" sz="2400" dirty="0"/>
                   <a:t> and performing fits on scanning windows over time, we can have an estimate for the time dependence of the dynamical exponent: </a:t>
                 </a:r>
                 <a14:m>
                   <m:oMath xmlns:m="http://schemas.openxmlformats.org/officeDocument/2006/math">
                     <m:r>
-                      <a:rPr lang="en-US" b="0" i="1" smtClean="0">
+                      <a:rPr lang="en-US" sz="2400" b="0" i="1" smtClean="0">
                         <a:latin typeface="Cambria Math" panose="02040503050406030204" pitchFamily="18" charset="0"/>
                       </a:rPr>
                       <m:t>𝑧</m:t>
                     </m:r>
                     <m:r>
-                      <a:rPr lang="en-US" b="0" i="1" smtClean="0">
+                      <a:rPr lang="en-US" sz="2400" b="0" i="1" smtClean="0">
                         <a:latin typeface="Cambria Math" panose="02040503050406030204" pitchFamily="18" charset="0"/>
                       </a:rPr>
                       <m:t>(</m:t>
                     </m:r>
                     <m:r>
-                      <a:rPr lang="en-US" b="0" i="1" smtClean="0">
+                      <a:rPr lang="en-US" sz="2400" b="0" i="1" smtClean="0">
                         <a:latin typeface="Cambria Math" panose="02040503050406030204" pitchFamily="18" charset="0"/>
                       </a:rPr>
                       <m:t>𝑡</m:t>
                     </m:r>
                     <m:r>
-                      <a:rPr lang="en-US" b="0" i="1" smtClean="0">
+                      <a:rPr lang="en-US" sz="2400" b="0" i="1" smtClean="0">
                         <a:latin typeface="Cambria Math" panose="02040503050406030204" pitchFamily="18" charset="0"/>
                       </a:rPr>
                       <m:t>)</m:t>
                     </m:r>
                   </m:oMath>
                 </a14:m>
-                <a:endParaRPr lang="en-US" dirty="0"/>
+                <a:endParaRPr lang="en-US" sz="2400" dirty="0"/>
               </a:p>
             </p:txBody>
           </p:sp>
         </mc:Choice>
-        <mc:Fallback xmlns="">
+        <mc:Fallback>
           <p:sp>
             <p:nvSpPr>
               <p:cNvPr id="3" name="Content Placeholder 2">
@@ -6413,7 +7233,7 @@
               <a:blipFill>
                 <a:blip r:embed="rId2"/>
                 <a:stretch>
-                  <a:fillRect l="-1086" t="-2326" r="-1809"/>
+                  <a:fillRect l="-812" t="-1961" r="-1333"/>
                 </a:stretch>
               </a:blipFill>
             </p:spPr>
@@ -6674,7 +7494,7 @@
 </p:sld>
 </file>
 
-<file path=ppt/slides/slide13.xml><?xml version="1.0" encoding="utf-8"?>
+<file path=ppt/slides/slide14.xml><?xml version="1.0" encoding="utf-8"?>
 <p:sld xmlns:a="http://schemas.openxmlformats.org/drawingml/2006/main" xmlns:r="http://schemas.openxmlformats.org/officeDocument/2006/relationships" xmlns:p="http://schemas.openxmlformats.org/presentationml/2006/main">
   <p:cSld>
     <p:spTree>
@@ -6709,11 +7529,13 @@
         </p:nvSpPr>
         <p:spPr/>
         <p:txBody>
-          <a:bodyPr/>
+          <a:bodyPr>
+            <a:normAutofit/>
+          </a:bodyPr>
           <a:lstStyle/>
           <a:p>
             <a:r>
-              <a:rPr lang="en-US" dirty="0"/>
+              <a:rPr lang="en-US" sz="3600" dirty="0"/>
               <a:t>Fermi’s Golden Rule</a:t>
             </a:r>
           </a:p>
@@ -7182,7 +8004,7 @@
 </p:sld>
 </file>
 
-<file path=ppt/slides/slide14.xml><?xml version="1.0" encoding="utf-8"?>
+<file path=ppt/slides/slide15.xml><?xml version="1.0" encoding="utf-8"?>
 <p:sld xmlns:a="http://schemas.openxmlformats.org/drawingml/2006/main" xmlns:r="http://schemas.openxmlformats.org/officeDocument/2006/relationships" xmlns:p="http://schemas.openxmlformats.org/presentationml/2006/main">
   <p:cSld>
     <p:spTree>
@@ -7368,7 +8190,7 @@
 </p:sld>
 </file>
 
-<file path=ppt/slides/slide15.xml><?xml version="1.0" encoding="utf-8"?>
+<file path=ppt/slides/slide16.xml><?xml version="1.0" encoding="utf-8"?>
 <p:sld xmlns:a="http://schemas.openxmlformats.org/drawingml/2006/main" xmlns:r="http://schemas.openxmlformats.org/officeDocument/2006/relationships" xmlns:p="http://schemas.openxmlformats.org/presentationml/2006/main">
   <p:cSld>
     <p:spTree>
@@ -7427,7 +8249,7 @@
 </p:sld>
 </file>
 
-<file path=ppt/slides/slide16.xml><?xml version="1.0" encoding="utf-8"?>
+<file path=ppt/slides/slide17.xml><?xml version="1.0" encoding="utf-8"?>
 <p:sld xmlns:a="http://schemas.openxmlformats.org/drawingml/2006/main" xmlns:r="http://schemas.openxmlformats.org/officeDocument/2006/relationships" xmlns:p="http://schemas.openxmlformats.org/presentationml/2006/main">
   <p:cSld>
     <p:spTree>
@@ -7590,7 +8412,7 @@
 </p:sld>
 </file>
 
-<file path=ppt/slides/slide17.xml><?xml version="1.0" encoding="utf-8"?>
+<file path=ppt/slides/slide18.xml><?xml version="1.0" encoding="utf-8"?>
 <p:sld xmlns:a="http://schemas.openxmlformats.org/drawingml/2006/main" xmlns:r="http://schemas.openxmlformats.org/officeDocument/2006/relationships" xmlns:p="http://schemas.openxmlformats.org/presentationml/2006/main">
   <p:cSld>
     <p:spTree>
@@ -7648,7 +8470,7 @@
 </p:sld>
 </file>
 
-<file path=ppt/slides/slide18.xml><?xml version="1.0" encoding="utf-8"?>
+<file path=ppt/slides/slide19.xml><?xml version="1.0" encoding="utf-8"?>
 <p:sld xmlns:a="http://schemas.openxmlformats.org/drawingml/2006/main" xmlns:r="http://schemas.openxmlformats.org/officeDocument/2006/relationships" xmlns:p="http://schemas.openxmlformats.org/presentationml/2006/main">
   <p:cSld>
     <p:spTree>
@@ -7683,11 +8505,13 @@
         </p:nvSpPr>
         <p:spPr/>
         <p:txBody>
-          <a:bodyPr/>
+          <a:bodyPr>
+            <a:normAutofit/>
+          </a:bodyPr>
           <a:lstStyle/>
           <a:p>
             <a:r>
-              <a:rPr lang="en-US" dirty="0"/>
+              <a:rPr lang="en-US" sz="3600" dirty="0"/>
               <a:t>Fermi’s Golden Rule</a:t>
             </a:r>
           </a:p>
@@ -8100,7 +8924,353 @@
 </p:sld>
 </file>
 
-<file path=ppt/slides/slide19.xml><?xml version="1.0" encoding="utf-8"?>
+<file path=ppt/slides/slide2.xml><?xml version="1.0" encoding="utf-8"?>
+<p:sld xmlns:a="http://schemas.openxmlformats.org/drawingml/2006/main" xmlns:r="http://schemas.openxmlformats.org/officeDocument/2006/relationships" xmlns:p="http://schemas.openxmlformats.org/presentationml/2006/main">
+  <p:cSld>
+    <p:spTree>
+      <p:nvGrpSpPr>
+        <p:cNvPr id="1" name=""/>
+        <p:cNvGrpSpPr/>
+        <p:nvPr/>
+      </p:nvGrpSpPr>
+      <p:grpSpPr>
+        <a:xfrm>
+          <a:off x="0" y="0"/>
+          <a:ext cx="0" cy="0"/>
+          <a:chOff x="0" y="0"/>
+          <a:chExt cx="0" cy="0"/>
+        </a:xfrm>
+      </p:grpSpPr>
+      <p:sp>
+        <p:nvSpPr>
+          <p:cNvPr id="2" name="Title 1">
+            <a:extLst>
+              <a:ext uri="{FF2B5EF4-FFF2-40B4-BE49-F238E27FC236}">
+                <a16:creationId xmlns:a16="http://schemas.microsoft.com/office/drawing/2014/main" id="{74EADFBC-62E0-2E02-7342-48DF1584A702}"/>
+              </a:ext>
+            </a:extLst>
+          </p:cNvPr>
+          <p:cNvSpPr>
+            <a:spLocks noGrp="1"/>
+          </p:cNvSpPr>
+          <p:nvPr>
+            <p:ph type="title"/>
+          </p:nvPr>
+        </p:nvSpPr>
+        <p:spPr/>
+        <p:txBody>
+          <a:bodyPr>
+            <a:normAutofit/>
+          </a:bodyPr>
+          <a:lstStyle/>
+          <a:p>
+            <a:r>
+              <a:rPr lang="en-US" sz="3600" dirty="0"/>
+              <a:t>Quantum Heisenberg Model</a:t>
+            </a:r>
+          </a:p>
+        </p:txBody>
+      </p:sp>
+      <mc:AlternateContent xmlns:mc="http://schemas.openxmlformats.org/markup-compatibility/2006">
+        <mc:Choice xmlns:a14="http://schemas.microsoft.com/office/drawing/2010/main" Requires="a14">
+          <p:sp>
+            <p:nvSpPr>
+              <p:cNvPr id="3" name="Content Placeholder 2">
+                <a:extLst>
+                  <a:ext uri="{FF2B5EF4-FFF2-40B4-BE49-F238E27FC236}">
+                    <a16:creationId xmlns:a16="http://schemas.microsoft.com/office/drawing/2014/main" id="{0C93D385-A6A9-2B01-E7FE-791BF52EF473}"/>
+                  </a:ext>
+                </a:extLst>
+              </p:cNvPr>
+              <p:cNvSpPr>
+                <a:spLocks noGrp="1"/>
+              </p:cNvSpPr>
+              <p:nvPr>
+                <p:ph idx="1"/>
+              </p:nvPr>
+            </p:nvSpPr>
+            <p:spPr/>
+            <p:txBody>
+              <a:bodyPr>
+                <a:normAutofit/>
+              </a:bodyPr>
+              <a:lstStyle/>
+              <a:p>
+                <a:pPr marL="0" indent="0">
+                  <a:buNone/>
+                </a:pPr>
+                <a14:m>
+                  <m:oMathPara xmlns:m="http://schemas.openxmlformats.org/officeDocument/2006/math">
+                    <m:oMathParaPr>
+                      <m:jc m:val="centerGroup"/>
+                    </m:oMathParaPr>
+                    <m:oMath xmlns:m="http://schemas.openxmlformats.org/officeDocument/2006/math">
+                      <m:r>
+                        <a:rPr lang="en-US" b="0" i="1" smtClean="0">
+                          <a:latin typeface="Cambria Math" panose="02040503050406030204" pitchFamily="18" charset="0"/>
+                        </a:rPr>
+                        <m:t>𝐻</m:t>
+                      </m:r>
+                      <m:r>
+                        <a:rPr lang="en-US" b="0" i="1" smtClean="0">
+                          <a:latin typeface="Cambria Math" panose="02040503050406030204" pitchFamily="18" charset="0"/>
+                        </a:rPr>
+                        <m:t>=</m:t>
+                      </m:r>
+                      <m:r>
+                        <a:rPr lang="en-US" b="0" i="1" smtClean="0">
+                          <a:latin typeface="Cambria Math" panose="02040503050406030204" pitchFamily="18" charset="0"/>
+                        </a:rPr>
+                        <m:t>𝐽</m:t>
+                      </m:r>
+                      <m:nary>
+                        <m:naryPr>
+                          <m:chr m:val="∑"/>
+                          <m:supHide m:val="on"/>
+                          <m:ctrlPr>
+                            <a:rPr lang="en-US" b="0" i="1" smtClean="0">
+                              <a:latin typeface="Cambria Math" panose="02040503050406030204" pitchFamily="18" charset="0"/>
+                            </a:rPr>
+                          </m:ctrlPr>
+                        </m:naryPr>
+                        <m:sub>
+                          <m:r>
+                            <m:rPr>
+                              <m:brk m:alnAt="7"/>
+                            </m:rPr>
+                            <a:rPr lang="en-US" b="0" i="1" smtClean="0">
+                              <a:latin typeface="Cambria Math" panose="02040503050406030204" pitchFamily="18" charset="0"/>
+                            </a:rPr>
+                            <m:t>&lt;</m:t>
+                          </m:r>
+                          <m:r>
+                            <a:rPr lang="en-US" b="0" i="1" smtClean="0">
+                              <a:latin typeface="Cambria Math" panose="02040503050406030204" pitchFamily="18" charset="0"/>
+                            </a:rPr>
+                            <m:t>𝑖</m:t>
+                          </m:r>
+                          <m:r>
+                            <a:rPr lang="en-US" b="0" i="1" smtClean="0">
+                              <a:latin typeface="Cambria Math" panose="02040503050406030204" pitchFamily="18" charset="0"/>
+                            </a:rPr>
+                            <m:t>,</m:t>
+                          </m:r>
+                          <m:r>
+                            <a:rPr lang="en-US" b="0" i="1" smtClean="0">
+                              <a:latin typeface="Cambria Math" panose="02040503050406030204" pitchFamily="18" charset="0"/>
+                            </a:rPr>
+                            <m:t>𝑗</m:t>
+                          </m:r>
+                          <m:r>
+                            <a:rPr lang="en-US" b="0" i="1" smtClean="0">
+                              <a:latin typeface="Cambria Math" panose="02040503050406030204" pitchFamily="18" charset="0"/>
+                            </a:rPr>
+                            <m:t>&gt;</m:t>
+                          </m:r>
+                        </m:sub>
+                        <m:sup/>
+                        <m:e>
+                          <m:sSub>
+                            <m:sSubPr>
+                              <m:ctrlPr>
+                                <a:rPr lang="en-US" b="0" i="1" dirty="0" smtClean="0">
+                                  <a:latin typeface="Cambria Math" panose="02040503050406030204" pitchFamily="18" charset="0"/>
+                                </a:rPr>
+                              </m:ctrlPr>
+                            </m:sSubPr>
+                            <m:e>
+                              <m:acc>
+                                <m:accPr>
+                                  <m:chr m:val="⃗"/>
+                                  <m:ctrlPr>
+                                    <a:rPr lang="en-US" b="0" i="1" dirty="0" smtClean="0">
+                                      <a:latin typeface="Cambria Math" panose="02040503050406030204" pitchFamily="18" charset="0"/>
+                                    </a:rPr>
+                                  </m:ctrlPr>
+                                </m:accPr>
+                                <m:e>
+                                  <m:r>
+                                    <a:rPr lang="en-US" b="0" i="1" dirty="0" smtClean="0">
+                                      <a:latin typeface="Cambria Math" panose="02040503050406030204" pitchFamily="18" charset="0"/>
+                                    </a:rPr>
+                                    <m:t>𝑆</m:t>
+                                  </m:r>
+                                </m:e>
+                              </m:acc>
+                            </m:e>
+                            <m:sub>
+                              <m:r>
+                                <a:rPr lang="en-US" b="0" i="1" dirty="0" smtClean="0">
+                                  <a:latin typeface="Cambria Math" panose="02040503050406030204" pitchFamily="18" charset="0"/>
+                                </a:rPr>
+                                <m:t>𝑖</m:t>
+                              </m:r>
+                            </m:sub>
+                          </m:sSub>
+                        </m:e>
+                      </m:nary>
+                      <m:r>
+                        <a:rPr lang="en-US" b="0" i="1" smtClean="0">
+                          <a:latin typeface="Cambria Math" panose="02040503050406030204" pitchFamily="18" charset="0"/>
+                        </a:rPr>
+                        <m:t>⋅</m:t>
+                      </m:r>
+                      <m:sSub>
+                        <m:sSubPr>
+                          <m:ctrlPr>
+                            <a:rPr lang="en-US" b="0" i="1" dirty="0" smtClean="0">
+                              <a:latin typeface="Cambria Math" panose="02040503050406030204" pitchFamily="18" charset="0"/>
+                            </a:rPr>
+                          </m:ctrlPr>
+                        </m:sSubPr>
+                        <m:e>
+                          <m:acc>
+                            <m:accPr>
+                              <m:chr m:val="⃗"/>
+                              <m:ctrlPr>
+                                <a:rPr lang="en-US" b="0" i="1" dirty="0" smtClean="0">
+                                  <a:latin typeface="Cambria Math" panose="02040503050406030204" pitchFamily="18" charset="0"/>
+                                </a:rPr>
+                              </m:ctrlPr>
+                            </m:accPr>
+                            <m:e>
+                              <m:r>
+                                <a:rPr lang="en-US" b="0" i="1" dirty="0" smtClean="0">
+                                  <a:latin typeface="Cambria Math" panose="02040503050406030204" pitchFamily="18" charset="0"/>
+                                </a:rPr>
+                                <m:t>𝑆</m:t>
+                              </m:r>
+                            </m:e>
+                          </m:acc>
+                        </m:e>
+                        <m:sub>
+                          <m:r>
+                            <a:rPr lang="en-US" b="0" i="1" dirty="0" smtClean="0">
+                              <a:latin typeface="Cambria Math" panose="02040503050406030204" pitchFamily="18" charset="0"/>
+                            </a:rPr>
+                            <m:t>𝑗</m:t>
+                          </m:r>
+                        </m:sub>
+                      </m:sSub>
+                    </m:oMath>
+                  </m:oMathPara>
+                </a14:m>
+                <a:endParaRPr lang="en-US" dirty="0"/>
+              </a:p>
+              <a:p>
+                <a:endParaRPr lang="en-US" sz="2400" dirty="0"/>
+              </a:p>
+              <a:p>
+                <a:r>
+                  <a:rPr lang="en-US" sz="2400" dirty="0"/>
+                  <a:t>Paradigmatic model of quantum magnetism, studied extensively since 1928</a:t>
+                </a:r>
+              </a:p>
+              <a:p>
+                <a:r>
+                  <a:rPr lang="en-US" sz="2400" dirty="0"/>
+                  <a:t>1D physics is extremely rich</a:t>
+                </a:r>
+              </a:p>
+              <a:p>
+                <a:pPr lvl="1"/>
+                <a:r>
+                  <a:rPr lang="en-US" sz="2000" dirty="0"/>
+                  <a:t>Half-integer spin chains are gapless; low-temperature physics = Luttinger Liquid</a:t>
+                </a:r>
+              </a:p>
+              <a:p>
+                <a:pPr lvl="1"/>
+                <a:r>
+                  <a:rPr lang="en-US" sz="2000" dirty="0"/>
+                  <a:t>Integer spin chains are gapped (S=1 Haldane chain canonical example of symmetry protected topological phase)</a:t>
+                </a:r>
+              </a:p>
+              <a:p>
+                <a:r>
+                  <a:rPr lang="en-US" sz="2400" dirty="0"/>
+                  <a:t>S=1/2 chain is exactly solvable via the Bethe ansatz</a:t>
+                </a:r>
+              </a:p>
+              <a:p>
+                <a:pPr lvl="1"/>
+                <a:r>
+                  <a:rPr lang="en-US" sz="2000" dirty="0"/>
+                  <a:t>Integrability </a:t>
+                </a:r>
+                <a14:m>
+                  <m:oMath xmlns:m="http://schemas.openxmlformats.org/officeDocument/2006/math">
+                    <m:r>
+                      <a:rPr lang="en-US" sz="2000" i="1" dirty="0">
+                        <a:latin typeface="Cambria Math" panose="02040503050406030204" pitchFamily="18" charset="0"/>
+                        <a:ea typeface="Cambria Math" panose="02040503050406030204" pitchFamily="18" charset="0"/>
+                      </a:rPr>
+                      <m:t>⇒</m:t>
+                    </m:r>
+                  </m:oMath>
+                </a14:m>
+                <a:r>
+                  <a:rPr lang="en-US" sz="2000" dirty="0"/>
+                  <a:t> infinite number of conserved charges</a:t>
+                </a:r>
+              </a:p>
+            </p:txBody>
+          </p:sp>
+        </mc:Choice>
+        <mc:Fallback>
+          <p:sp>
+            <p:nvSpPr>
+              <p:cNvPr id="3" name="Content Placeholder 2">
+                <a:extLst>
+                  <a:ext uri="{FF2B5EF4-FFF2-40B4-BE49-F238E27FC236}">
+                    <a16:creationId xmlns:a16="http://schemas.microsoft.com/office/drawing/2014/main" id="{0C93D385-A6A9-2B01-E7FE-791BF52EF473}"/>
+                  </a:ext>
+                </a:extLst>
+              </p:cNvPr>
+              <p:cNvSpPr>
+                <a:spLocks noGrp="1" noRot="1" noChangeAspect="1" noMove="1" noResize="1" noEditPoints="1" noAdjustHandles="1" noChangeArrowheads="1" noChangeShapeType="1" noTextEdit="1"/>
+              </p:cNvSpPr>
+              <p:nvPr>
+                <p:ph idx="1"/>
+              </p:nvPr>
+            </p:nvSpPr>
+            <p:spPr>
+              <a:blipFill>
+                <a:blip r:embed="rId2"/>
+                <a:stretch>
+                  <a:fillRect l="-812" r="-406"/>
+                </a:stretch>
+              </a:blipFill>
+            </p:spPr>
+            <p:txBody>
+              <a:bodyPr/>
+              <a:lstStyle/>
+              <a:p>
+                <a:r>
+                  <a:rPr lang="en-US">
+                    <a:noFill/>
+                  </a:rPr>
+                  <a:t> </a:t>
+                </a:r>
+              </a:p>
+            </p:txBody>
+          </p:sp>
+        </mc:Fallback>
+      </mc:AlternateContent>
+    </p:spTree>
+    <p:extLst>
+      <p:ext uri="{BB962C8B-B14F-4D97-AF65-F5344CB8AC3E}">
+        <p14:creationId xmlns:p14="http://schemas.microsoft.com/office/powerpoint/2010/main" val="1315459422"/>
+      </p:ext>
+    </p:extLst>
+  </p:cSld>
+  <p:clrMapOvr>
+    <a:masterClrMapping/>
+  </p:clrMapOvr>
+</p:sld>
+</file>
+
+<file path=ppt/slides/slide20.xml><?xml version="1.0" encoding="utf-8"?>
 <p:sld xmlns:a="http://schemas.openxmlformats.org/drawingml/2006/main" xmlns:r="http://schemas.openxmlformats.org/officeDocument/2006/relationships" xmlns:p="http://schemas.openxmlformats.org/presentationml/2006/main">
   <p:cSld>
     <p:spTree>
@@ -8135,11 +9305,13 @@
         </p:nvSpPr>
         <p:spPr/>
         <p:txBody>
-          <a:bodyPr/>
+          <a:bodyPr>
+            <a:normAutofit/>
+          </a:bodyPr>
           <a:lstStyle/>
           <a:p>
             <a:r>
-              <a:rPr lang="en-US" dirty="0"/>
+              <a:rPr lang="en-US" sz="3600" dirty="0"/>
               <a:t>Other Perturbations</a:t>
             </a:r>
           </a:p>
@@ -9074,350 +10246,7 @@
 </p:sld>
 </file>
 
-<file path=ppt/slides/slide2.xml><?xml version="1.0" encoding="utf-8"?>
-<p:sld xmlns:a="http://schemas.openxmlformats.org/drawingml/2006/main" xmlns:r="http://schemas.openxmlformats.org/officeDocument/2006/relationships" xmlns:p="http://schemas.openxmlformats.org/presentationml/2006/main">
-  <p:cSld>
-    <p:spTree>
-      <p:nvGrpSpPr>
-        <p:cNvPr id="1" name=""/>
-        <p:cNvGrpSpPr/>
-        <p:nvPr/>
-      </p:nvGrpSpPr>
-      <p:grpSpPr>
-        <a:xfrm>
-          <a:off x="0" y="0"/>
-          <a:ext cx="0" cy="0"/>
-          <a:chOff x="0" y="0"/>
-          <a:chExt cx="0" cy="0"/>
-        </a:xfrm>
-      </p:grpSpPr>
-      <p:sp>
-        <p:nvSpPr>
-          <p:cNvPr id="2" name="Title 1">
-            <a:extLst>
-              <a:ext uri="{FF2B5EF4-FFF2-40B4-BE49-F238E27FC236}">
-                <a16:creationId xmlns:a16="http://schemas.microsoft.com/office/drawing/2014/main" id="{74EADFBC-62E0-2E02-7342-48DF1584A702}"/>
-              </a:ext>
-            </a:extLst>
-          </p:cNvPr>
-          <p:cNvSpPr>
-            <a:spLocks noGrp="1"/>
-          </p:cNvSpPr>
-          <p:nvPr>
-            <p:ph type="title"/>
-          </p:nvPr>
-        </p:nvSpPr>
-        <p:spPr/>
-        <p:txBody>
-          <a:bodyPr>
-            <a:normAutofit/>
-          </a:bodyPr>
-          <a:lstStyle/>
-          <a:p>
-            <a:r>
-              <a:rPr lang="en-US" sz="3600" dirty="0"/>
-              <a:t>Quantum Heisenberg Model</a:t>
-            </a:r>
-          </a:p>
-        </p:txBody>
-      </p:sp>
-      <mc:AlternateContent xmlns:mc="http://schemas.openxmlformats.org/markup-compatibility/2006">
-        <mc:Choice xmlns:a14="http://schemas.microsoft.com/office/drawing/2010/main" Requires="a14">
-          <p:sp>
-            <p:nvSpPr>
-              <p:cNvPr id="3" name="Content Placeholder 2">
-                <a:extLst>
-                  <a:ext uri="{FF2B5EF4-FFF2-40B4-BE49-F238E27FC236}">
-                    <a16:creationId xmlns:a16="http://schemas.microsoft.com/office/drawing/2014/main" id="{0C93D385-A6A9-2B01-E7FE-791BF52EF473}"/>
-                  </a:ext>
-                </a:extLst>
-              </p:cNvPr>
-              <p:cNvSpPr>
-                <a:spLocks noGrp="1"/>
-              </p:cNvSpPr>
-              <p:nvPr>
-                <p:ph idx="1"/>
-              </p:nvPr>
-            </p:nvSpPr>
-            <p:spPr/>
-            <p:txBody>
-              <a:bodyPr>
-                <a:normAutofit fontScale="92500"/>
-              </a:bodyPr>
-              <a:lstStyle/>
-              <a:p>
-                <a:pPr marL="0" indent="0">
-                  <a:buNone/>
-                </a:pPr>
-                <a14:m>
-                  <m:oMathPara xmlns:m="http://schemas.openxmlformats.org/officeDocument/2006/math">
-                    <m:oMathParaPr>
-                      <m:jc m:val="centerGroup"/>
-                    </m:oMathParaPr>
-                    <m:oMath xmlns:m="http://schemas.openxmlformats.org/officeDocument/2006/math">
-                      <m:r>
-                        <a:rPr lang="en-US" b="0" i="1" smtClean="0">
-                          <a:latin typeface="Cambria Math" panose="02040503050406030204" pitchFamily="18" charset="0"/>
-                        </a:rPr>
-                        <m:t>𝐻</m:t>
-                      </m:r>
-                      <m:r>
-                        <a:rPr lang="en-US" b="0" i="1" smtClean="0">
-                          <a:latin typeface="Cambria Math" panose="02040503050406030204" pitchFamily="18" charset="0"/>
-                        </a:rPr>
-                        <m:t>=</m:t>
-                      </m:r>
-                      <m:r>
-                        <a:rPr lang="en-US" b="0" i="1" smtClean="0">
-                          <a:latin typeface="Cambria Math" panose="02040503050406030204" pitchFamily="18" charset="0"/>
-                        </a:rPr>
-                        <m:t>𝐽</m:t>
-                      </m:r>
-                      <m:nary>
-                        <m:naryPr>
-                          <m:chr m:val="∑"/>
-                          <m:supHide m:val="on"/>
-                          <m:ctrlPr>
-                            <a:rPr lang="en-US" b="0" i="1" smtClean="0">
-                              <a:latin typeface="Cambria Math" panose="02040503050406030204" pitchFamily="18" charset="0"/>
-                            </a:rPr>
-                          </m:ctrlPr>
-                        </m:naryPr>
-                        <m:sub>
-                          <m:r>
-                            <m:rPr>
-                              <m:brk m:alnAt="7"/>
-                            </m:rPr>
-                            <a:rPr lang="en-US" b="0" i="1" smtClean="0">
-                              <a:latin typeface="Cambria Math" panose="02040503050406030204" pitchFamily="18" charset="0"/>
-                            </a:rPr>
-                            <m:t>&lt;</m:t>
-                          </m:r>
-                          <m:r>
-                            <a:rPr lang="en-US" b="0" i="1" smtClean="0">
-                              <a:latin typeface="Cambria Math" panose="02040503050406030204" pitchFamily="18" charset="0"/>
-                            </a:rPr>
-                            <m:t>𝑖</m:t>
-                          </m:r>
-                          <m:r>
-                            <a:rPr lang="en-US" b="0" i="1" smtClean="0">
-                              <a:latin typeface="Cambria Math" panose="02040503050406030204" pitchFamily="18" charset="0"/>
-                            </a:rPr>
-                            <m:t>,</m:t>
-                          </m:r>
-                          <m:r>
-                            <a:rPr lang="en-US" b="0" i="1" smtClean="0">
-                              <a:latin typeface="Cambria Math" panose="02040503050406030204" pitchFamily="18" charset="0"/>
-                            </a:rPr>
-                            <m:t>𝑗</m:t>
-                          </m:r>
-                          <m:r>
-                            <a:rPr lang="en-US" b="0" i="1" smtClean="0">
-                              <a:latin typeface="Cambria Math" panose="02040503050406030204" pitchFamily="18" charset="0"/>
-                            </a:rPr>
-                            <m:t>&gt;</m:t>
-                          </m:r>
-                        </m:sub>
-                        <m:sup/>
-                        <m:e>
-                          <m:sSub>
-                            <m:sSubPr>
-                              <m:ctrlPr>
-                                <a:rPr lang="en-US" b="0" i="1" dirty="0" smtClean="0">
-                                  <a:latin typeface="Cambria Math" panose="02040503050406030204" pitchFamily="18" charset="0"/>
-                                </a:rPr>
-                              </m:ctrlPr>
-                            </m:sSubPr>
-                            <m:e>
-                              <m:acc>
-                                <m:accPr>
-                                  <m:chr m:val="⃗"/>
-                                  <m:ctrlPr>
-                                    <a:rPr lang="en-US" b="0" i="1" dirty="0" smtClean="0">
-                                      <a:latin typeface="Cambria Math" panose="02040503050406030204" pitchFamily="18" charset="0"/>
-                                    </a:rPr>
-                                  </m:ctrlPr>
-                                </m:accPr>
-                                <m:e>
-                                  <m:r>
-                                    <a:rPr lang="en-US" b="0" i="1" dirty="0" smtClean="0">
-                                      <a:latin typeface="Cambria Math" panose="02040503050406030204" pitchFamily="18" charset="0"/>
-                                    </a:rPr>
-                                    <m:t>𝑆</m:t>
-                                  </m:r>
-                                </m:e>
-                              </m:acc>
-                            </m:e>
-                            <m:sub>
-                              <m:r>
-                                <a:rPr lang="en-US" b="0" i="1" dirty="0" smtClean="0">
-                                  <a:latin typeface="Cambria Math" panose="02040503050406030204" pitchFamily="18" charset="0"/>
-                                </a:rPr>
-                                <m:t>𝑖</m:t>
-                              </m:r>
-                            </m:sub>
-                          </m:sSub>
-                        </m:e>
-                      </m:nary>
-                      <m:r>
-                        <a:rPr lang="en-US" b="0" i="1" smtClean="0">
-                          <a:latin typeface="Cambria Math" panose="02040503050406030204" pitchFamily="18" charset="0"/>
-                        </a:rPr>
-                        <m:t>⋅</m:t>
-                      </m:r>
-                      <m:sSub>
-                        <m:sSubPr>
-                          <m:ctrlPr>
-                            <a:rPr lang="en-US" b="0" i="1" dirty="0" smtClean="0">
-                              <a:latin typeface="Cambria Math" panose="02040503050406030204" pitchFamily="18" charset="0"/>
-                            </a:rPr>
-                          </m:ctrlPr>
-                        </m:sSubPr>
-                        <m:e>
-                          <m:acc>
-                            <m:accPr>
-                              <m:chr m:val="⃗"/>
-                              <m:ctrlPr>
-                                <a:rPr lang="en-US" b="0" i="1" dirty="0" smtClean="0">
-                                  <a:latin typeface="Cambria Math" panose="02040503050406030204" pitchFamily="18" charset="0"/>
-                                </a:rPr>
-                              </m:ctrlPr>
-                            </m:accPr>
-                            <m:e>
-                              <m:r>
-                                <a:rPr lang="en-US" b="0" i="1" dirty="0" smtClean="0">
-                                  <a:latin typeface="Cambria Math" panose="02040503050406030204" pitchFamily="18" charset="0"/>
-                                </a:rPr>
-                                <m:t>𝑆</m:t>
-                              </m:r>
-                            </m:e>
-                          </m:acc>
-                        </m:e>
-                        <m:sub>
-                          <m:r>
-                            <a:rPr lang="en-US" b="0" i="1" dirty="0" smtClean="0">
-                              <a:latin typeface="Cambria Math" panose="02040503050406030204" pitchFamily="18" charset="0"/>
-                            </a:rPr>
-                            <m:t>𝑗</m:t>
-                          </m:r>
-                        </m:sub>
-                      </m:sSub>
-                    </m:oMath>
-                  </m:oMathPara>
-                </a14:m>
-                <a:endParaRPr lang="en-US" dirty="0"/>
-              </a:p>
-              <a:p>
-                <a:r>
-                  <a:rPr lang="en-US" dirty="0"/>
-                  <a:t>Paradigmatic model of quantum magnetism, studied extensively since 1928</a:t>
-                </a:r>
-              </a:p>
-              <a:p>
-                <a:r>
-                  <a:rPr lang="en-US" dirty="0"/>
-                  <a:t>1D physics is extremely rich</a:t>
-                </a:r>
-              </a:p>
-              <a:p>
-                <a:pPr lvl="1"/>
-                <a:r>
-                  <a:rPr lang="en-US" dirty="0"/>
-                  <a:t>Half-integer spin chains are gapless; low-temperature physics = Luttinger Liquid</a:t>
-                </a:r>
-              </a:p>
-              <a:p>
-                <a:pPr lvl="1"/>
-                <a:r>
-                  <a:rPr lang="en-US" dirty="0"/>
-                  <a:t>Integer spin chains are gapped (S=1 Haldane chain canonical example of symmetry protected topological phase)</a:t>
-                </a:r>
-              </a:p>
-              <a:p>
-                <a:r>
-                  <a:rPr lang="en-US" dirty="0"/>
-                  <a:t>S=1/2 chain is exactly solvable via the Bethe ansatz</a:t>
-                </a:r>
-              </a:p>
-              <a:p>
-                <a:pPr lvl="1"/>
-                <a:r>
-                  <a:rPr lang="en-US" dirty="0"/>
-                  <a:t>Integrability </a:t>
-                </a:r>
-                <a14:m>
-                  <m:oMath xmlns:m="http://schemas.openxmlformats.org/officeDocument/2006/math">
-                    <m:r>
-                      <a:rPr lang="en-US" i="1" dirty="0">
-                        <a:latin typeface="Cambria Math" panose="02040503050406030204" pitchFamily="18" charset="0"/>
-                        <a:ea typeface="Cambria Math" panose="02040503050406030204" pitchFamily="18" charset="0"/>
-                      </a:rPr>
-                      <m:t>⇒</m:t>
-                    </m:r>
-                  </m:oMath>
-                </a14:m>
-                <a:r>
-                  <a:rPr lang="en-US" dirty="0"/>
-                  <a:t> infinite number of conserved charges</a:t>
-                </a:r>
-              </a:p>
-            </p:txBody>
-          </p:sp>
-        </mc:Choice>
-        <mc:Fallback>
-          <p:sp>
-            <p:nvSpPr>
-              <p:cNvPr id="3" name="Content Placeholder 2">
-                <a:extLst>
-                  <a:ext uri="{FF2B5EF4-FFF2-40B4-BE49-F238E27FC236}">
-                    <a16:creationId xmlns:a16="http://schemas.microsoft.com/office/drawing/2014/main" id="{0C93D385-A6A9-2B01-E7FE-791BF52EF473}"/>
-                  </a:ext>
-                </a:extLst>
-              </p:cNvPr>
-              <p:cNvSpPr>
-                <a:spLocks noGrp="1" noRot="1" noChangeAspect="1" noMove="1" noResize="1" noEditPoints="1" noAdjustHandles="1" noChangeArrowheads="1" noChangeShapeType="1" noTextEdit="1"/>
-              </p:cNvSpPr>
-              <p:nvPr>
-                <p:ph idx="1"/>
-              </p:nvPr>
-            </p:nvSpPr>
-            <p:spPr>
-              <a:blipFill>
-                <a:blip r:embed="rId2"/>
-                <a:stretch>
-                  <a:fillRect l="-928" r="-812"/>
-                </a:stretch>
-              </a:blipFill>
-            </p:spPr>
-            <p:txBody>
-              <a:bodyPr/>
-              <a:lstStyle/>
-              <a:p>
-                <a:r>
-                  <a:rPr lang="en-US">
-                    <a:noFill/>
-                  </a:rPr>
-                  <a:t> </a:t>
-                </a:r>
-              </a:p>
-            </p:txBody>
-          </p:sp>
-        </mc:Fallback>
-      </mc:AlternateContent>
-    </p:spTree>
-    <p:extLst>
-      <p:ext uri="{BB962C8B-B14F-4D97-AF65-F5344CB8AC3E}">
-        <p14:creationId xmlns:p14="http://schemas.microsoft.com/office/powerpoint/2010/main" val="1315459422"/>
-      </p:ext>
-    </p:extLst>
-  </p:cSld>
-  <p:clrMapOvr>
-    <a:masterClrMapping/>
-  </p:clrMapOvr>
-</p:sld>
-</file>
-
-<file path=ppt/slides/slide20.xml><?xml version="1.0" encoding="utf-8"?>
+<file path=ppt/slides/slide21.xml><?xml version="1.0" encoding="utf-8"?>
 <p:sld xmlns:a="http://schemas.openxmlformats.org/drawingml/2006/main" xmlns:r="http://schemas.openxmlformats.org/officeDocument/2006/relationships" xmlns:p="http://schemas.openxmlformats.org/presentationml/2006/main">
   <p:cSld>
     <p:spTree>
@@ -9475,7 +10304,7 @@
 </p:sld>
 </file>
 
-<file path=ppt/slides/slide21.xml><?xml version="1.0" encoding="utf-8"?>
+<file path=ppt/slides/slide22.xml><?xml version="1.0" encoding="utf-8"?>
 <p:sld xmlns:a="http://schemas.openxmlformats.org/drawingml/2006/main" xmlns:r="http://schemas.openxmlformats.org/officeDocument/2006/relationships" xmlns:p="http://schemas.openxmlformats.org/presentationml/2006/main">
   <p:cSld>
     <p:spTree>
@@ -9510,11 +10339,13 @@
         </p:nvSpPr>
         <p:spPr/>
         <p:txBody>
-          <a:bodyPr/>
+          <a:bodyPr>
+            <a:normAutofit/>
+          </a:bodyPr>
           <a:lstStyle/>
           <a:p>
             <a:r>
-              <a:rPr lang="en-US" dirty="0"/>
+              <a:rPr lang="en-US" sz="3600" dirty="0"/>
               <a:t>Other Perturbations</a:t>
             </a:r>
           </a:p>
@@ -10127,7 +10958,7 @@
 </p:sld>
 </file>
 
-<file path=ppt/slides/slide22.xml><?xml version="1.0" encoding="utf-8"?>
+<file path=ppt/slides/slide23.xml><?xml version="1.0" encoding="utf-8"?>
 <p:sld xmlns:a="http://schemas.openxmlformats.org/drawingml/2006/main" xmlns:r="http://schemas.openxmlformats.org/officeDocument/2006/relationships" xmlns:p="http://schemas.openxmlformats.org/presentationml/2006/main">
   <p:cSld>
     <p:spTree>
@@ -10185,7 +11016,7 @@
 </p:sld>
 </file>
 
-<file path=ppt/slides/slide23.xml><?xml version="1.0" encoding="utf-8"?>
+<file path=ppt/slides/slide24.xml><?xml version="1.0" encoding="utf-8"?>
 <p:sld xmlns:a="http://schemas.openxmlformats.org/drawingml/2006/main" xmlns:r="http://schemas.openxmlformats.org/officeDocument/2006/relationships" xmlns:p="http://schemas.openxmlformats.org/presentationml/2006/main">
   <p:cSld>
     <p:spTree>
@@ -10243,7 +11074,7 @@
 </p:sld>
 </file>
 
-<file path=ppt/slides/slide24.xml><?xml version="1.0" encoding="utf-8"?>
+<file path=ppt/slides/slide25.xml><?xml version="1.0" encoding="utf-8"?>
 <p:sld xmlns:a="http://schemas.openxmlformats.org/drawingml/2006/main" xmlns:r="http://schemas.openxmlformats.org/officeDocument/2006/relationships" xmlns:p="http://schemas.openxmlformats.org/presentationml/2006/main">
   <p:cSld>
     <p:spTree>
@@ -10278,11 +11109,13 @@
         </p:nvSpPr>
         <p:spPr/>
         <p:txBody>
-          <a:bodyPr/>
+          <a:bodyPr>
+            <a:normAutofit/>
+          </a:bodyPr>
           <a:lstStyle/>
           <a:p>
             <a:r>
-              <a:rPr lang="en-US" dirty="0"/>
+              <a:rPr lang="en-US" sz="3600" dirty="0"/>
               <a:t>Other Perturbations</a:t>
             </a:r>
           </a:p>
@@ -10560,7 +11393,7 @@
 </p:sld>
 </file>
 
-<file path=ppt/slides/slide25.xml><?xml version="1.0" encoding="utf-8"?>
+<file path=ppt/slides/slide26.xml><?xml version="1.0" encoding="utf-8"?>
 <p:sld xmlns:a="http://schemas.openxmlformats.org/drawingml/2006/main" xmlns:r="http://schemas.openxmlformats.org/officeDocument/2006/relationships" xmlns:p="http://schemas.openxmlformats.org/presentationml/2006/main">
   <p:cSld>
     <p:spTree>
@@ -11018,8 +11851,8 @@
           <a:chExt cx="0" cy="0"/>
         </a:xfrm>
       </p:grpSpPr>
-      <mc:AlternateContent xmlns:mc="http://schemas.openxmlformats.org/markup-compatibility/2006" xmlns:a14="http://schemas.microsoft.com/office/drawing/2010/main">
-        <mc:Choice Requires="a14">
+      <mc:AlternateContent xmlns:mc="http://schemas.openxmlformats.org/markup-compatibility/2006">
+        <mc:Choice xmlns:a14="http://schemas.microsoft.com/office/drawing/2010/main" Requires="a14">
           <p:sp>
             <p:nvSpPr>
               <p:cNvPr id="3" name="Content Placeholder 2">
@@ -11043,35 +11876,37 @@
               </a:xfrm>
             </p:spPr>
             <p:txBody>
-              <a:bodyPr/>
+              <a:bodyPr>
+                <a:normAutofit/>
+              </a:bodyPr>
               <a:lstStyle/>
               <a:p>
                 <a:r>
-                  <a:rPr lang="en-US" dirty="0"/>
+                  <a:rPr lang="en-US" sz="2400" dirty="0"/>
                   <a:t>Despite nearly a century of study, new physics has emerged</a:t>
                 </a:r>
               </a:p>
               <a:p>
                 <a:r>
-                  <a:rPr lang="en-US" dirty="0"/>
+                  <a:rPr lang="en-US" sz="2400" dirty="0"/>
                   <a:t>Surprisingly, high-temperature spin transport discovered to be anomalous</a:t>
                 </a:r>
               </a:p>
               <a:p>
                 <a:r>
-                  <a:rPr lang="en-US" dirty="0"/>
+                  <a:rPr lang="en-US" sz="2400" dirty="0"/>
                   <a:t>Dynamical critical exponent: </a:t>
                 </a:r>
                 <a14:m>
                   <m:oMath xmlns:m="http://schemas.openxmlformats.org/officeDocument/2006/math">
                     <m:r>
-                      <a:rPr lang="en-US" i="1">
+                      <a:rPr lang="en-US" sz="2400" i="1">
                         <a:latin typeface="Cambria Math" panose="02040503050406030204" pitchFamily="18" charset="0"/>
                       </a:rPr>
                       <m:t>𝑡</m:t>
                     </m:r>
                     <m:r>
-                      <a:rPr lang="en-US" i="1">
+                      <a:rPr lang="en-US" sz="2400" i="1">
                         <a:latin typeface="Cambria Math" panose="02040503050406030204" pitchFamily="18" charset="0"/>
                       </a:rPr>
                       <m:t>∼</m:t>
@@ -11079,14 +11914,14 @@
                     <m:sSup>
                       <m:sSupPr>
                         <m:ctrlPr>
-                          <a:rPr lang="en-US" i="1">
+                          <a:rPr lang="en-US" sz="2400" i="1">
                             <a:latin typeface="Cambria Math" panose="02040503050406030204" pitchFamily="18" charset="0"/>
                           </a:rPr>
                         </m:ctrlPr>
                       </m:sSupPr>
                       <m:e>
                         <m:r>
-                          <a:rPr lang="en-US" i="1">
+                          <a:rPr lang="en-US" sz="2400" i="1">
                             <a:latin typeface="Cambria Math" panose="02040503050406030204" pitchFamily="18" charset="0"/>
                           </a:rPr>
                           <m:t>𝑥</m:t>
@@ -11094,7 +11929,7 @@
                       </m:e>
                       <m:sup>
                         <m:r>
-                          <a:rPr lang="en-US" i="1">
+                          <a:rPr lang="en-US" sz="2400" i="1">
                             <a:latin typeface="Cambria Math" panose="02040503050406030204" pitchFamily="18" charset="0"/>
                           </a:rPr>
                           <m:t>𝑧</m:t>
@@ -11103,7 +11938,7 @@
                     </m:sSup>
                   </m:oMath>
                 </a14:m>
-                <a:endParaRPr lang="en-US" i="1" dirty="0">
+                <a:endParaRPr lang="en-US" sz="2400" i="1" dirty="0">
                   <a:latin typeface="Cambria Math" panose="02040503050406030204" pitchFamily="18" charset="0"/>
                 </a:endParaRPr>
               </a:p>
@@ -11112,13 +11947,13 @@
                 <a14:m>
                   <m:oMath xmlns:m="http://schemas.openxmlformats.org/officeDocument/2006/math">
                     <m:r>
-                      <a:rPr lang="en-US" i="1" dirty="0">
+                      <a:rPr lang="en-US" sz="2000" i="1" dirty="0">
                         <a:latin typeface="Cambria Math" panose="02040503050406030204" pitchFamily="18" charset="0"/>
                       </a:rPr>
                       <m:t>𝑧</m:t>
                     </m:r>
                     <m:r>
-                      <a:rPr lang="en-US" i="1" dirty="0">
+                      <a:rPr lang="en-US" sz="2000" i="1" dirty="0">
                         <a:latin typeface="Cambria Math" panose="02040503050406030204" pitchFamily="18" charset="0"/>
                       </a:rPr>
                       <m:t>=1</m:t>
@@ -11126,7 +11961,7 @@
                   </m:oMath>
                 </a14:m>
                 <a:r>
-                  <a:rPr lang="en-US" dirty="0"/>
+                  <a:rPr lang="en-US" sz="2000" dirty="0"/>
                   <a:t> (ballistic)</a:t>
                 </a:r>
               </a:p>
@@ -11135,13 +11970,13 @@
                 <a14:m>
                   <m:oMath xmlns:m="http://schemas.openxmlformats.org/officeDocument/2006/math">
                     <m:r>
-                      <a:rPr lang="en-US" i="1" dirty="0">
+                      <a:rPr lang="en-US" sz="2000" i="1" dirty="0">
                         <a:latin typeface="Cambria Math" panose="02040503050406030204" pitchFamily="18" charset="0"/>
                       </a:rPr>
                       <m:t>𝑧</m:t>
                     </m:r>
                     <m:r>
-                      <a:rPr lang="en-US" i="1" dirty="0">
+                      <a:rPr lang="en-US" sz="2000" i="1" dirty="0">
                         <a:latin typeface="Cambria Math" panose="02040503050406030204" pitchFamily="18" charset="0"/>
                       </a:rPr>
                       <m:t>=2</m:t>
@@ -11149,10 +11984,10 @@
                   </m:oMath>
                 </a14:m>
                 <a:r>
-                  <a:rPr lang="en-US" dirty="0"/>
+                  <a:rPr lang="en-US" sz="2000" dirty="0"/>
                   <a:t> (diffusion)</a:t>
                 </a:r>
-                <a:endParaRPr lang="en-US" i="1" dirty="0">
+                <a:endParaRPr lang="en-US" sz="2000" i="1" dirty="0">
                   <a:latin typeface="Cambria Math" panose="02040503050406030204" pitchFamily="18" charset="0"/>
                 </a:endParaRPr>
               </a:p>
@@ -11161,7 +11996,7 @@
                 <a14:m>
                   <m:oMath xmlns:m="http://schemas.openxmlformats.org/officeDocument/2006/math">
                     <m:r>
-                      <a:rPr lang="en-US" i="1" dirty="0" smtClean="0">
+                      <a:rPr lang="en-US" sz="2000" i="1" dirty="0" smtClean="0">
                         <a:solidFill>
                           <a:schemeClr val="accent1"/>
                         </a:solidFill>
@@ -11170,7 +12005,7 @@
                       <m:t>𝑧</m:t>
                     </m:r>
                     <m:r>
-                      <a:rPr lang="en-US" i="1" dirty="0" smtClean="0">
+                      <a:rPr lang="en-US" sz="2000" i="1" dirty="0" smtClean="0">
                         <a:solidFill>
                           <a:schemeClr val="accent1"/>
                         </a:solidFill>
@@ -11181,7 +12016,7 @@
                   </m:oMath>
                 </a14:m>
                 <a:r>
-                  <a:rPr lang="en-US" dirty="0">
+                  <a:rPr lang="en-US" sz="2000" dirty="0">
                     <a:solidFill>
                       <a:schemeClr val="accent1"/>
                     </a:solidFill>
@@ -11192,7 +12027,7 @@
             </p:txBody>
           </p:sp>
         </mc:Choice>
-        <mc:Fallback xmlns="">
+        <mc:Fallback>
           <p:sp>
             <p:nvSpPr>
               <p:cNvPr id="3" name="Content Placeholder 2">
@@ -11217,7 +12052,7 @@
               <a:blipFill>
                 <a:blip r:embed="rId2"/>
                 <a:stretch>
-                  <a:fillRect l="-1860" t="-2326"/>
+                  <a:fillRect l="-1390" t="-1961" r="-1887"/>
                 </a:stretch>
               </a:blipFill>
             </p:spPr>
@@ -11271,36 +12106,214 @@
           </a:p>
         </p:txBody>
       </p:sp>
-      <p:pic>
-        <p:nvPicPr>
-          <p:cNvPr id="22" name="Picture 21">
+      <p:grpSp>
+        <p:nvGrpSpPr>
+          <p:cNvPr id="4" name="Group 3">
             <a:extLst>
               <a:ext uri="{FF2B5EF4-FFF2-40B4-BE49-F238E27FC236}">
-                <a16:creationId xmlns:a16="http://schemas.microsoft.com/office/drawing/2014/main" id="{67C207BC-0287-2024-35F8-F3DA12818A12}"/>
+                <a16:creationId xmlns:a16="http://schemas.microsoft.com/office/drawing/2014/main" id="{1B738DD6-6D0A-A9D8-5DB1-D02489CEC390}"/>
               </a:ext>
             </a:extLst>
           </p:cNvPr>
-          <p:cNvPicPr>
-            <a:picLocks noChangeAspect="1"/>
-          </p:cNvPicPr>
+          <p:cNvGrpSpPr/>
           <p:nvPr/>
-        </p:nvPicPr>
-        <p:blipFill>
-          <a:blip r:embed="rId3"/>
-          <a:stretch>
-            <a:fillRect/>
-          </a:stretch>
-        </p:blipFill>
-        <p:spPr>
+        </p:nvGrpSpPr>
+        <p:grpSpPr>
           <a:xfrm>
             <a:off x="7265475" y="1492189"/>
             <a:ext cx="4088325" cy="3873621"/>
+            <a:chOff x="7265475" y="1492189"/>
+            <a:chExt cx="4088325" cy="3873621"/>
           </a:xfrm>
-          <a:prstGeom prst="rect">
-            <a:avLst/>
-          </a:prstGeom>
-        </p:spPr>
-      </p:pic>
+        </p:grpSpPr>
+        <p:pic>
+          <p:nvPicPr>
+            <p:cNvPr id="22" name="Picture 21">
+              <a:extLst>
+                <a:ext uri="{FF2B5EF4-FFF2-40B4-BE49-F238E27FC236}">
+                  <a16:creationId xmlns:a16="http://schemas.microsoft.com/office/drawing/2014/main" id="{67C207BC-0287-2024-35F8-F3DA12818A12}"/>
+                </a:ext>
+              </a:extLst>
+            </p:cNvPr>
+            <p:cNvPicPr>
+              <a:picLocks noChangeAspect="1"/>
+            </p:cNvPicPr>
+            <p:nvPr/>
+          </p:nvPicPr>
+          <p:blipFill>
+            <a:blip r:embed="rId3"/>
+            <a:stretch>
+              <a:fillRect/>
+            </a:stretch>
+          </p:blipFill>
+          <p:spPr>
+            <a:xfrm>
+              <a:off x="7265475" y="1492189"/>
+              <a:ext cx="4088325" cy="3873621"/>
+            </a:xfrm>
+            <a:prstGeom prst="rect">
+              <a:avLst/>
+            </a:prstGeom>
+          </p:spPr>
+        </p:pic>
+        <mc:AlternateContent xmlns:mc="http://schemas.openxmlformats.org/markup-compatibility/2006">
+          <mc:Choice xmlns:a14="http://schemas.microsoft.com/office/drawing/2010/main" Requires="a14">
+            <p:sp>
+              <p:nvSpPr>
+                <p:cNvPr id="2" name="TextBox 1">
+                  <a:extLst>
+                    <a:ext uri="{FF2B5EF4-FFF2-40B4-BE49-F238E27FC236}">
+                      <a16:creationId xmlns:a16="http://schemas.microsoft.com/office/drawing/2014/main" id="{4B44C303-E774-74E4-A117-2CDA569DB276}"/>
+                    </a:ext>
+                  </a:extLst>
+                </p:cNvPr>
+                <p:cNvSpPr txBox="1"/>
+                <p:nvPr/>
+              </p:nvSpPr>
+              <p:spPr>
+                <a:xfrm>
+                  <a:off x="9821074" y="3049343"/>
+                  <a:ext cx="900440" cy="379656"/>
+                </a:xfrm>
+                <a:prstGeom prst="rect">
+                  <a:avLst/>
+                </a:prstGeom>
+                <a:noFill/>
+              </p:spPr>
+              <p:txBody>
+                <a:bodyPr wrap="square" rtlCol="0">
+                  <a:spAutoFit/>
+                </a:bodyPr>
+                <a:lstStyle/>
+                <a:p>
+                  <a14:m>
+                    <m:oMathPara xmlns:m="http://schemas.openxmlformats.org/officeDocument/2006/math">
+                      <m:oMathParaPr>
+                        <m:jc m:val="centerGroup"/>
+                      </m:oMathParaPr>
+                      <m:oMath xmlns:m="http://schemas.openxmlformats.org/officeDocument/2006/math">
+                        <m:r>
+                          <a:rPr lang="en-US" b="0" i="1" smtClean="0">
+                            <a:solidFill>
+                              <a:schemeClr val="accent6">
+                                <a:lumMod val="75000"/>
+                              </a:schemeClr>
+                            </a:solidFill>
+                            <a:latin typeface="Cambria Math" panose="02040503050406030204" pitchFamily="18" charset="0"/>
+                          </a:rPr>
+                          <m:t>𝑥</m:t>
+                        </m:r>
+                        <m:r>
+                          <a:rPr lang="en-US" b="0" i="1" smtClean="0">
+                            <a:solidFill>
+                              <a:schemeClr val="accent6">
+                                <a:lumMod val="75000"/>
+                              </a:schemeClr>
+                            </a:solidFill>
+                            <a:latin typeface="Cambria Math" panose="02040503050406030204" pitchFamily="18" charset="0"/>
+                          </a:rPr>
+                          <m:t> ~ </m:t>
+                        </m:r>
+                        <m:sSup>
+                          <m:sSupPr>
+                            <m:ctrlPr>
+                              <a:rPr lang="en-US" b="0" i="1" smtClean="0">
+                                <a:solidFill>
+                                  <a:schemeClr val="accent6">
+                                    <a:lumMod val="75000"/>
+                                  </a:schemeClr>
+                                </a:solidFill>
+                                <a:latin typeface="Cambria Math" panose="02040503050406030204" pitchFamily="18" charset="0"/>
+                              </a:rPr>
+                            </m:ctrlPr>
+                          </m:sSupPr>
+                          <m:e>
+                            <m:r>
+                              <a:rPr lang="en-US" b="0" i="1" smtClean="0">
+                                <a:solidFill>
+                                  <a:schemeClr val="accent6">
+                                    <a:lumMod val="75000"/>
+                                  </a:schemeClr>
+                                </a:solidFill>
+                                <a:latin typeface="Cambria Math" panose="02040503050406030204" pitchFamily="18" charset="0"/>
+                              </a:rPr>
+                              <m:t>𝑡</m:t>
+                            </m:r>
+                          </m:e>
+                          <m:sup>
+                            <m:r>
+                              <a:rPr lang="en-US" b="0" i="1" smtClean="0">
+                                <a:solidFill>
+                                  <a:schemeClr val="accent6">
+                                    <a:lumMod val="75000"/>
+                                  </a:schemeClr>
+                                </a:solidFill>
+                                <a:latin typeface="Cambria Math" panose="02040503050406030204" pitchFamily="18" charset="0"/>
+                              </a:rPr>
+                              <m:t>2/3</m:t>
+                            </m:r>
+                          </m:sup>
+                        </m:sSup>
+                      </m:oMath>
+                    </m:oMathPara>
+                  </a14:m>
+                  <a:endParaRPr lang="en-US" dirty="0">
+                    <a:solidFill>
+                      <a:schemeClr val="accent6">
+                        <a:lumMod val="75000"/>
+                      </a:schemeClr>
+                    </a:solidFill>
+                  </a:endParaRPr>
+                </a:p>
+              </p:txBody>
+            </p:sp>
+          </mc:Choice>
+          <mc:Fallback>
+            <p:sp>
+              <p:nvSpPr>
+                <p:cNvPr id="2" name="TextBox 1">
+                  <a:extLst>
+                    <a:ext uri="{FF2B5EF4-FFF2-40B4-BE49-F238E27FC236}">
+                      <a16:creationId xmlns:a16="http://schemas.microsoft.com/office/drawing/2014/main" id="{4B44C303-E774-74E4-A117-2CDA569DB276}"/>
+                    </a:ext>
+                  </a:extLst>
+                </p:cNvPr>
+                <p:cNvSpPr txBox="1">
+                  <a:spLocks noRot="1" noChangeAspect="1" noMove="1" noResize="1" noEditPoints="1" noAdjustHandles="1" noChangeArrowheads="1" noChangeShapeType="1" noTextEdit="1"/>
+                </p:cNvSpPr>
+                <p:nvPr/>
+              </p:nvSpPr>
+              <p:spPr>
+                <a:xfrm>
+                  <a:off x="9821074" y="3049343"/>
+                  <a:ext cx="900440" cy="379656"/>
+                </a:xfrm>
+                <a:prstGeom prst="rect">
+                  <a:avLst/>
+                </a:prstGeom>
+                <a:blipFill>
+                  <a:blip r:embed="rId4"/>
+                  <a:stretch>
+                    <a:fillRect r="-3378"/>
+                  </a:stretch>
+                </a:blipFill>
+              </p:spPr>
+              <p:txBody>
+                <a:bodyPr/>
+                <a:lstStyle/>
+                <a:p>
+                  <a:r>
+                    <a:rPr lang="en-US">
+                      <a:noFill/>
+                    </a:rPr>
+                    <a:t> </a:t>
+                  </a:r>
+                </a:p>
+              </p:txBody>
+            </p:sp>
+          </mc:Fallback>
+        </mc:AlternateContent>
+      </p:grpSp>
     </p:spTree>
     <p:extLst>
       <p:ext uri="{BB962C8B-B14F-4D97-AF65-F5344CB8AC3E}">
@@ -11737,8 +12750,8 @@
           </a:p>
         </p:txBody>
       </p:sp>
-      <mc:AlternateContent xmlns:mc="http://schemas.openxmlformats.org/markup-compatibility/2006">
-        <mc:Choice xmlns:a14="http://schemas.microsoft.com/office/drawing/2010/main" Requires="a14">
+      <mc:AlternateContent xmlns:mc="http://schemas.openxmlformats.org/markup-compatibility/2006" xmlns:a14="http://schemas.microsoft.com/office/drawing/2010/main">
+        <mc:Choice Requires="a14">
           <p:sp>
             <p:nvSpPr>
               <p:cNvPr id="3" name="Content Placeholder 2">
@@ -11967,7 +12980,7 @@
             </p:txBody>
           </p:sp>
         </mc:Choice>
-        <mc:Fallback>
+        <mc:Fallback xmlns="">
           <p:sp>
             <p:nvSpPr>
               <p:cNvPr id="3" name="Content Placeholder 2">
@@ -12071,8 +13084,8 @@
           </a:p>
         </p:txBody>
       </p:sp>
-      <mc:AlternateContent xmlns:mc="http://schemas.openxmlformats.org/markup-compatibility/2006">
-        <mc:Choice xmlns:a14="http://schemas.microsoft.com/office/drawing/2010/main" Requires="a14">
+      <mc:AlternateContent xmlns:mc="http://schemas.openxmlformats.org/markup-compatibility/2006" xmlns:a14="http://schemas.microsoft.com/office/drawing/2010/main">
+        <mc:Choice Requires="a14">
           <p:sp>
             <p:nvSpPr>
               <p:cNvPr id="3" name="Content Placeholder 2">
@@ -12323,7 +13336,7 @@
                     <m:sSup>
                       <m:sSupPr>
                         <m:ctrlPr>
-                          <a:rPr lang="en-US" sz="2000" b="0" smtClean="0">
+                          <a:rPr lang="en-US" sz="2000" b="0" i="1" smtClean="0">
                             <a:latin typeface="Cambria Math" panose="02040503050406030204" pitchFamily="18" charset="0"/>
                           </a:rPr>
                         </m:ctrlPr>
@@ -12837,14 +13850,7 @@
                         <a:latin typeface="Cambria Math" panose="02040503050406030204" pitchFamily="18" charset="0"/>
                         <a:ea typeface="Cambria Math" panose="02040503050406030204" pitchFamily="18" charset="0"/>
                       </a:rPr>
-                      <m:t>~</m:t>
-                    </m:r>
-                    <m:r>
-                      <a:rPr lang="en-US" sz="2000" b="0" i="1" smtClean="0">
-                        <a:latin typeface="Cambria Math" panose="02040503050406030204" pitchFamily="18" charset="0"/>
-                        <a:ea typeface="Cambria Math" panose="02040503050406030204" pitchFamily="18" charset="0"/>
-                      </a:rPr>
-                      <m:t> </m:t>
+                      <m:t>~ </m:t>
                     </m:r>
                     <m:sSup>
                       <m:sSupPr>
@@ -12881,7 +13887,7 @@
             </p:txBody>
           </p:sp>
         </mc:Choice>
-        <mc:Fallback>
+        <mc:Fallback xmlns="">
           <p:sp>
             <p:nvSpPr>
               <p:cNvPr id="3" name="Content Placeholder 2">
@@ -12987,8 +13993,8 @@
           </a:p>
         </p:txBody>
       </p:sp>
-      <mc:AlternateContent xmlns:mc="http://schemas.openxmlformats.org/markup-compatibility/2006">
-        <mc:Choice xmlns:a14="http://schemas.microsoft.com/office/drawing/2010/main" Requires="a14">
+      <mc:AlternateContent xmlns:mc="http://schemas.openxmlformats.org/markup-compatibility/2006" xmlns:a14="http://schemas.microsoft.com/office/drawing/2010/main">
+        <mc:Choice Requires="a14">
           <p:sp>
             <p:nvSpPr>
               <p:cNvPr id="3" name="Content Placeholder 2">
@@ -13797,7 +14803,7 @@
             </p:txBody>
           </p:sp>
         </mc:Choice>
-        <mc:Fallback>
+        <mc:Fallback xmlns="">
           <p:sp>
             <p:nvSpPr>
               <p:cNvPr id="3" name="Content Placeholder 2">
@@ -13859,7 +14865,13 @@
   <p:cSld>
     <p:spTree>
       <p:nvGrpSpPr>
-        <p:cNvPr id="1" name=""/>
+        <p:cNvPr id="1" name="">
+          <a:extLst>
+            <a:ext uri="{FF2B5EF4-FFF2-40B4-BE49-F238E27FC236}">
+              <a16:creationId xmlns:a16="http://schemas.microsoft.com/office/drawing/2014/main" id="{2597AEEF-51AC-40AC-6DF8-84A05C2C999F}"/>
+            </a:ext>
+          </a:extLst>
+        </p:cNvPr>
         <p:cNvGrpSpPr/>
         <p:nvPr/>
       </p:nvGrpSpPr>
@@ -13876,7 +14888,7 @@
           <p:cNvPr id="2" name="Title 1">
             <a:extLst>
               <a:ext uri="{FF2B5EF4-FFF2-40B4-BE49-F238E27FC236}">
-                <a16:creationId xmlns:a16="http://schemas.microsoft.com/office/drawing/2014/main" id="{CDD4BDE5-33DE-684C-9E1C-19F5C2A3CD0B}"/>
+                <a16:creationId xmlns:a16="http://schemas.microsoft.com/office/drawing/2014/main" id="{63255026-F95B-EE83-2691-1D5394B45C5A}"/>
               </a:ext>
             </a:extLst>
           </p:cNvPr>
@@ -13896,40 +14908,196 @@
           <a:p>
             <a:r>
               <a:rPr lang="en-US" sz="3600" dirty="0"/>
-              <a:t>Breaking integrability</a:t>
+              <a:t>“</a:t>
+            </a:r>
+            <a:r>
+              <a:rPr lang="en-US" sz="3600" dirty="0" err="1"/>
+              <a:t>Superuniversality</a:t>
+            </a:r>
+            <a:r>
+              <a:rPr lang="en-US" sz="3600" dirty="0"/>
+              <a:t>” of superdiffusion</a:t>
             </a:r>
           </a:p>
         </p:txBody>
       </p:sp>
-      <p:sp>
-        <p:nvSpPr>
-          <p:cNvPr id="3" name="Content Placeholder 2">
-            <a:extLst>
-              <a:ext uri="{FF2B5EF4-FFF2-40B4-BE49-F238E27FC236}">
-                <a16:creationId xmlns:a16="http://schemas.microsoft.com/office/drawing/2014/main" id="{442794E6-2C64-4A60-29EE-766705E7A799}"/>
-              </a:ext>
-            </a:extLst>
-          </p:cNvPr>
-          <p:cNvSpPr>
-            <a:spLocks noGrp="1"/>
-          </p:cNvSpPr>
-          <p:nvPr>
-            <p:ph idx="1"/>
-          </p:nvPr>
-        </p:nvSpPr>
-        <p:spPr/>
-        <p:txBody>
-          <a:bodyPr/>
-          <a:lstStyle/>
-          <a:p>
-            <a:endParaRPr lang="en-US" dirty="0"/>
-          </a:p>
-        </p:txBody>
-      </p:sp>
+      <mc:AlternateContent xmlns:mc="http://schemas.openxmlformats.org/markup-compatibility/2006">
+        <mc:Choice xmlns:a14="http://schemas.microsoft.com/office/drawing/2010/main" Requires="a14">
+          <p:sp>
+            <p:nvSpPr>
+              <p:cNvPr id="3" name="Content Placeholder 2">
+                <a:extLst>
+                  <a:ext uri="{FF2B5EF4-FFF2-40B4-BE49-F238E27FC236}">
+                    <a16:creationId xmlns:a16="http://schemas.microsoft.com/office/drawing/2014/main" id="{EDC782CD-BCC4-FAB3-09C7-D224A9975448}"/>
+                  </a:ext>
+                </a:extLst>
+              </p:cNvPr>
+              <p:cNvSpPr>
+                <a:spLocks noGrp="1"/>
+              </p:cNvSpPr>
+              <p:nvPr>
+                <p:ph idx="1"/>
+              </p:nvPr>
+            </p:nvSpPr>
+            <p:spPr>
+              <a:xfrm>
+                <a:off x="838200" y="1825624"/>
+                <a:ext cx="10515600" cy="4770619"/>
+              </a:xfrm>
+            </p:spPr>
+            <p:txBody>
+              <a:bodyPr>
+                <a:normAutofit/>
+              </a:bodyPr>
+              <a:lstStyle/>
+              <a:p>
+                <a:pPr marL="0" indent="0">
+                  <a:buNone/>
+                </a:pPr>
+                <a:r>
+                  <a:rPr lang="en-US" sz="2400" dirty="0"/>
+                  <a:t> It has since been discovered that:</a:t>
+                </a:r>
+              </a:p>
+              <a:p>
+                <a:pPr marL="0" indent="0">
+                  <a:buNone/>
+                </a:pPr>
+                <a:endParaRPr lang="en-US" sz="2400" b="1" dirty="0"/>
+              </a:p>
+              <a:p>
+                <a:pPr marL="0" indent="0">
+                  <a:buNone/>
+                </a:pPr>
+                <a:r>
+                  <a:rPr lang="en-US" sz="2400" b="1" dirty="0"/>
+                  <a:t>For any local quantum integrable model with global symmetry given by a simple Lie group </a:t>
+                </a:r>
+                <a14:m>
+                  <m:oMath xmlns:m="http://schemas.openxmlformats.org/officeDocument/2006/math">
+                    <m:r>
+                      <a:rPr lang="en-US" sz="2400" b="1" i="1" dirty="0" smtClean="0">
+                        <a:latin typeface="Cambria Math" panose="02040503050406030204" pitchFamily="18" charset="0"/>
+                      </a:rPr>
+                      <m:t>𝑮</m:t>
+                    </m:r>
+                  </m:oMath>
+                </a14:m>
+                <a:r>
+                  <a:rPr lang="en-US" sz="2400" b="1" dirty="0"/>
+                  <a:t>, the finite-temperature transport of associated Noether charges in a symmetric thermal state is </a:t>
+                </a:r>
+                <a:r>
+                  <a:rPr lang="en-US" sz="2400" b="1" i="1" dirty="0" err="1"/>
+                  <a:t>superdiffusive</a:t>
+                </a:r>
+                <a:r>
+                  <a:rPr lang="en-US" sz="2400" b="1" i="1" dirty="0"/>
+                  <a:t> </a:t>
+                </a:r>
+                <a:r>
+                  <a:rPr lang="en-US" sz="2400" b="1" dirty="0"/>
+                  <a:t>(</a:t>
+                </a:r>
+                <a14:m>
+                  <m:oMath xmlns:m="http://schemas.openxmlformats.org/officeDocument/2006/math">
+                    <m:r>
+                      <a:rPr lang="en-US" sz="2400" b="1" i="1" dirty="0" smtClean="0">
+                        <a:latin typeface="Cambria Math" panose="02040503050406030204" pitchFamily="18" charset="0"/>
+                      </a:rPr>
+                      <m:t>𝒛</m:t>
+                    </m:r>
+                    <m:r>
+                      <a:rPr lang="en-US" sz="2400" b="1" i="1" dirty="0" smtClean="0">
+                        <a:latin typeface="Cambria Math" panose="02040503050406030204" pitchFamily="18" charset="0"/>
+                      </a:rPr>
+                      <m:t>=</m:t>
+                    </m:r>
+                    <m:r>
+                      <a:rPr lang="en-US" sz="2400" b="1" i="1" dirty="0" smtClean="0">
+                        <a:latin typeface="Cambria Math" panose="02040503050406030204" pitchFamily="18" charset="0"/>
+                      </a:rPr>
+                      <m:t>𝟐</m:t>
+                    </m:r>
+                  </m:oMath>
+                </a14:m>
+                <a:r>
+                  <a:rPr lang="en-US" sz="2400" b="1" dirty="0"/>
+                  <a:t>).</a:t>
+                </a:r>
+              </a:p>
+              <a:p>
+                <a:pPr marL="0" indent="0">
+                  <a:buNone/>
+                </a:pPr>
+                <a:endParaRPr lang="en-US" sz="2400" b="1" i="1" dirty="0"/>
+              </a:p>
+              <a:p>
+                <a:pPr marL="0" indent="0">
+                  <a:buNone/>
+                </a:pPr>
+                <a:endParaRPr lang="en-US" sz="2400" b="1" i="1" dirty="0"/>
+              </a:p>
+              <a:p>
+                <a:pPr marL="0" indent="0">
+                  <a:buNone/>
+                </a:pPr>
+                <a:r>
+                  <a:rPr lang="en-US" sz="2400" dirty="0"/>
+                  <a:t>Confirmed by numerics.</a:t>
+                </a:r>
+              </a:p>
+            </p:txBody>
+          </p:sp>
+        </mc:Choice>
+        <mc:Fallback>
+          <p:sp>
+            <p:nvSpPr>
+              <p:cNvPr id="3" name="Content Placeholder 2">
+                <a:extLst>
+                  <a:ext uri="{FF2B5EF4-FFF2-40B4-BE49-F238E27FC236}">
+                    <a16:creationId xmlns:a16="http://schemas.microsoft.com/office/drawing/2014/main" id="{EDC782CD-BCC4-FAB3-09C7-D224A9975448}"/>
+                  </a:ext>
+                </a:extLst>
+              </p:cNvPr>
+              <p:cNvSpPr>
+                <a:spLocks noGrp="1" noRot="1" noChangeAspect="1" noMove="1" noResize="1" noEditPoints="1" noAdjustHandles="1" noChangeArrowheads="1" noChangeShapeType="1" noTextEdit="1"/>
+              </p:cNvSpPr>
+              <p:nvPr>
+                <p:ph idx="1"/>
+              </p:nvPr>
+            </p:nvSpPr>
+            <p:spPr>
+              <a:xfrm>
+                <a:off x="838200" y="1825624"/>
+                <a:ext cx="10515600" cy="4770619"/>
+              </a:xfrm>
+              <a:blipFill>
+                <a:blip r:embed="rId2"/>
+                <a:stretch>
+                  <a:fillRect l="-928" t="-1788"/>
+                </a:stretch>
+              </a:blipFill>
+            </p:spPr>
+            <p:txBody>
+              <a:bodyPr/>
+              <a:lstStyle/>
+              <a:p>
+                <a:r>
+                  <a:rPr lang="en-US">
+                    <a:noFill/>
+                  </a:rPr>
+                  <a:t> </a:t>
+                </a:r>
+              </a:p>
+            </p:txBody>
+          </p:sp>
+        </mc:Fallback>
+      </mc:AlternateContent>
     </p:spTree>
     <p:extLst>
       <p:ext uri="{BB962C8B-B14F-4D97-AF65-F5344CB8AC3E}">
-        <p14:creationId xmlns:p14="http://schemas.microsoft.com/office/powerpoint/2010/main" val="598623828"/>
+        <p14:creationId xmlns:p14="http://schemas.microsoft.com/office/powerpoint/2010/main" val="897844344"/>
       </p:ext>
     </p:extLst>
   </p:cSld>

--- a/EPiQS Presentation.pptx
+++ b/EPiQS Presentation.pptx
@@ -216,7 +216,7 @@
           <a:p>
             <a:fld id="{025C375C-D27F-6B4F-A98C-867F54470A23}" type="datetimeFigureOut">
               <a:rPr lang="en-US" smtClean="0"/>
-              <a:t>6/1/2025</a:t>
+              <a:t>6/2/2025</a:t>
             </a:fld>
             <a:endParaRPr lang="en-US"/>
           </a:p>
@@ -1104,7 +1104,7 @@
           <a:p>
             <a:fld id="{2B26E810-B850-E246-B0DE-F696C472EDD6}" type="datetimeFigureOut">
               <a:rPr lang="en-US" smtClean="0"/>
-              <a:t>6/1/2025</a:t>
+              <a:t>6/2/2025</a:t>
             </a:fld>
             <a:endParaRPr lang="en-US"/>
           </a:p>
@@ -1302,7 +1302,7 @@
           <a:p>
             <a:fld id="{2B26E810-B850-E246-B0DE-F696C472EDD6}" type="datetimeFigureOut">
               <a:rPr lang="en-US" smtClean="0"/>
-              <a:t>6/1/2025</a:t>
+              <a:t>6/2/2025</a:t>
             </a:fld>
             <a:endParaRPr lang="en-US"/>
           </a:p>
@@ -1510,7 +1510,7 @@
           <a:p>
             <a:fld id="{2B26E810-B850-E246-B0DE-F696C472EDD6}" type="datetimeFigureOut">
               <a:rPr lang="en-US" smtClean="0"/>
-              <a:t>6/1/2025</a:t>
+              <a:t>6/2/2025</a:t>
             </a:fld>
             <a:endParaRPr lang="en-US"/>
           </a:p>
@@ -1708,7 +1708,7 @@
           <a:p>
             <a:fld id="{2B26E810-B850-E246-B0DE-F696C472EDD6}" type="datetimeFigureOut">
               <a:rPr lang="en-US" smtClean="0"/>
-              <a:t>6/1/2025</a:t>
+              <a:t>6/2/2025</a:t>
             </a:fld>
             <a:endParaRPr lang="en-US"/>
           </a:p>
@@ -1983,7 +1983,7 @@
           <a:p>
             <a:fld id="{2B26E810-B850-E246-B0DE-F696C472EDD6}" type="datetimeFigureOut">
               <a:rPr lang="en-US" smtClean="0"/>
-              <a:t>6/1/2025</a:t>
+              <a:t>6/2/2025</a:t>
             </a:fld>
             <a:endParaRPr lang="en-US"/>
           </a:p>
@@ -2248,7 +2248,7 @@
           <a:p>
             <a:fld id="{2B26E810-B850-E246-B0DE-F696C472EDD6}" type="datetimeFigureOut">
               <a:rPr lang="en-US" smtClean="0"/>
-              <a:t>6/1/2025</a:t>
+              <a:t>6/2/2025</a:t>
             </a:fld>
             <a:endParaRPr lang="en-US"/>
           </a:p>
@@ -2660,7 +2660,7 @@
           <a:p>
             <a:fld id="{2B26E810-B850-E246-B0DE-F696C472EDD6}" type="datetimeFigureOut">
               <a:rPr lang="en-US" smtClean="0"/>
-              <a:t>6/1/2025</a:t>
+              <a:t>6/2/2025</a:t>
             </a:fld>
             <a:endParaRPr lang="en-US"/>
           </a:p>
@@ -2801,7 +2801,7 @@
           <a:p>
             <a:fld id="{2B26E810-B850-E246-B0DE-F696C472EDD6}" type="datetimeFigureOut">
               <a:rPr lang="en-US" smtClean="0"/>
-              <a:t>6/1/2025</a:t>
+              <a:t>6/2/2025</a:t>
             </a:fld>
             <a:endParaRPr lang="en-US"/>
           </a:p>
@@ -2914,7 +2914,7 @@
           <a:p>
             <a:fld id="{2B26E810-B850-E246-B0DE-F696C472EDD6}" type="datetimeFigureOut">
               <a:rPr lang="en-US" smtClean="0"/>
-              <a:t>6/1/2025</a:t>
+              <a:t>6/2/2025</a:t>
             </a:fld>
             <a:endParaRPr lang="en-US"/>
           </a:p>
@@ -3225,7 +3225,7 @@
           <a:p>
             <a:fld id="{2B26E810-B850-E246-B0DE-F696C472EDD6}" type="datetimeFigureOut">
               <a:rPr lang="en-US" smtClean="0"/>
-              <a:t>6/1/2025</a:t>
+              <a:t>6/2/2025</a:t>
             </a:fld>
             <a:endParaRPr lang="en-US"/>
           </a:p>
@@ -3513,7 +3513,7 @@
           <a:p>
             <a:fld id="{2B26E810-B850-E246-B0DE-F696C472EDD6}" type="datetimeFigureOut">
               <a:rPr lang="en-US" smtClean="0"/>
-              <a:t>6/1/2025</a:t>
+              <a:t>6/2/2025</a:t>
             </a:fld>
             <a:endParaRPr lang="en-US"/>
           </a:p>
@@ -3754,7 +3754,7 @@
           <a:p>
             <a:fld id="{2B26E810-B850-E246-B0DE-F696C472EDD6}" type="datetimeFigureOut">
               <a:rPr lang="en-US" smtClean="0"/>
-              <a:t>6/1/2025</a:t>
+              <a:t>6/2/2025</a:t>
             </a:fld>
             <a:endParaRPr lang="en-US"/>
           </a:p>
@@ -7622,8 +7622,8 @@
           </a:p>
         </p:txBody>
       </p:sp>
-      <mc:AlternateContent xmlns:mc="http://schemas.openxmlformats.org/markup-compatibility/2006">
-        <mc:Choice xmlns:a14="http://schemas.microsoft.com/office/drawing/2010/main" Requires="a14">
+      <mc:AlternateContent xmlns:mc="http://schemas.openxmlformats.org/markup-compatibility/2006" xmlns:a14="http://schemas.microsoft.com/office/drawing/2010/main">
+        <mc:Choice Requires="a14">
           <p:sp>
             <p:nvSpPr>
               <p:cNvPr id="3" name="Content Placeholder 2">
@@ -8196,7 +8196,7 @@
             </p:txBody>
           </p:sp>
         </mc:Choice>
-        <mc:Fallback>
+        <mc:Fallback xmlns="">
           <p:sp>
             <p:nvSpPr>
               <p:cNvPr id="3" name="Content Placeholder 2">
@@ -8535,8 +8535,8 @@
           </a:p>
         </p:txBody>
       </p:sp>
-      <mc:AlternateContent xmlns:mc="http://schemas.openxmlformats.org/markup-compatibility/2006">
-        <mc:Choice xmlns:a14="http://schemas.microsoft.com/office/drawing/2010/main" Requires="a14">
+      <mc:AlternateContent xmlns:mc="http://schemas.openxmlformats.org/markup-compatibility/2006" xmlns:a14="http://schemas.microsoft.com/office/drawing/2010/main">
+        <mc:Choice Requires="a14">
           <p:sp>
             <p:nvSpPr>
               <p:cNvPr id="3" name="Content Placeholder 2">
@@ -9248,7 +9248,7 @@
             </p:txBody>
           </p:sp>
         </mc:Choice>
-        <mc:Fallback>
+        <mc:Fallback xmlns="">
           <p:sp>
             <p:nvSpPr>
               <p:cNvPr id="3" name="Content Placeholder 2">
@@ -11213,8 +11213,8 @@
           </a:p>
         </p:txBody>
       </p:sp>
-      <mc:AlternateContent xmlns:mc="http://schemas.openxmlformats.org/markup-compatibility/2006">
-        <mc:Choice xmlns:a14="http://schemas.microsoft.com/office/drawing/2010/main" Requires="a14">
+      <mc:AlternateContent xmlns:mc="http://schemas.openxmlformats.org/markup-compatibility/2006" xmlns:a14="http://schemas.microsoft.com/office/drawing/2010/main">
+        <mc:Choice Requires="a14">
           <p:sp>
             <p:nvSpPr>
               <p:cNvPr id="5" name="Content Placeholder 2">
@@ -11737,7 +11737,7 @@
             </p:txBody>
           </p:sp>
         </mc:Choice>
-        <mc:Fallback>
+        <mc:Fallback xmlns="">
           <p:sp>
             <p:nvSpPr>
               <p:cNvPr id="5" name="Content Placeholder 2">
@@ -11811,8 +11811,8 @@
           </a:prstGeom>
         </p:spPr>
       </p:pic>
-      <mc:AlternateContent xmlns:mc="http://schemas.openxmlformats.org/markup-compatibility/2006">
-        <mc:Choice xmlns:a14="http://schemas.microsoft.com/office/drawing/2010/main" Requires="a14">
+      <mc:AlternateContent xmlns:mc="http://schemas.openxmlformats.org/markup-compatibility/2006" xmlns:a14="http://schemas.microsoft.com/office/drawing/2010/main">
+        <mc:Choice Requires="a14">
           <p:sp>
             <p:nvSpPr>
               <p:cNvPr id="7" name="TextBox 6">
@@ -11867,7 +11867,7 @@
             </p:txBody>
           </p:sp>
         </mc:Choice>
-        <mc:Fallback>
+        <mc:Fallback xmlns="">
           <p:sp>
             <p:nvSpPr>
               <p:cNvPr id="7" name="TextBox 6">
@@ -11912,8 +11912,8 @@
           </p:sp>
         </mc:Fallback>
       </mc:AlternateContent>
-      <mc:AlternateContent xmlns:mc="http://schemas.openxmlformats.org/markup-compatibility/2006">
-        <mc:Choice xmlns:a14="http://schemas.microsoft.com/office/drawing/2010/main" Requires="a14">
+      <mc:AlternateContent xmlns:mc="http://schemas.openxmlformats.org/markup-compatibility/2006" xmlns:a14="http://schemas.microsoft.com/office/drawing/2010/main">
+        <mc:Choice Requires="a14">
           <p:sp>
             <p:nvSpPr>
               <p:cNvPr id="8" name="TextBox 7">
@@ -11968,7 +11968,7 @@
             </p:txBody>
           </p:sp>
         </mc:Choice>
-        <mc:Fallback>
+        <mc:Fallback xmlns="">
           <p:sp>
             <p:nvSpPr>
               <p:cNvPr id="8" name="TextBox 7">
@@ -12013,8 +12013,8 @@
           </p:sp>
         </mc:Fallback>
       </mc:AlternateContent>
-      <mc:AlternateContent xmlns:mc="http://schemas.openxmlformats.org/markup-compatibility/2006">
-        <mc:Choice xmlns:a14="http://schemas.microsoft.com/office/drawing/2010/main" Requires="a14">
+      <mc:AlternateContent xmlns:mc="http://schemas.openxmlformats.org/markup-compatibility/2006" xmlns:a14="http://schemas.microsoft.com/office/drawing/2010/main">
+        <mc:Choice Requires="a14">
           <p:sp>
             <p:nvSpPr>
               <p:cNvPr id="9" name="TextBox 8">
@@ -12069,7 +12069,7 @@
             </p:txBody>
           </p:sp>
         </mc:Choice>
-        <mc:Fallback>
+        <mc:Fallback xmlns="">
           <p:sp>
             <p:nvSpPr>
               <p:cNvPr id="9" name="TextBox 8">
@@ -12296,8 +12296,8 @@
           </a:p>
         </p:txBody>
       </p:sp>
-      <mc:AlternateContent xmlns:mc="http://schemas.openxmlformats.org/markup-compatibility/2006">
-        <mc:Choice xmlns:a14="http://schemas.microsoft.com/office/drawing/2010/main" Requires="a14">
+      <mc:AlternateContent xmlns:mc="http://schemas.openxmlformats.org/markup-compatibility/2006" xmlns:a14="http://schemas.microsoft.com/office/drawing/2010/main">
+        <mc:Choice Requires="a14">
           <p:sp>
             <p:nvSpPr>
               <p:cNvPr id="5" name="Content Placeholder 2">
@@ -12638,7 +12638,7 @@
             </p:txBody>
           </p:sp>
         </mc:Choice>
-        <mc:Fallback>
+        <mc:Fallback xmlns="">
           <p:sp>
             <p:nvSpPr>
               <p:cNvPr id="5" name="Content Placeholder 2">
@@ -12711,8 +12711,8 @@
           </a:prstGeom>
         </p:spPr>
       </p:pic>
-      <mc:AlternateContent xmlns:mc="http://schemas.openxmlformats.org/markup-compatibility/2006">
-        <mc:Choice xmlns:a14="http://schemas.microsoft.com/office/drawing/2010/main" Requires="a14">
+      <mc:AlternateContent xmlns:mc="http://schemas.openxmlformats.org/markup-compatibility/2006" xmlns:a14="http://schemas.microsoft.com/office/drawing/2010/main">
+        <mc:Choice Requires="a14">
           <p:sp>
             <p:nvSpPr>
               <p:cNvPr id="7" name="TextBox 6">
@@ -12799,7 +12799,7 @@
             </p:txBody>
           </p:sp>
         </mc:Choice>
-        <mc:Fallback>
+        <mc:Fallback xmlns="">
           <p:sp>
             <p:nvSpPr>
               <p:cNvPr id="7" name="TextBox 6">
@@ -12844,8 +12844,8 @@
           </p:sp>
         </mc:Fallback>
       </mc:AlternateContent>
-      <mc:AlternateContent xmlns:mc="http://schemas.openxmlformats.org/markup-compatibility/2006">
-        <mc:Choice xmlns:a14="http://schemas.microsoft.com/office/drawing/2010/main" Requires="a14">
+      <mc:AlternateContent xmlns:mc="http://schemas.openxmlformats.org/markup-compatibility/2006" xmlns:a14="http://schemas.microsoft.com/office/drawing/2010/main">
+        <mc:Choice Requires="a14">
           <p:sp>
             <p:nvSpPr>
               <p:cNvPr id="8" name="TextBox 7">
@@ -12900,7 +12900,7 @@
             </p:txBody>
           </p:sp>
         </mc:Choice>
-        <mc:Fallback>
+        <mc:Fallback xmlns="">
           <p:sp>
             <p:nvSpPr>
               <p:cNvPr id="8" name="TextBox 7">
@@ -12945,8 +12945,8 @@
           </p:sp>
         </mc:Fallback>
       </mc:AlternateContent>
-      <mc:AlternateContent xmlns:mc="http://schemas.openxmlformats.org/markup-compatibility/2006">
-        <mc:Choice xmlns:a14="http://schemas.microsoft.com/office/drawing/2010/main" Requires="a14">
+      <mc:AlternateContent xmlns:mc="http://schemas.openxmlformats.org/markup-compatibility/2006" xmlns:a14="http://schemas.microsoft.com/office/drawing/2010/main">
+        <mc:Choice Requires="a14">
           <p:sp>
             <p:nvSpPr>
               <p:cNvPr id="9" name="TextBox 8">
@@ -13001,7 +13001,7 @@
             </p:txBody>
           </p:sp>
         </mc:Choice>
-        <mc:Fallback>
+        <mc:Fallback xmlns="">
           <p:sp>
             <p:nvSpPr>
               <p:cNvPr id="9" name="TextBox 8">
@@ -13198,624 +13198,45 @@
           </a:p>
         </p:txBody>
       </p:sp>
-      <mc:AlternateContent xmlns:mc="http://schemas.openxmlformats.org/markup-compatibility/2006">
-        <mc:Choice xmlns:a14="http://schemas.microsoft.com/office/drawing/2010/main" Requires="a14">
-          <p:sp>
-            <p:nvSpPr>
-              <p:cNvPr id="3" name="Content Placeholder 2">
-                <a:extLst>
-                  <a:ext uri="{FF2B5EF4-FFF2-40B4-BE49-F238E27FC236}">
-                    <a16:creationId xmlns:a16="http://schemas.microsoft.com/office/drawing/2014/main" id="{66272D84-C56A-00AA-1AF8-D01317FAC630}"/>
-                  </a:ext>
-                </a:extLst>
-              </p:cNvPr>
-              <p:cNvSpPr>
-                <a:spLocks noGrp="1"/>
-              </p:cNvSpPr>
-              <p:nvPr>
-                <p:ph idx="1"/>
-              </p:nvPr>
-            </p:nvSpPr>
-            <p:spPr>
-              <a:xfrm>
-                <a:off x="838200" y="1563555"/>
-                <a:ext cx="10515600" cy="4613408"/>
-              </a:xfrm>
-            </p:spPr>
-            <p:txBody>
-              <a:bodyPr>
-                <a:normAutofit/>
-              </a:bodyPr>
-              <a:lstStyle/>
-              <a:p>
-                <a:pPr marL="0" indent="0">
-                  <a:buNone/>
-                </a:pPr>
-                <a:r>
-                  <a:rPr lang="en-US" sz="2400" dirty="0"/>
-                  <a:t>Consider two integrable points to perturb around:</a:t>
-                </a:r>
-              </a:p>
-              <a:p>
-                <a:pPr marL="0" indent="0">
-                  <a:buNone/>
-                </a:pPr>
-                <a:endParaRPr lang="en-US" sz="2400" b="0" i="1" dirty="0"/>
-              </a:p>
-              <a:p>
-                <a:pPr marL="457200" indent="-457200">
-                  <a:buFont typeface="+mj-lt"/>
-                  <a:buAutoNum type="arabicParenR"/>
-                </a:pPr>
-                <a:r>
-                  <a:rPr lang="en-US" sz="2400" dirty="0"/>
-                  <a:t> </a:t>
-                </a:r>
-                <a14:m>
-                  <m:oMath xmlns:m="http://schemas.openxmlformats.org/officeDocument/2006/math">
-                    <m:sSup>
-                      <m:sSupPr>
-                        <m:ctrlPr>
-                          <a:rPr lang="en-US" sz="2400" i="1">
-                            <a:latin typeface="Cambria Math" panose="02040503050406030204" pitchFamily="18" charset="0"/>
-                          </a:rPr>
-                        </m:ctrlPr>
-                      </m:sSupPr>
-                      <m:e>
-                        <m:r>
-                          <a:rPr lang="en-US" sz="2400" i="1">
-                            <a:latin typeface="Cambria Math" panose="02040503050406030204" pitchFamily="18" charset="0"/>
-                          </a:rPr>
-                          <m:t>𝐽</m:t>
-                        </m:r>
-                      </m:e>
-                      <m:sup>
-                        <m:r>
-                          <a:rPr lang="en-US" sz="2400" i="1">
-                            <a:latin typeface="Cambria Math" panose="02040503050406030204" pitchFamily="18" charset="0"/>
-                          </a:rPr>
-                          <m:t>′</m:t>
-                        </m:r>
-                      </m:sup>
-                    </m:sSup>
-                    <m:r>
-                      <a:rPr lang="en-US" sz="2400" i="1">
-                        <a:latin typeface="Cambria Math" panose="02040503050406030204" pitchFamily="18" charset="0"/>
-                      </a:rPr>
-                      <m:t>=</m:t>
-                    </m:r>
-                    <m:r>
-                      <a:rPr lang="en-US" sz="2400" i="1">
-                        <a:latin typeface="Cambria Math" panose="02040503050406030204" pitchFamily="18" charset="0"/>
-                      </a:rPr>
-                      <m:t>𝑈</m:t>
-                    </m:r>
-                    <m:r>
-                      <a:rPr lang="en-US" sz="2400" i="1">
-                        <a:latin typeface="Cambria Math" panose="02040503050406030204" pitchFamily="18" charset="0"/>
-                      </a:rPr>
-                      <m:t>=</m:t>
-                    </m:r>
-                    <m:sSup>
-                      <m:sSupPr>
-                        <m:ctrlPr>
-                          <a:rPr lang="en-US" sz="2400" i="1">
-                            <a:latin typeface="Cambria Math" panose="02040503050406030204" pitchFamily="18" charset="0"/>
-                          </a:rPr>
-                        </m:ctrlPr>
-                      </m:sSupPr>
-                      <m:e>
-                        <m:r>
-                          <a:rPr lang="en-US" sz="2400" i="1">
-                            <a:latin typeface="Cambria Math" panose="02040503050406030204" pitchFamily="18" charset="0"/>
-                          </a:rPr>
-                          <m:t>𝑈</m:t>
-                        </m:r>
-                      </m:e>
-                      <m:sup>
-                        <m:r>
-                          <a:rPr lang="en-US" sz="2400" i="1">
-                            <a:latin typeface="Cambria Math" panose="02040503050406030204" pitchFamily="18" charset="0"/>
-                          </a:rPr>
-                          <m:t>′</m:t>
-                        </m:r>
-                      </m:sup>
-                    </m:sSup>
-                    <m:r>
-                      <a:rPr lang="en-US" sz="2400" i="1">
-                        <a:latin typeface="Cambria Math" panose="02040503050406030204" pitchFamily="18" charset="0"/>
-                      </a:rPr>
-                      <m:t>=0</m:t>
-                    </m:r>
-                  </m:oMath>
-                </a14:m>
-                <a:endParaRPr lang="en-US" sz="2400" dirty="0"/>
-              </a:p>
-              <a:p>
-                <a:pPr marL="0" indent="0">
-                  <a:buNone/>
-                </a:pPr>
-                <a:endParaRPr lang="en-US" sz="2400" b="0" dirty="0"/>
-              </a:p>
-              <a:p>
-                <a:pPr marL="0" indent="0">
-                  <a:buNone/>
-                </a:pPr>
-                <a14:m>
-                  <m:oMathPara xmlns:m="http://schemas.openxmlformats.org/officeDocument/2006/math">
-                    <m:oMathParaPr>
-                      <m:jc m:val="centerGroup"/>
-                    </m:oMathParaPr>
-                    <m:oMath xmlns:m="http://schemas.openxmlformats.org/officeDocument/2006/math">
-                      <m:sSub>
-                        <m:sSubPr>
-                          <m:ctrlPr>
-                            <a:rPr lang="en-US" sz="2400" b="0" i="1" smtClean="0">
-                              <a:latin typeface="Cambria Math" panose="02040503050406030204" pitchFamily="18" charset="0"/>
-                            </a:rPr>
-                          </m:ctrlPr>
-                        </m:sSubPr>
-                        <m:e>
-                          <m:r>
-                            <a:rPr lang="en-US" sz="2400" b="0" i="1" smtClean="0">
-                              <a:latin typeface="Cambria Math" panose="02040503050406030204" pitchFamily="18" charset="0"/>
-                            </a:rPr>
-                            <m:t>𝐻</m:t>
-                          </m:r>
-                        </m:e>
-                        <m:sub>
-                          <m:r>
-                            <a:rPr lang="en-US" sz="2400" b="0" i="1" smtClean="0">
-                              <a:latin typeface="Cambria Math" panose="02040503050406030204" pitchFamily="18" charset="0"/>
-                            </a:rPr>
-                            <m:t>0</m:t>
-                          </m:r>
-                        </m:sub>
-                      </m:sSub>
-                      <m:r>
-                        <a:rPr lang="en-US" sz="2400" b="0" i="1" smtClean="0">
-                          <a:latin typeface="Cambria Math" panose="02040503050406030204" pitchFamily="18" charset="0"/>
-                        </a:rPr>
-                        <m:t>=</m:t>
-                      </m:r>
-                      <m:r>
-                        <a:rPr lang="en-US" sz="2400" b="0" i="1" smtClean="0">
-                          <a:latin typeface="Cambria Math" panose="02040503050406030204" pitchFamily="18" charset="0"/>
-                        </a:rPr>
-                        <m:t>𝐽</m:t>
-                      </m:r>
-                      <m:nary>
-                        <m:naryPr>
-                          <m:chr m:val="∑"/>
-                          <m:supHide m:val="on"/>
-                          <m:ctrlPr>
-                            <a:rPr lang="en-US" sz="2400" b="0" i="1" smtClean="0">
-                              <a:latin typeface="Cambria Math" panose="02040503050406030204" pitchFamily="18" charset="0"/>
-                            </a:rPr>
-                          </m:ctrlPr>
-                        </m:naryPr>
-                        <m:sub>
-                          <m:r>
-                            <m:rPr>
-                              <m:brk m:alnAt="7"/>
-                            </m:rPr>
-                            <a:rPr lang="en-US" sz="2400" b="0" i="1" smtClean="0">
-                              <a:latin typeface="Cambria Math" panose="02040503050406030204" pitchFamily="18" charset="0"/>
-                            </a:rPr>
-                            <m:t>&lt;</m:t>
-                          </m:r>
-                          <m:r>
-                            <a:rPr lang="en-US" sz="2400" b="0" i="1" smtClean="0">
-                              <a:latin typeface="Cambria Math" panose="02040503050406030204" pitchFamily="18" charset="0"/>
-                            </a:rPr>
-                            <m:t>𝑖</m:t>
-                          </m:r>
-                          <m:r>
-                            <a:rPr lang="en-US" sz="2400" b="0" i="1" smtClean="0">
-                              <a:latin typeface="Cambria Math" panose="02040503050406030204" pitchFamily="18" charset="0"/>
-                            </a:rPr>
-                            <m:t>,</m:t>
-                          </m:r>
-                          <m:r>
-                            <a:rPr lang="en-US" sz="2400" b="0" i="1" smtClean="0">
-                              <a:latin typeface="Cambria Math" panose="02040503050406030204" pitchFamily="18" charset="0"/>
-                            </a:rPr>
-                            <m:t>𝑗</m:t>
-                          </m:r>
-                          <m:r>
-                            <a:rPr lang="en-US" sz="2400" b="0" i="1" smtClean="0">
-                              <a:latin typeface="Cambria Math" panose="02040503050406030204" pitchFamily="18" charset="0"/>
-                            </a:rPr>
-                            <m:t>&gt;</m:t>
-                          </m:r>
-                        </m:sub>
-                        <m:sup/>
-                        <m:e>
-                          <m:r>
-                            <a:rPr lang="en-US" sz="2400" b="0" i="1" smtClean="0">
-                              <a:latin typeface="Cambria Math" panose="02040503050406030204" pitchFamily="18" charset="0"/>
-                            </a:rPr>
-                            <m:t>(</m:t>
-                          </m:r>
-                          <m:sSubSup>
-                            <m:sSubSupPr>
-                              <m:ctrlPr>
-                                <a:rPr lang="en-US" sz="2400" i="1" dirty="0">
-                                  <a:latin typeface="Cambria Math" panose="02040503050406030204" pitchFamily="18" charset="0"/>
-                                </a:rPr>
-                              </m:ctrlPr>
-                            </m:sSubSupPr>
-                            <m:e>
-                              <m:acc>
-                                <m:accPr>
-                                  <m:chr m:val="⃗"/>
-                                  <m:ctrlPr>
-                                    <a:rPr lang="en-US" sz="2400" i="1" dirty="0">
-                                      <a:latin typeface="Cambria Math" panose="02040503050406030204" pitchFamily="18" charset="0"/>
-                                    </a:rPr>
-                                  </m:ctrlPr>
-                                </m:accPr>
-                                <m:e>
-                                  <m:r>
-                                    <a:rPr lang="en-US" sz="2400" i="1" dirty="0">
-                                      <a:latin typeface="Cambria Math" panose="02040503050406030204" pitchFamily="18" charset="0"/>
-                                    </a:rPr>
-                                    <m:t>𝑆</m:t>
-                                  </m:r>
-                                </m:e>
-                              </m:acc>
-                            </m:e>
-                            <m:sub>
-                              <m:r>
-                                <a:rPr lang="en-US" sz="2400" i="1" dirty="0">
-                                  <a:latin typeface="Cambria Math" panose="02040503050406030204" pitchFamily="18" charset="0"/>
-                                </a:rPr>
-                                <m:t>𝑖</m:t>
-                              </m:r>
-                            </m:sub>
-                            <m:sup>
-                              <m:r>
-                                <a:rPr lang="en-US" sz="2400" i="1" dirty="0">
-                                  <a:latin typeface="Cambria Math" panose="02040503050406030204" pitchFamily="18" charset="0"/>
-                                </a:rPr>
-                                <m:t>(1)</m:t>
-                              </m:r>
-                            </m:sup>
-                          </m:sSubSup>
-                        </m:e>
-                      </m:nary>
-                      <m:r>
-                        <a:rPr lang="en-US" sz="2400" b="0" i="1" dirty="0" smtClean="0">
-                          <a:latin typeface="Cambria Math" panose="02040503050406030204" pitchFamily="18" charset="0"/>
-                          <a:ea typeface="Cambria Math" panose="02040503050406030204" pitchFamily="18" charset="0"/>
-                        </a:rPr>
-                        <m:t>∙</m:t>
-                      </m:r>
-                      <m:sSubSup>
-                        <m:sSubSupPr>
-                          <m:ctrlPr>
-                            <a:rPr lang="en-US" sz="2400" i="1" dirty="0">
-                              <a:latin typeface="Cambria Math" panose="02040503050406030204" pitchFamily="18" charset="0"/>
-                            </a:rPr>
-                          </m:ctrlPr>
-                        </m:sSubSupPr>
-                        <m:e>
-                          <m:acc>
-                            <m:accPr>
-                              <m:chr m:val="⃗"/>
-                              <m:ctrlPr>
-                                <a:rPr lang="en-US" sz="2400" i="1" dirty="0">
-                                  <a:latin typeface="Cambria Math" panose="02040503050406030204" pitchFamily="18" charset="0"/>
-                                </a:rPr>
-                              </m:ctrlPr>
-                            </m:accPr>
-                            <m:e>
-                              <m:r>
-                                <a:rPr lang="en-US" sz="2400" i="1" dirty="0">
-                                  <a:latin typeface="Cambria Math" panose="02040503050406030204" pitchFamily="18" charset="0"/>
-                                </a:rPr>
-                                <m:t>𝑆</m:t>
-                              </m:r>
-                            </m:e>
-                          </m:acc>
-                        </m:e>
-                        <m:sub>
-                          <m:r>
-                            <a:rPr lang="en-US" sz="2400" b="0" i="1" dirty="0" smtClean="0">
-                              <a:latin typeface="Cambria Math" panose="02040503050406030204" pitchFamily="18" charset="0"/>
-                            </a:rPr>
-                            <m:t>𝑗</m:t>
-                          </m:r>
-                        </m:sub>
-                        <m:sup>
-                          <m:d>
-                            <m:dPr>
-                              <m:ctrlPr>
-                                <a:rPr lang="en-US" sz="2400" i="1" dirty="0">
-                                  <a:latin typeface="Cambria Math" panose="02040503050406030204" pitchFamily="18" charset="0"/>
-                                </a:rPr>
-                              </m:ctrlPr>
-                            </m:dPr>
-                            <m:e>
-                              <m:r>
-                                <a:rPr lang="en-US" sz="2400" i="1" dirty="0">
-                                  <a:latin typeface="Cambria Math" panose="02040503050406030204" pitchFamily="18" charset="0"/>
-                                </a:rPr>
-                                <m:t>1</m:t>
-                              </m:r>
-                            </m:e>
-                          </m:d>
-                        </m:sup>
-                      </m:sSubSup>
-                      <m:r>
-                        <a:rPr lang="en-US" sz="2400" b="0" i="1" dirty="0" smtClean="0">
-                          <a:latin typeface="Cambria Math" panose="02040503050406030204" pitchFamily="18" charset="0"/>
-                        </a:rPr>
-                        <m:t>+</m:t>
-                      </m:r>
-                      <m:sSubSup>
-                        <m:sSubSupPr>
-                          <m:ctrlPr>
-                            <a:rPr lang="en-US" sz="2400" i="1" dirty="0">
-                              <a:latin typeface="Cambria Math" panose="02040503050406030204" pitchFamily="18" charset="0"/>
-                            </a:rPr>
-                          </m:ctrlPr>
-                        </m:sSubSupPr>
-                        <m:e>
-                          <m:acc>
-                            <m:accPr>
-                              <m:chr m:val="⃗"/>
-                              <m:ctrlPr>
-                                <a:rPr lang="en-US" sz="2400" i="1" dirty="0">
-                                  <a:latin typeface="Cambria Math" panose="02040503050406030204" pitchFamily="18" charset="0"/>
-                                </a:rPr>
-                              </m:ctrlPr>
-                            </m:accPr>
-                            <m:e>
-                              <m:r>
-                                <a:rPr lang="en-US" sz="2400" i="1" dirty="0">
-                                  <a:latin typeface="Cambria Math" panose="02040503050406030204" pitchFamily="18" charset="0"/>
-                                </a:rPr>
-                                <m:t>𝑆</m:t>
-                              </m:r>
-                            </m:e>
-                          </m:acc>
-                        </m:e>
-                        <m:sub>
-                          <m:r>
-                            <a:rPr lang="en-US" sz="2400" i="1" dirty="0">
-                              <a:latin typeface="Cambria Math" panose="02040503050406030204" pitchFamily="18" charset="0"/>
-                            </a:rPr>
-                            <m:t>𝑖</m:t>
-                          </m:r>
-                        </m:sub>
-                        <m:sup>
-                          <m:d>
-                            <m:dPr>
-                              <m:ctrlPr>
-                                <a:rPr lang="en-US" sz="2400" b="0" i="1" dirty="0">
-                                  <a:latin typeface="Cambria Math" panose="02040503050406030204" pitchFamily="18" charset="0"/>
-                                </a:rPr>
-                              </m:ctrlPr>
-                            </m:dPr>
-                            <m:e>
-                              <m:r>
-                                <a:rPr lang="en-US" sz="2400" b="0" i="1" dirty="0" smtClean="0">
-                                  <a:latin typeface="Cambria Math" panose="02040503050406030204" pitchFamily="18" charset="0"/>
-                                </a:rPr>
-                                <m:t>2</m:t>
-                              </m:r>
-                            </m:e>
-                          </m:d>
-                        </m:sup>
-                      </m:sSubSup>
-                      <m:r>
-                        <a:rPr lang="en-US" sz="2400" b="0" i="1" smtClean="0">
-                          <a:latin typeface="Cambria Math" panose="02040503050406030204" pitchFamily="18" charset="0"/>
-                        </a:rPr>
-                        <m:t>⋅</m:t>
-                      </m:r>
-                      <m:sSubSup>
-                        <m:sSubSupPr>
-                          <m:ctrlPr>
-                            <a:rPr lang="en-US" sz="2400" i="1" dirty="0">
-                              <a:latin typeface="Cambria Math" panose="02040503050406030204" pitchFamily="18" charset="0"/>
-                            </a:rPr>
-                          </m:ctrlPr>
-                        </m:sSubSupPr>
-                        <m:e>
-                          <m:acc>
-                            <m:accPr>
-                              <m:chr m:val="⃗"/>
-                              <m:ctrlPr>
-                                <a:rPr lang="en-US" sz="2400" i="1" dirty="0">
-                                  <a:latin typeface="Cambria Math" panose="02040503050406030204" pitchFamily="18" charset="0"/>
-                                </a:rPr>
-                              </m:ctrlPr>
-                            </m:accPr>
-                            <m:e>
-                              <m:r>
-                                <a:rPr lang="en-US" sz="2400" i="1" dirty="0">
-                                  <a:latin typeface="Cambria Math" panose="02040503050406030204" pitchFamily="18" charset="0"/>
-                                </a:rPr>
-                                <m:t>𝑆</m:t>
-                              </m:r>
-                            </m:e>
-                          </m:acc>
-                        </m:e>
-                        <m:sub>
-                          <m:r>
-                            <a:rPr lang="en-US" sz="2400" b="0" i="1" dirty="0" smtClean="0">
-                              <a:latin typeface="Cambria Math" panose="02040503050406030204" pitchFamily="18" charset="0"/>
-                            </a:rPr>
-                            <m:t>𝑗</m:t>
-                          </m:r>
-                        </m:sub>
-                        <m:sup>
-                          <m:d>
-                            <m:dPr>
-                              <m:ctrlPr>
-                                <a:rPr lang="en-US" sz="2400" b="0" i="1" dirty="0">
-                                  <a:latin typeface="Cambria Math" panose="02040503050406030204" pitchFamily="18" charset="0"/>
-                                </a:rPr>
-                              </m:ctrlPr>
-                            </m:dPr>
-                            <m:e>
-                              <m:r>
-                                <a:rPr lang="en-US" sz="2400" b="0" i="1" dirty="0" smtClean="0">
-                                  <a:latin typeface="Cambria Math" panose="02040503050406030204" pitchFamily="18" charset="0"/>
-                                </a:rPr>
-                                <m:t>2</m:t>
-                              </m:r>
-                            </m:e>
-                          </m:d>
-                        </m:sup>
-                      </m:sSubSup>
-                      <m:r>
-                        <a:rPr lang="en-US" sz="2400" b="0" i="1" dirty="0" smtClean="0">
-                          <a:latin typeface="Cambria Math" panose="02040503050406030204" pitchFamily="18" charset="0"/>
-                        </a:rPr>
-                        <m:t>)</m:t>
-                      </m:r>
-                    </m:oMath>
-                  </m:oMathPara>
-                </a14:m>
-                <a:endParaRPr lang="en-US" sz="2400" b="0" dirty="0"/>
-              </a:p>
-              <a:p>
-                <a:pPr marL="0" indent="0">
-                  <a:buNone/>
-                </a:pPr>
-                <a:endParaRPr lang="en-US" sz="2400" dirty="0"/>
-              </a:p>
-              <a:p>
-                <a:pPr marL="0" indent="0">
-                  <a:buNone/>
-                </a:pPr>
-                <a:endParaRPr lang="en-US" sz="2400" dirty="0"/>
-              </a:p>
-              <a:p>
-                <a:pPr marL="0" indent="0">
-                  <a:buNone/>
-                </a:pPr>
-                <a14:m>
-                  <m:oMathPara xmlns:m="http://schemas.openxmlformats.org/officeDocument/2006/math">
-                    <m:oMathParaPr>
-                      <m:jc m:val="centerGroup"/>
-                    </m:oMathParaPr>
-                    <m:oMath xmlns:m="http://schemas.openxmlformats.org/officeDocument/2006/math">
-                      <m:r>
-                        <a:rPr lang="en-US" b="0" i="1" smtClean="0">
-                          <a:solidFill>
-                            <a:schemeClr val="accent1"/>
-                          </a:solidFill>
-                          <a:latin typeface="Cambria Math" panose="02040503050406030204" pitchFamily="18" charset="0"/>
-                        </a:rPr>
-                        <m:t>𝐺</m:t>
-                      </m:r>
-                      <m:r>
-                        <a:rPr lang="en-US" b="0" i="1" smtClean="0">
-                          <a:solidFill>
-                            <a:schemeClr val="accent1"/>
-                          </a:solidFill>
-                          <a:latin typeface="Cambria Math" panose="02040503050406030204" pitchFamily="18" charset="0"/>
-                        </a:rPr>
-                        <m:t>=</m:t>
-                      </m:r>
-                      <m:r>
-                        <a:rPr lang="en-US" b="0" i="1" smtClean="0">
-                          <a:solidFill>
-                            <a:schemeClr val="accent1"/>
-                          </a:solidFill>
-                          <a:latin typeface="Cambria Math" panose="02040503050406030204" pitchFamily="18" charset="0"/>
-                        </a:rPr>
-                        <m:t>𝑆𝑈</m:t>
-                      </m:r>
-                      <m:r>
-                        <a:rPr lang="en-US" b="0" i="1" smtClean="0">
-                          <a:solidFill>
-                            <a:schemeClr val="accent1"/>
-                          </a:solidFill>
-                          <a:latin typeface="Cambria Math" panose="02040503050406030204" pitchFamily="18" charset="0"/>
-                        </a:rPr>
-                        <m:t>(2)×</m:t>
-                      </m:r>
-                      <m:r>
-                        <a:rPr lang="en-US" b="0" i="1" smtClean="0">
-                          <a:solidFill>
-                            <a:schemeClr val="accent1"/>
-                          </a:solidFill>
-                          <a:latin typeface="Cambria Math" panose="02040503050406030204" pitchFamily="18" charset="0"/>
-                          <a:ea typeface="Cambria Math" panose="02040503050406030204" pitchFamily="18" charset="0"/>
-                        </a:rPr>
-                        <m:t>𝑆𝑈</m:t>
-                      </m:r>
-                      <m:r>
-                        <a:rPr lang="en-US" b="0" i="1" smtClean="0">
-                          <a:solidFill>
-                            <a:schemeClr val="accent1"/>
-                          </a:solidFill>
-                          <a:latin typeface="Cambria Math" panose="02040503050406030204" pitchFamily="18" charset="0"/>
-                          <a:ea typeface="Cambria Math" panose="02040503050406030204" pitchFamily="18" charset="0"/>
-                        </a:rPr>
-                        <m:t>(2)</m:t>
-                      </m:r>
-                    </m:oMath>
-                  </m:oMathPara>
-                </a14:m>
-                <a:endParaRPr lang="en-US" b="0" dirty="0">
-                  <a:solidFill>
-                    <a:schemeClr val="accent1"/>
-                  </a:solidFill>
-                </a:endParaRPr>
-              </a:p>
-            </p:txBody>
-          </p:sp>
-        </mc:Choice>
-        <mc:Fallback>
-          <p:sp>
-            <p:nvSpPr>
-              <p:cNvPr id="3" name="Content Placeholder 2">
-                <a:extLst>
-                  <a:ext uri="{FF2B5EF4-FFF2-40B4-BE49-F238E27FC236}">
-                    <a16:creationId xmlns:a16="http://schemas.microsoft.com/office/drawing/2014/main" id="{66272D84-C56A-00AA-1AF8-D01317FAC630}"/>
-                  </a:ext>
-                </a:extLst>
-              </p:cNvPr>
-              <p:cNvSpPr>
-                <a:spLocks noGrp="1" noRot="1" noChangeAspect="1" noMove="1" noResize="1" noEditPoints="1" noAdjustHandles="1" noChangeArrowheads="1" noChangeShapeType="1" noTextEdit="1"/>
-              </p:cNvSpPr>
-              <p:nvPr>
-                <p:ph idx="1"/>
-              </p:nvPr>
-            </p:nvSpPr>
-            <p:spPr>
-              <a:xfrm>
-                <a:off x="838200" y="1563555"/>
-                <a:ext cx="10515600" cy="4613408"/>
-              </a:xfrm>
-              <a:blipFill>
-                <a:blip r:embed="rId2"/>
-                <a:stretch>
-                  <a:fillRect l="-928" t="-1849"/>
-                </a:stretch>
-              </a:blipFill>
-            </p:spPr>
-            <p:txBody>
-              <a:bodyPr/>
-              <a:lstStyle/>
-              <a:p>
-                <a:r>
-                  <a:rPr lang="en-US">
-                    <a:noFill/>
-                  </a:rPr>
-                  <a:t> </a:t>
-                </a:r>
-              </a:p>
-            </p:txBody>
-          </p:sp>
-        </mc:Fallback>
-      </mc:AlternateContent>
+      <p:sp>
+        <p:nvSpPr>
+          <p:cNvPr id="3" name="Content Placeholder 2">
+            <a:extLst>
+              <a:ext uri="{FF2B5EF4-FFF2-40B4-BE49-F238E27FC236}">
+                <a16:creationId xmlns:a16="http://schemas.microsoft.com/office/drawing/2014/main" id="{66272D84-C56A-00AA-1AF8-D01317FAC630}"/>
+              </a:ext>
+            </a:extLst>
+          </p:cNvPr>
+          <p:cNvSpPr>
+            <a:spLocks noGrp="1"/>
+          </p:cNvSpPr>
+          <p:nvPr>
+            <p:ph idx="1"/>
+          </p:nvPr>
+        </p:nvSpPr>
+        <p:spPr>
+          <a:xfrm>
+            <a:off x="838200" y="1563555"/>
+            <a:ext cx="10515600" cy="4613408"/>
+          </a:xfrm>
+        </p:spPr>
+        <p:txBody>
+          <a:bodyPr>
+            <a:normAutofit/>
+          </a:bodyPr>
+          <a:lstStyle/>
+          <a:p>
+            <a:pPr marL="0" indent="0">
+              <a:buNone/>
+            </a:pPr>
+            <a:endParaRPr lang="en-US" b="0" dirty="0">
+              <a:solidFill>
+                <a:schemeClr val="accent1"/>
+              </a:solidFill>
+            </a:endParaRPr>
+          </a:p>
+        </p:txBody>
+      </p:sp>
     </p:spTree>
     <p:extLst>
       <p:ext uri="{BB962C8B-B14F-4D97-AF65-F5344CB8AC3E}">
@@ -13847,10 +13268,15 @@
                             </p:stCondLst>
                             <p:childTnLst>
                               <p:par>
-                                <p:cTn id="5" presetID="1" presetClass="entr" presetSubtype="0" fill="hold" grpId="0" nodeType="clickEffect">
+                                <p:cTn id="5" presetID="1" presetClass="entr" presetSubtype="0" fill="hold" grpId="0" nodeType="clickEffect" nodePh="1">
                                   <p:stCondLst>
                                     <p:cond delay="0"/>
                                   </p:stCondLst>
+                                  <p:endCondLst>
+                                    <p:cond evt="begin" delay="0">
+                                      <p:tn val="5"/>
+                                    </p:cond>
+                                  </p:endCondLst>
                                   <p:childTnLst>
                                     <p:set>
                                       <p:cBhvr>
@@ -13863,153 +13289,6 @@
                                           <p:spTgt spid="3">
                                             <p:txEl>
                                               <p:pRg st="0" end="0"/>
-                                            </p:txEl>
-                                          </p:spTgt>
-                                        </p:tgtEl>
-                                        <p:attrNameLst>
-                                          <p:attrName>style.visibility</p:attrName>
-                                        </p:attrNameLst>
-                                      </p:cBhvr>
-                                      <p:to>
-                                        <p:strVal val="visible"/>
-                                      </p:to>
-                                    </p:set>
-                                  </p:childTnLst>
-                                </p:cTn>
-                              </p:par>
-                            </p:childTnLst>
-                          </p:cTn>
-                        </p:par>
-                      </p:childTnLst>
-                    </p:cTn>
-                  </p:par>
-                  <p:par>
-                    <p:cTn id="7" fill="hold">
-                      <p:stCondLst>
-                        <p:cond delay="indefinite"/>
-                      </p:stCondLst>
-                      <p:childTnLst>
-                        <p:par>
-                          <p:cTn id="8" fill="hold">
-                            <p:stCondLst>
-                              <p:cond delay="0"/>
-                            </p:stCondLst>
-                            <p:childTnLst>
-                              <p:par>
-                                <p:cTn id="9" presetID="1" presetClass="entr" presetSubtype="0" fill="hold" grpId="0" nodeType="clickEffect">
-                                  <p:stCondLst>
-                                    <p:cond delay="0"/>
-                                  </p:stCondLst>
-                                  <p:childTnLst>
-                                    <p:set>
-                                      <p:cBhvr>
-                                        <p:cTn id="10" dur="1" fill="hold">
-                                          <p:stCondLst>
-                                            <p:cond delay="0"/>
-                                          </p:stCondLst>
-                                        </p:cTn>
-                                        <p:tgtEl>
-                                          <p:spTgt spid="3">
-                                            <p:txEl>
-                                              <p:pRg st="2" end="2"/>
-                                            </p:txEl>
-                                          </p:spTgt>
-                                        </p:tgtEl>
-                                        <p:attrNameLst>
-                                          <p:attrName>style.visibility</p:attrName>
-                                        </p:attrNameLst>
-                                      </p:cBhvr>
-                                      <p:to>
-                                        <p:strVal val="visible"/>
-                                      </p:to>
-                                    </p:set>
-                                  </p:childTnLst>
-                                </p:cTn>
-                              </p:par>
-                            </p:childTnLst>
-                          </p:cTn>
-                        </p:par>
-                      </p:childTnLst>
-                    </p:cTn>
-                  </p:par>
-                  <p:par>
-                    <p:cTn id="11" fill="hold">
-                      <p:stCondLst>
-                        <p:cond delay="indefinite"/>
-                      </p:stCondLst>
-                      <p:childTnLst>
-                        <p:par>
-                          <p:cTn id="12" fill="hold">
-                            <p:stCondLst>
-                              <p:cond delay="0"/>
-                            </p:stCondLst>
-                            <p:childTnLst>
-                              <p:par>
-                                <p:cTn id="13" presetID="1" presetClass="entr" presetSubtype="0" fill="hold" grpId="0" nodeType="clickEffect">
-                                  <p:stCondLst>
-                                    <p:cond delay="0"/>
-                                  </p:stCondLst>
-                                  <p:childTnLst>
-                                    <p:set>
-                                      <p:cBhvr>
-                                        <p:cTn id="14" dur="1" fill="hold">
-                                          <p:stCondLst>
-                                            <p:cond delay="0"/>
-                                          </p:stCondLst>
-                                        </p:cTn>
-                                        <p:tgtEl>
-                                          <p:spTgt spid="3">
-                                            <p:txEl>
-                                              <p:pRg st="4" end="4"/>
-                                            </p:txEl>
-                                          </p:spTgt>
-                                        </p:tgtEl>
-                                        <p:attrNameLst>
-                                          <p:attrName>style.visibility</p:attrName>
-                                        </p:attrNameLst>
-                                      </p:cBhvr>
-                                      <p:to>
-                                        <p:strVal val="visible"/>
-                                      </p:to>
-                                    </p:set>
-                                  </p:childTnLst>
-                                </p:cTn>
-                              </p:par>
-                            </p:childTnLst>
-                          </p:cTn>
-                        </p:par>
-                      </p:childTnLst>
-                    </p:cTn>
-                  </p:par>
-                  <p:par>
-                    <p:cTn id="15" fill="hold">
-                      <p:stCondLst>
-                        <p:cond delay="indefinite"/>
-                      </p:stCondLst>
-                      <p:childTnLst>
-                        <p:par>
-                          <p:cTn id="16" fill="hold">
-                            <p:stCondLst>
-                              <p:cond delay="0"/>
-                            </p:stCondLst>
-                            <p:childTnLst>
-                              <p:par>
-                                <p:cTn id="17" presetID="1" presetClass="entr" presetSubtype="0" fill="hold" grpId="0" nodeType="clickEffect">
-                                  <p:stCondLst>
-                                    <p:cond delay="0"/>
-                                  </p:stCondLst>
-                                  <p:childTnLst>
-                                    <p:set>
-                                      <p:cBhvr>
-                                        <p:cTn id="18" dur="1" fill="hold">
-                                          <p:stCondLst>
-                                            <p:cond delay="0"/>
-                                          </p:stCondLst>
-                                        </p:cTn>
-                                        <p:tgtEl>
-                                          <p:spTgt spid="3">
-                                            <p:txEl>
-                                              <p:pRg st="7" end="7"/>
                                             </p:txEl>
                                           </p:spTgt>
                                         </p:tgtEl>
@@ -14449,209 +13728,31 @@
           </a:p>
         </p:txBody>
       </p:sp>
-      <mc:AlternateContent xmlns:mc="http://schemas.openxmlformats.org/markup-compatibility/2006" xmlns:a14="http://schemas.microsoft.com/office/drawing/2010/main">
-        <mc:Choice Requires="a14">
-          <p:sp>
-            <p:nvSpPr>
-              <p:cNvPr id="3" name="Content Placeholder 2">
-                <a:extLst>
-                  <a:ext uri="{FF2B5EF4-FFF2-40B4-BE49-F238E27FC236}">
-                    <a16:creationId xmlns:a16="http://schemas.microsoft.com/office/drawing/2014/main" id="{9315E454-FB9C-96D4-3004-DC6AB75C52B0}"/>
-                  </a:ext>
-                </a:extLst>
-              </p:cNvPr>
-              <p:cNvSpPr>
-                <a:spLocks noGrp="1"/>
-              </p:cNvSpPr>
-              <p:nvPr>
-                <p:ph idx="1"/>
-              </p:nvPr>
-            </p:nvSpPr>
-            <p:spPr/>
-            <p:txBody>
-              <a:bodyPr/>
-              <a:lstStyle/>
-              <a:p>
-                <a:r>
-                  <a:rPr lang="en-US" dirty="0"/>
-                  <a:t>We are currently working on analyzing how these time scales are affected by nonzero </a:t>
-                </a:r>
-                <a14:m>
-                  <m:oMath xmlns:m="http://schemas.openxmlformats.org/officeDocument/2006/math">
-                    <m:r>
-                      <a:rPr lang="en-US" b="0" i="1" smtClean="0">
-                        <a:latin typeface="Cambria Math" panose="02040503050406030204" pitchFamily="18" charset="0"/>
-                      </a:rPr>
-                      <m:t>𝛽</m:t>
-                    </m:r>
-                    <m:r>
-                      <a:rPr lang="en-US" b="0" i="1" smtClean="0">
-                        <a:latin typeface="Cambria Math" panose="02040503050406030204" pitchFamily="18" charset="0"/>
-                      </a:rPr>
-                      <m:t>∼1/</m:t>
-                    </m:r>
-                    <m:r>
-                      <a:rPr lang="en-US" b="0" i="1" smtClean="0">
-                        <a:latin typeface="Cambria Math" panose="02040503050406030204" pitchFamily="18" charset="0"/>
-                      </a:rPr>
-                      <m:t>𝑇</m:t>
-                    </m:r>
-                  </m:oMath>
-                </a14:m>
-                <a:r>
-                  <a:rPr lang="en-US" dirty="0"/>
-                  <a:t>, i.e. away from infinite temperature</a:t>
-                </a:r>
-              </a:p>
-              <a:p>
-                <a:r>
-                  <a:rPr lang="en-US" dirty="0"/>
-                  <a:t>Initial simulations seem to indicate that for small </a:t>
-                </a:r>
-                <a14:m>
-                  <m:oMath xmlns:m="http://schemas.openxmlformats.org/officeDocument/2006/math">
-                    <m:r>
-                      <a:rPr lang="en-US" b="0" i="1" smtClean="0">
-                        <a:latin typeface="Cambria Math" panose="02040503050406030204" pitchFamily="18" charset="0"/>
-                      </a:rPr>
-                      <m:t>𝛽</m:t>
-                    </m:r>
-                  </m:oMath>
-                </a14:m>
-                <a:r>
-                  <a:rPr lang="en-US" dirty="0"/>
-                  <a:t>, increasing </a:t>
-                </a:r>
-                <a14:m>
-                  <m:oMath xmlns:m="http://schemas.openxmlformats.org/officeDocument/2006/math">
-                    <m:r>
-                      <a:rPr lang="en-US" b="0" i="1" smtClean="0">
-                        <a:latin typeface="Cambria Math" panose="02040503050406030204" pitchFamily="18" charset="0"/>
-                      </a:rPr>
-                      <m:t>𝛽</m:t>
-                    </m:r>
-                  </m:oMath>
-                </a14:m>
-                <a:r>
-                  <a:rPr lang="en-US" dirty="0"/>
-                  <a:t> leads to a </a:t>
-                </a:r>
-                <a:r>
-                  <a:rPr lang="en-US" i="1" dirty="0"/>
-                  <a:t>faster </a:t>
-                </a:r>
-                <a:r>
-                  <a:rPr lang="en-US" dirty="0"/>
-                  <a:t>onset of diffusion</a:t>
-                </a:r>
-              </a:p>
-              <a:p>
-                <a:r>
-                  <a:rPr lang="en-US" dirty="0"/>
-                  <a:t>For larger </a:t>
-                </a:r>
-                <a14:m>
-                  <m:oMath xmlns:m="http://schemas.openxmlformats.org/officeDocument/2006/math">
-                    <m:r>
-                      <a:rPr lang="en-US" b="0" i="1" smtClean="0">
-                        <a:latin typeface="Cambria Math" panose="02040503050406030204" pitchFamily="18" charset="0"/>
-                      </a:rPr>
-                      <m:t>𝛽</m:t>
-                    </m:r>
-                  </m:oMath>
-                </a14:m>
-                <a:r>
-                  <a:rPr lang="en-US" dirty="0"/>
-                  <a:t>, increasing </a:t>
-                </a:r>
-                <a14:m>
-                  <m:oMath xmlns:m="http://schemas.openxmlformats.org/officeDocument/2006/math">
-                    <m:r>
-                      <a:rPr lang="en-US" b="0" i="1" smtClean="0">
-                        <a:latin typeface="Cambria Math" panose="02040503050406030204" pitchFamily="18" charset="0"/>
-                      </a:rPr>
-                      <m:t>𝛽</m:t>
-                    </m:r>
-                  </m:oMath>
-                </a14:m>
-                <a:r>
-                  <a:rPr lang="en-US" dirty="0"/>
-                  <a:t> </a:t>
-                </a:r>
-                <a:r>
-                  <a:rPr lang="en-US" i="1" dirty="0"/>
-                  <a:t>suppresses</a:t>
-                </a:r>
-                <a:r>
-                  <a:rPr lang="en-US" dirty="0"/>
-                  <a:t> the onset of diffusion as the timescale for which </a:t>
-                </a:r>
-                <a:r>
-                  <a:rPr lang="en-US" dirty="0" err="1"/>
-                  <a:t>Luttinger</a:t>
-                </a:r>
-                <a:r>
-                  <a:rPr lang="en-US" dirty="0"/>
-                  <a:t> liquid behavior exists is longer (scaling as </a:t>
-                </a:r>
-                <a14:m>
-                  <m:oMath xmlns:m="http://schemas.openxmlformats.org/officeDocument/2006/math">
-                    <m:r>
-                      <a:rPr lang="en-US" b="0" i="1" smtClean="0">
-                        <a:latin typeface="Cambria Math" panose="02040503050406030204" pitchFamily="18" charset="0"/>
-                      </a:rPr>
-                      <m:t>𝛽</m:t>
-                    </m:r>
-                  </m:oMath>
-                </a14:m>
-                <a:r>
-                  <a:rPr lang="en-US" dirty="0"/>
-                  <a:t>)</a:t>
-                </a:r>
-              </a:p>
-            </p:txBody>
-          </p:sp>
-        </mc:Choice>
-        <mc:Fallback xmlns="">
-          <p:sp>
-            <p:nvSpPr>
-              <p:cNvPr id="3" name="Content Placeholder 2">
-                <a:extLst>
-                  <a:ext uri="{FF2B5EF4-FFF2-40B4-BE49-F238E27FC236}">
-                    <a16:creationId xmlns:a16="http://schemas.microsoft.com/office/drawing/2014/main" id="{9315E454-FB9C-96D4-3004-DC6AB75C52B0}"/>
-                  </a:ext>
-                </a:extLst>
-              </p:cNvPr>
-              <p:cNvSpPr>
-                <a:spLocks noGrp="1" noRot="1" noChangeAspect="1" noMove="1" noResize="1" noEditPoints="1" noAdjustHandles="1" noChangeArrowheads="1" noChangeShapeType="1" noTextEdit="1"/>
-              </p:cNvSpPr>
-              <p:nvPr>
-                <p:ph idx="1"/>
-              </p:nvPr>
-            </p:nvSpPr>
-            <p:spPr>
-              <a:blipFill>
-                <a:blip r:embed="rId2"/>
-                <a:stretch>
-                  <a:fillRect l="-1086" t="-2326" r="-1809"/>
-                </a:stretch>
-              </a:blipFill>
-            </p:spPr>
-            <p:txBody>
-              <a:bodyPr/>
-              <a:lstStyle/>
-              <a:p>
-                <a:r>
-                  <a:rPr lang="en-US">
-                    <a:noFill/>
-                  </a:rPr>
-                  <a:t> </a:t>
-                </a:r>
-              </a:p>
-            </p:txBody>
-          </p:sp>
-        </mc:Fallback>
-      </mc:AlternateContent>
+      <p:sp>
+        <p:nvSpPr>
+          <p:cNvPr id="3" name="Content Placeholder 2">
+            <a:extLst>
+              <a:ext uri="{FF2B5EF4-FFF2-40B4-BE49-F238E27FC236}">
+                <a16:creationId xmlns:a16="http://schemas.microsoft.com/office/drawing/2014/main" id="{9315E454-FB9C-96D4-3004-DC6AB75C52B0}"/>
+              </a:ext>
+            </a:extLst>
+          </p:cNvPr>
+          <p:cNvSpPr>
+            <a:spLocks noGrp="1"/>
+          </p:cNvSpPr>
+          <p:nvPr>
+            <p:ph idx="1"/>
+          </p:nvPr>
+        </p:nvSpPr>
+        <p:spPr/>
+        <p:txBody>
+          <a:bodyPr/>
+          <a:lstStyle/>
+          <a:p>
+            <a:endParaRPr lang="en-US" dirty="0"/>
+          </a:p>
+        </p:txBody>
+      </p:sp>
     </p:spTree>
     <p:extLst>
       <p:ext uri="{BB962C8B-B14F-4D97-AF65-F5344CB8AC3E}">
@@ -14683,10 +13784,15 @@
                             </p:stCondLst>
                             <p:childTnLst>
                               <p:par>
-                                <p:cTn id="5" presetID="1" presetClass="entr" presetSubtype="0" fill="hold" grpId="0" nodeType="clickEffect">
+                                <p:cTn id="5" presetID="1" presetClass="entr" presetSubtype="0" fill="hold" grpId="0" nodeType="clickEffect" nodePh="1">
                                   <p:stCondLst>
                                     <p:cond delay="0"/>
                                   </p:stCondLst>
+                                  <p:endCondLst>
+                                    <p:cond evt="begin" delay="0">
+                                      <p:tn val="5"/>
+                                    </p:cond>
+                                  </p:endCondLst>
                                   <p:childTnLst>
                                     <p:set>
                                       <p:cBhvr>
@@ -14699,104 +13805,6 @@
                                           <p:spTgt spid="3">
                                             <p:txEl>
                                               <p:pRg st="0" end="0"/>
-                                            </p:txEl>
-                                          </p:spTgt>
-                                        </p:tgtEl>
-                                        <p:attrNameLst>
-                                          <p:attrName>style.visibility</p:attrName>
-                                        </p:attrNameLst>
-                                      </p:cBhvr>
-                                      <p:to>
-                                        <p:strVal val="visible"/>
-                                      </p:to>
-                                    </p:set>
-                                  </p:childTnLst>
-                                </p:cTn>
-                              </p:par>
-                            </p:childTnLst>
-                          </p:cTn>
-                        </p:par>
-                      </p:childTnLst>
-                    </p:cTn>
-                  </p:par>
-                  <p:par>
-                    <p:cTn id="7" fill="hold">
-                      <p:stCondLst>
-                        <p:cond delay="indefinite"/>
-                      </p:stCondLst>
-                      <p:childTnLst>
-                        <p:par>
-                          <p:cTn id="8" fill="hold">
-                            <p:stCondLst>
-                              <p:cond delay="0"/>
-                            </p:stCondLst>
-                            <p:childTnLst>
-                              <p:par>
-                                <p:cTn id="9" presetID="1" presetClass="entr" presetSubtype="0" fill="hold" grpId="0" nodeType="clickEffect">
-                                  <p:stCondLst>
-                                    <p:cond delay="0"/>
-                                  </p:stCondLst>
-                                  <p:childTnLst>
-                                    <p:set>
-                                      <p:cBhvr>
-                                        <p:cTn id="10" dur="1" fill="hold">
-                                          <p:stCondLst>
-                                            <p:cond delay="0"/>
-                                          </p:stCondLst>
-                                        </p:cTn>
-                                        <p:tgtEl>
-                                          <p:spTgt spid="3">
-                                            <p:txEl>
-                                              <p:pRg st="1" end="1"/>
-                                            </p:txEl>
-                                          </p:spTgt>
-                                        </p:tgtEl>
-                                        <p:attrNameLst>
-                                          <p:attrName>style.visibility</p:attrName>
-                                        </p:attrNameLst>
-                                      </p:cBhvr>
-                                      <p:to>
-                                        <p:strVal val="visible"/>
-                                      </p:to>
-                                    </p:set>
-                                  </p:childTnLst>
-                                </p:cTn>
-                              </p:par>
-                            </p:childTnLst>
-                          </p:cTn>
-                        </p:par>
-                      </p:childTnLst>
-                    </p:cTn>
-                  </p:par>
-                  <p:par>
-                    <p:cTn id="11" fill="hold">
-                      <p:stCondLst>
-                        <p:cond delay="indefinite"/>
-                      </p:stCondLst>
-                      <p:childTnLst>
-                        <p:par>
-                          <p:cTn id="12" fill="hold">
-                            <p:stCondLst>
-                              <p:cond delay="0"/>
-                            </p:stCondLst>
-                            <p:childTnLst>
-                              <p:par>
-                                <p:cTn id="13" presetID="1" presetClass="entr" presetSubtype="0" fill="hold" grpId="0" nodeType="clickEffect">
-                                  <p:stCondLst>
-                                    <p:cond delay="0"/>
-                                  </p:stCondLst>
-                                  <p:childTnLst>
-                                    <p:set>
-                                      <p:cBhvr>
-                                        <p:cTn id="14" dur="1" fill="hold">
-                                          <p:stCondLst>
-                                            <p:cond delay="0"/>
-                                          </p:stCondLst>
-                                        </p:cTn>
-                                        <p:tgtEl>
-                                          <p:spTgt spid="3">
-                                            <p:txEl>
-                                              <p:pRg st="2" end="2"/>
                                             </p:txEl>
                                           </p:spTgt>
                                         </p:tgtEl>
